--- a/tutorial/slides/MakeMyFigure_Tutorial_Seminar.pptx
+++ b/tutorial/slides/MakeMyFigure_Tutorial_Seminar.pptx
@@ -27,6 +27,12 @@
     <p:sldId id="269" r:id="rId24"/>
     <p:sldId id="270" r:id="rId25"/>
     <p:sldId id="271" r:id="rId26"/>
+    <p:sldId id="272" r:id="rId27"/>
+    <p:sldId id="273" r:id="rId28"/>
+    <p:sldId id="274" r:id="rId29"/>
+    <p:sldId id="275" r:id="rId30"/>
+    <p:sldId id="276" r:id="rId31"/>
+    <p:sldId id="277" r:id="rId32"/>
   </p:sldIdLst>
   <p:sldSz cx="10972800" cy="8229600" type="B4JIS"/>
   <p:notesSz cx="7023100" cy="9309100"/>
@@ -2138,7 +2144,7 @@
                 </a:solidFill>
                 <a:latin typeface="Arial"/>
               </a:rPr>
-              <a:t>From an ordinary data table to a publication figure, with the researcher in control</a:t>
+              <a:t>One dataset, many controlled views - publication figures with the researcher in control</a:t>
             </a:r>
           </a:p>
         </p:txBody>
@@ -2266,14 +2272,14 @@
                 </a:solidFill>
                 <a:latin typeface="Arial"/>
               </a:rPr>
-              <a:t>Reproducibility - PlotSpec versus Figure Package</a:t>
+              <a:t>Same data, different presentation - volcano</a:t>
             </a:r>
           </a:p>
         </p:txBody>
       </p:sp>
       <p:pic>
         <p:nvPicPr>
-          <p:cNvPr id="3" name="Picture 2" descr="03_package_confirmation.png"/>
+          <p:cNvPr id="3" name="Picture 2" descr="A_default_pres.png"/>
           <p:cNvPicPr>
             <a:picLocks noChangeAspect="1"/>
           </p:cNvPicPr>
@@ -2287,61 +2293,17 @@
         </p:blipFill>
         <p:spPr>
           <a:xfrm>
-            <a:off x="457200" y="1933042"/>
-            <a:ext cx="3291840" cy="2534716"/>
-          </a:xfrm>
-          <a:prstGeom prst="rect">
-            <a:avLst/>
-          </a:prstGeom>
-          <a:ln w="9525">
-            <a:solidFill>
-              <a:srgbClr val="C8C8C8"/>
-            </a:solidFill>
-          </a:ln>
+            <a:off x="457200" y="2603241"/>
+            <a:ext cx="4937760" cy="3023118"/>
+          </a:xfrm>
+          <a:prstGeom prst="rect">
+            <a:avLst/>
+          </a:prstGeom>
         </p:spPr>
       </p:pic>
-      <p:sp>
-        <p:nvSpPr>
-          <p:cNvPr id="4" name="TextBox 3"/>
-          <p:cNvSpPr txBox="1"/>
-          <p:nvPr/>
-        </p:nvSpPr>
-        <p:spPr>
-          <a:xfrm>
-            <a:off x="457200" y="4572000"/>
-            <a:ext cx="3291840" cy="457200"/>
-          </a:xfrm>
-          <a:prstGeom prst="rect">
-            <a:avLst/>
-          </a:prstGeom>
-          <a:noFill/>
-        </p:spPr>
-        <p:txBody>
-          <a:bodyPr wrap="square" anchor="t" lIns="45720" rIns="45720">
-            <a:spAutoFit/>
-          </a:bodyPr>
-          <a:lstStyle/>
-          <a:p>
-            <a:pPr algn="l">
-              <a:lnSpc>
-                <a:spcPct val="110000"/>
-              </a:lnSpc>
-            </a:pPr>
-            <a:r>
-              <a:rPr sz="1300" b="0">
-                <a:solidFill>
-                  <a:srgbClr val="666666"/>
-                </a:solidFill>
-                <a:latin typeface="Arial"/>
-              </a:rPr>
-              <a:t>What the package will contain - and a privacy reminder</a:t>
-            </a:r>
-          </a:p>
-        </p:txBody>
-      </p:sp>
       <p:pic>
         <p:nvPicPr>
-          <p:cNvPr id="5" name="Picture 4" descr="05_reopened_from_package.png"/>
+          <p:cNvPr id="4" name="Picture 3" descr="B_refined_pres.png"/>
           <p:cNvPicPr>
             <a:picLocks noChangeAspect="1"/>
           </p:cNvPicPr>
@@ -2355,29 +2317,24 @@
         </p:blipFill>
         <p:spPr>
           <a:xfrm>
-            <a:off x="3935578" y="1828800"/>
-            <a:ext cx="6759244" cy="4023360"/>
-          </a:xfrm>
-          <a:prstGeom prst="rect">
-            <a:avLst/>
-          </a:prstGeom>
-          <a:ln w="9525">
-            <a:solidFill>
-              <a:srgbClr val="C8C8C8"/>
-            </a:solidFill>
-          </a:ln>
+            <a:off x="5577840" y="2677647"/>
+            <a:ext cx="4937760" cy="2874305"/>
+          </a:xfrm>
+          <a:prstGeom prst="rect">
+            <a:avLst/>
+          </a:prstGeom>
         </p:spPr>
       </p:pic>
       <p:sp>
         <p:nvSpPr>
-          <p:cNvPr id="6" name="TextBox 5"/>
+          <p:cNvPr id="5" name="TextBox 4"/>
           <p:cNvSpPr txBox="1"/>
           <p:nvPr/>
         </p:nvSpPr>
         <p:spPr>
           <a:xfrm>
-            <a:off x="3931920" y="5852160"/>
-            <a:ext cx="6766560" cy="457200"/>
+            <a:off x="457200" y="6446520"/>
+            <a:ext cx="4937760" cy="457200"/>
           </a:xfrm>
           <a:prstGeom prst="rect">
             <a:avLst/>
@@ -2396,27 +2353,27 @@
               </a:lnSpc>
             </a:pPr>
             <a:r>
-              <a:rPr sz="1300" b="0">
+              <a:rPr sz="1400" b="0">
                 <a:solidFill>
                   <a:srgbClr val="666666"/>
                 </a:solidFill>
                 <a:latin typeface="Arial"/>
               </a:rPr>
-              <a:t>Reopened from the moved package: integrity verified; data, mapping and brackets restored</a:t>
-            </a:r>
-          </a:p>
-        </p:txBody>
-      </p:sp>
-      <p:sp>
-        <p:nvSpPr>
-          <p:cNvPr id="7" name="TextBox 6"/>
+              <a:t>default: raw P, ten labels</a:t>
+            </a:r>
+          </a:p>
+        </p:txBody>
+      </p:sp>
+      <p:sp>
+        <p:nvSpPr>
+          <p:cNvPr id="6" name="TextBox 5"/>
           <p:cNvSpPr txBox="1"/>
           <p:nvPr/>
         </p:nvSpPr>
         <p:spPr>
           <a:xfrm>
-            <a:off x="548640" y="6355080"/>
-            <a:ext cx="10058400" cy="1554480"/>
+            <a:off x="5577840" y="6446520"/>
+            <a:ext cx="4937760" cy="457200"/>
           </a:xfrm>
           <a:prstGeom prst="rect">
             <a:avLst/>
@@ -2424,46 +2381,63 @@
           <a:noFill/>
         </p:spPr>
         <p:txBody>
-          <a:bodyPr wrap="square" lIns="45720" rIns="45720">
+          <a:bodyPr wrap="square" anchor="t" lIns="45720" rIns="45720">
             <a:spAutoFit/>
           </a:bodyPr>
           <a:lstStyle/>
           <a:p>
-            <a:pPr>
-              <a:lnSpc>
-                <a:spcPct val="108000"/>
-              </a:lnSpc>
-              <a:spcAft>
-                <a:spcPts val="600"/>
-              </a:spcAft>
-            </a:pPr>
-            <a:r>
-              <a:rPr sz="1700" b="0">
-                <a:solidFill>
-                  <a:srgbClr val="111111"/>
-                </a:solidFill>
-                <a:latin typeface="Arial"/>
-              </a:rPr>
-              <a:t>• PlotSpec: specification with a digest of the source table; needs the data file to redraw</a:t>
-            </a:r>
-          </a:p>
-          <a:p>
-            <a:pPr>
-              <a:lnSpc>
-                <a:spcPct val="108000"/>
-              </a:lnSpc>
-              <a:spcAft>
-                <a:spcPts val="600"/>
-              </a:spcAft>
-            </a:pPr>
-            <a:r>
-              <a:rPr sz="1700" b="0">
-                <a:solidFill>
-                  <a:srgbClr val="111111"/>
-                </a:solidFill>
-                <a:latin typeface="Arial"/>
-              </a:rPr>
-              <a:t>• Figure Package: ZIP with manifest and SHA-256 per member, frozen table, original file, PlotSpec, StatsSpec, previews, environment</a:t>
+            <a:pPr algn="l">
+              <a:lnSpc>
+                <a:spcPct val="110000"/>
+              </a:lnSpc>
+            </a:pPr>
+            <a:r>
+              <a:rPr sz="1400" b="0">
+                <a:solidFill>
+                  <a:srgbClr val="666666"/>
+                </a:solidFill>
+                <a:latin typeface="Arial"/>
+              </a:rPr>
+              <a:t>refined: adjusted P (FDR), boxed labels, larger markers</a:t>
+            </a:r>
+          </a:p>
+        </p:txBody>
+      </p:sp>
+      <p:sp>
+        <p:nvSpPr>
+          <p:cNvPr id="7" name="TextBox 6"/>
+          <p:cNvSpPr txBox="1"/>
+          <p:nvPr/>
+        </p:nvSpPr>
+        <p:spPr>
+          <a:xfrm>
+            <a:off x="548640" y="6949440"/>
+            <a:ext cx="9875520" cy="731520"/>
+          </a:xfrm>
+          <a:prstGeom prst="rect">
+            <a:avLst/>
+          </a:prstGeom>
+          <a:noFill/>
+        </p:spPr>
+        <p:txBody>
+          <a:bodyPr wrap="square" anchor="t" lIns="45720" rIns="45720">
+            <a:spAutoFit/>
+          </a:bodyPr>
+          <a:lstStyle/>
+          <a:p>
+            <a:pPr algn="l">
+              <a:lnSpc>
+                <a:spcPct val="110000"/>
+              </a:lnSpc>
+            </a:pPr>
+            <a:r>
+              <a:rPr sz="1800" b="1">
+                <a:solidFill>
+                  <a:srgbClr val="1F2937"/>
+                </a:solidFill>
+                <a:latin typeface="Arial"/>
+              </a:rPr>
+              <a:t>1,200 features, identical values; the axis, labels and markers changed, the numbers did not.</a:t>
             </a:r>
           </a:p>
         </p:txBody>
@@ -2559,14 +2533,14 @@
                 </a:solidFill>
                 <a:latin typeface="Arial"/>
               </a:rPr>
-              <a:t>Figure Builder - panels with their own data</a:t>
+              <a:t>Same data, different presentation - clustered heatmap</a:t>
             </a:r>
           </a:p>
         </p:txBody>
       </p:sp>
       <p:pic>
         <p:nvPicPr>
-          <p:cNvPr id="3" name="Picture 2" descr="03_figure_builder.png"/>
+          <p:cNvPr id="3" name="Picture 2" descr="A_basic_pres.png"/>
           <p:cNvPicPr>
             <a:picLocks noChangeAspect="1"/>
           </p:cNvPicPr>
@@ -2580,29 +2554,48 @@
         </p:blipFill>
         <p:spPr>
           <a:xfrm>
-            <a:off x="1776288" y="1828800"/>
-            <a:ext cx="7603104" cy="4572000"/>
-          </a:xfrm>
-          <a:prstGeom prst="rect">
-            <a:avLst/>
-          </a:prstGeom>
-          <a:ln w="9525">
-            <a:solidFill>
-              <a:srgbClr val="C8C8C8"/>
-            </a:solidFill>
-          </a:ln>
+            <a:off x="1157262" y="1874520"/>
+            <a:ext cx="3537636" cy="4480560"/>
+          </a:xfrm>
+          <a:prstGeom prst="rect">
+            <a:avLst/>
+          </a:prstGeom>
         </p:spPr>
       </p:pic>
-      <p:sp>
-        <p:nvSpPr>
-          <p:cNvPr id="4" name="TextBox 3"/>
+      <p:pic>
+        <p:nvPicPr>
+          <p:cNvPr id="4" name="Picture 3" descr="B_refined_pres.png"/>
+          <p:cNvPicPr>
+            <a:picLocks noChangeAspect="1"/>
+          </p:cNvPicPr>
+          <p:nvPr/>
+        </p:nvPicPr>
+        <p:blipFill>
+          <a:blip r:embed="rId3"/>
+          <a:stretch>
+            <a:fillRect/>
+          </a:stretch>
+        </p:blipFill>
+        <p:spPr>
+          <a:xfrm>
+            <a:off x="6266199" y="1874520"/>
+            <a:ext cx="3561042" cy="4480560"/>
+          </a:xfrm>
+          <a:prstGeom prst="rect">
+            <a:avLst/>
+          </a:prstGeom>
+        </p:spPr>
+      </p:pic>
+      <p:sp>
+        <p:nvSpPr>
+          <p:cNvPr id="5" name="TextBox 4"/>
           <p:cNvSpPr txBox="1"/>
           <p:nvPr/>
         </p:nvSpPr>
         <p:spPr>
           <a:xfrm>
-            <a:off x="548640" y="6583680"/>
-            <a:ext cx="10058400" cy="1463040"/>
+            <a:off x="457200" y="6446520"/>
+            <a:ext cx="4937760" cy="457200"/>
           </a:xfrm>
           <a:prstGeom prst="rect">
             <a:avLst/>
@@ -2610,53 +2603,109 @@
           <a:noFill/>
         </p:spPr>
         <p:txBody>
-          <a:bodyPr wrap="square" lIns="45720" rIns="45720">
+          <a:bodyPr wrap="square" anchor="t" lIns="45720" rIns="45720">
             <a:spAutoFit/>
           </a:bodyPr>
           <a:lstStyle/>
           <a:p>
-            <a:pPr>
-              <a:lnSpc>
-                <a:spcPct val="108000"/>
-              </a:lnSpc>
-              <a:spcAft>
-                <a:spcPts val="600"/>
-              </a:spcAft>
-            </a:pPr>
-            <a:r>
-              <a:rPr sz="1700" b="0">
-                <a:solidFill>
-                  <a:srgbClr val="111111"/>
-                </a:solidFill>
-                <a:latin typeface="Arial"/>
-              </a:rPr>
-              <a:t>• Save any plot as a panel; import external panels; order sets the letters; width in mm; fonts applied to all panels</a:t>
-            </a:r>
-          </a:p>
-          <a:p>
-            <a:pPr>
-              <a:lnSpc>
-                <a:spcPct val="108000"/>
-              </a:lnSpc>
-              <a:spcAft>
-                <a:spcPts val="600"/>
-              </a:spcAft>
-            </a:pPr>
-            <a:r>
-              <a:rPr sz="1700" b="0">
-                <a:solidFill>
-                  <a:srgbClr val="111111"/>
-                </a:solidFill>
-                <a:latin typeface="Arial"/>
-              </a:rPr>
-              <a:t>• Save figure (PNG, PDF, SVG) and Save Figure Package (every panel with its table) - a draft legend is generated to be rewritten</a:t>
-            </a:r>
-          </a:p>
-        </p:txBody>
-      </p:sp>
-      <p:sp>
-        <p:nvSpPr>
-          <p:cNvPr id="5" name="TextBox 4"/>
+            <a:pPr algn="l">
+              <a:lnSpc>
+                <a:spcPct val="110000"/>
+              </a:lnSpc>
+            </a:pPr>
+            <a:r>
+              <a:rPr sz="1400" b="0">
+                <a:solidFill>
+                  <a:srgbClr val="666666"/>
+                </a:solidFill>
+                <a:latin typeface="Arial"/>
+              </a:rPr>
+              <a:t>basic: unscaled values, auto colormap, clustered columns</a:t>
+            </a:r>
+          </a:p>
+        </p:txBody>
+      </p:sp>
+      <p:sp>
+        <p:nvSpPr>
+          <p:cNvPr id="6" name="TextBox 5"/>
+          <p:cNvSpPr txBox="1"/>
+          <p:nvPr/>
+        </p:nvSpPr>
+        <p:spPr>
+          <a:xfrm>
+            <a:off x="5577840" y="6446520"/>
+            <a:ext cx="4937760" cy="457200"/>
+          </a:xfrm>
+          <a:prstGeom prst="rect">
+            <a:avLst/>
+          </a:prstGeom>
+          <a:noFill/>
+        </p:spPr>
+        <p:txBody>
+          <a:bodyPr wrap="square" anchor="t" lIns="45720" rIns="45720">
+            <a:spAutoFit/>
+          </a:bodyPr>
+          <a:lstStyle/>
+          <a:p>
+            <a:pPr algn="l">
+              <a:lnSpc>
+                <a:spcPct val="110000"/>
+              </a:lnSpc>
+            </a:pPr>
+            <a:r>
+              <a:rPr sz="1400" b="0">
+                <a:solidFill>
+                  <a:srgbClr val="666666"/>
+                </a:solidFill>
+                <a:latin typeface="Arial"/>
+              </a:rPr>
+              <a:t>refined: row z-score, RdBu_r, samples in file order</a:t>
+            </a:r>
+          </a:p>
+        </p:txBody>
+      </p:sp>
+      <p:sp>
+        <p:nvSpPr>
+          <p:cNvPr id="7" name="TextBox 6"/>
+          <p:cNvSpPr txBox="1"/>
+          <p:nvPr/>
+        </p:nvSpPr>
+        <p:spPr>
+          <a:xfrm>
+            <a:off x="548640" y="6949440"/>
+            <a:ext cx="9875520" cy="731520"/>
+          </a:xfrm>
+          <a:prstGeom prst="rect">
+            <a:avLst/>
+          </a:prstGeom>
+          <a:noFill/>
+        </p:spPr>
+        <p:txBody>
+          <a:bodyPr wrap="square" anchor="t" lIns="45720" rIns="45720">
+            <a:spAutoFit/>
+          </a:bodyPr>
+          <a:lstStyle/>
+          <a:p>
+            <a:pPr algn="l">
+              <a:lnSpc>
+                <a:spcPct val="110000"/>
+              </a:lnSpc>
+            </a:pPr>
+            <a:r>
+              <a:rPr sz="1800" b="1">
+                <a:solidFill>
+                  <a:srgbClr val="1F2937"/>
+                </a:solidFill>
+                <a:latin typeface="Arial"/>
+              </a:rPr>
+              <a:t>The same 30 most variable features. Scaling and colormap are presentation choices the reader must be told about.</a:t>
+            </a:r>
+          </a:p>
+        </p:txBody>
+      </p:sp>
+      <p:sp>
+        <p:nvSpPr>
+          <p:cNvPr id="8" name="TextBox 7"/>
           <p:cNvSpPr txBox="1"/>
           <p:nvPr/>
         </p:nvSpPr>
@@ -2745,95 +2794,59 @@
                 </a:solidFill>
                 <a:latin typeface="Arial"/>
               </a:rPr>
-              <a:t>The tutorial system - built against the real application</a:t>
-            </a:r>
-          </a:p>
-        </p:txBody>
-      </p:sp>
-      <p:sp>
-        <p:nvSpPr>
-          <p:cNvPr id="3" name="Rounded Rectangle 2"/>
-          <p:cNvSpPr/>
-          <p:nvPr/>
-        </p:nvSpPr>
-        <p:spPr>
-          <a:xfrm>
-            <a:off x="548640" y="2011680"/>
-            <a:ext cx="2286000" cy="1005840"/>
-          </a:xfrm>
-          <a:prstGeom prst="roundRect">
-            <a:avLst/>
-          </a:prstGeom>
-          <a:solidFill>
-            <a:srgbClr val="F2F4F7"/>
-          </a:solidFill>
-          <a:ln>
-            <a:solidFill>
-              <a:srgbClr val="C8D0DC"/>
-            </a:solidFill>
-          </a:ln>
-        </p:spPr>
-        <p:style>
-          <a:lnRef idx="1">
-            <a:schemeClr val="accent1"/>
-          </a:lnRef>
-          <a:fillRef idx="3">
-            <a:schemeClr val="accent1"/>
-          </a:fillRef>
-          <a:effectRef idx="2">
-            <a:schemeClr val="accent1"/>
-          </a:effectRef>
-          <a:fontRef idx="minor">
-            <a:schemeClr val="lt1"/>
-          </a:fontRef>
-        </p:style>
-        <p:txBody>
-          <a:bodyPr rtlCol="0" anchor="ctr"/>
-          <a:lstStyle/>
-          <a:p>
-            <a:pPr algn="ctr"/>
-          </a:p>
-        </p:txBody>
-      </p:sp>
-      <p:sp>
-        <p:nvSpPr>
-          <p:cNvPr id="4" name="TextBox 3"/>
-          <p:cNvSpPr txBox="1"/>
-          <p:nvPr/>
-        </p:nvSpPr>
-        <p:spPr>
-          <a:xfrm>
-            <a:off x="640080" y="2103120"/>
-            <a:ext cx="2103120" cy="822960"/>
-          </a:xfrm>
-          <a:prstGeom prst="rect">
-            <a:avLst/>
-          </a:prstGeom>
-          <a:noFill/>
-        </p:spPr>
-        <p:txBody>
-          <a:bodyPr wrap="square" anchor="ctr" lIns="45720" rIns="45720">
-            <a:spAutoFit/>
-          </a:bodyPr>
-          <a:lstStyle/>
-          <a:p>
-            <a:pPr algn="ctr">
-              <a:lnSpc>
-                <a:spcPct val="110000"/>
-              </a:lnSpc>
-            </a:pPr>
-            <a:r>
-              <a:rPr sz="1500" b="1">
-                <a:solidFill>
-                  <a:srgbClr val="1F2937"/>
-                </a:solidFill>
-                <a:latin typeface="Arial"/>
-              </a:rPr>
-              <a:t>tutorial action script</a:t>
-            </a:r>
-          </a:p>
-        </p:txBody>
-      </p:sp>
+              <a:t>Same data, different presentation - scatter with regression</a:t>
+            </a:r>
+          </a:p>
+        </p:txBody>
+      </p:sp>
+      <p:pic>
+        <p:nvPicPr>
+          <p:cNvPr id="3" name="Picture 2" descr="A_basic_pres.png"/>
+          <p:cNvPicPr>
+            <a:picLocks noChangeAspect="1"/>
+          </p:cNvPicPr>
+          <p:nvPr/>
+        </p:nvPicPr>
+        <p:blipFill>
+          <a:blip r:embed="rId2"/>
+          <a:stretch>
+            <a:fillRect/>
+          </a:stretch>
+        </p:blipFill>
+        <p:spPr>
+          <a:xfrm>
+            <a:off x="457200" y="2227520"/>
+            <a:ext cx="4937760" cy="3774560"/>
+          </a:xfrm>
+          <a:prstGeom prst="rect">
+            <a:avLst/>
+          </a:prstGeom>
+        </p:spPr>
+      </p:pic>
+      <p:pic>
+        <p:nvPicPr>
+          <p:cNvPr id="4" name="Picture 3" descr="B_refined_pres.png"/>
+          <p:cNvPicPr>
+            <a:picLocks noChangeAspect="1"/>
+          </p:cNvPicPr>
+          <p:nvPr/>
+        </p:nvPicPr>
+        <p:blipFill>
+          <a:blip r:embed="rId3"/>
+          <a:stretch>
+            <a:fillRect/>
+          </a:stretch>
+        </p:blipFill>
+        <p:spPr>
+          <a:xfrm>
+            <a:off x="5577840" y="2508274"/>
+            <a:ext cx="4937760" cy="3213052"/>
+          </a:xfrm>
+          <a:prstGeom prst="rect">
+            <a:avLst/>
+          </a:prstGeom>
+        </p:spPr>
+      </p:pic>
       <p:sp>
         <p:nvSpPr>
           <p:cNvPr id="5" name="TextBox 4"/>
@@ -2842,8 +2855,8 @@
         </p:nvSpPr>
         <p:spPr>
           <a:xfrm>
-            <a:off x="2834640" y="2240280"/>
-            <a:ext cx="365760" cy="548640"/>
+            <a:off x="457200" y="6446520"/>
+            <a:ext cx="4937760" cy="457200"/>
           </a:xfrm>
           <a:prstGeom prst="rect">
             <a:avLst/>
@@ -2856,117 +2869,33 @@
           </a:bodyPr>
           <a:lstStyle/>
           <a:p>
-            <a:pPr algn="ctr">
+            <a:pPr algn="l">
               <a:lnSpc>
                 <a:spcPct val="110000"/>
               </a:lnSpc>
             </a:pPr>
             <a:r>
-              <a:rPr sz="2400" b="0">
-                <a:solidFill>
-                  <a:srgbClr val="1D4E89"/>
-                </a:solidFill>
-                <a:latin typeface="Arial"/>
-              </a:rPr>
-              <a:t>→</a:t>
-            </a:r>
-          </a:p>
-        </p:txBody>
-      </p:sp>
-      <p:sp>
-        <p:nvSpPr>
-          <p:cNvPr id="6" name="Rounded Rectangle 5"/>
-          <p:cNvSpPr/>
-          <p:nvPr/>
-        </p:nvSpPr>
-        <p:spPr>
-          <a:xfrm>
-            <a:off x="3154680" y="2011680"/>
-            <a:ext cx="2286000" cy="1005840"/>
-          </a:xfrm>
-          <a:prstGeom prst="roundRect">
-            <a:avLst/>
-          </a:prstGeom>
-          <a:solidFill>
-            <a:srgbClr val="E3EBF5"/>
-          </a:solidFill>
-          <a:ln>
-            <a:solidFill>
-              <a:srgbClr val="C8D0DC"/>
-            </a:solidFill>
-          </a:ln>
-        </p:spPr>
-        <p:style>
-          <a:lnRef idx="1">
-            <a:schemeClr val="accent1"/>
-          </a:lnRef>
-          <a:fillRef idx="3">
-            <a:schemeClr val="accent1"/>
-          </a:fillRef>
-          <a:effectRef idx="2">
-            <a:schemeClr val="accent1"/>
-          </a:effectRef>
-          <a:fontRef idx="minor">
-            <a:schemeClr val="lt1"/>
-          </a:fontRef>
-        </p:style>
-        <p:txBody>
-          <a:bodyPr rtlCol="0" anchor="ctr"/>
-          <a:lstStyle/>
-          <a:p>
-            <a:pPr algn="ctr"/>
-          </a:p>
-        </p:txBody>
-      </p:sp>
-      <p:sp>
-        <p:nvSpPr>
-          <p:cNvPr id="7" name="TextBox 6"/>
+              <a:rPr sz="1400" b="0">
+                <a:solidFill>
+                  <a:srgbClr val="666666"/>
+                </a:solidFill>
+                <a:latin typeface="Arial"/>
+              </a:rPr>
+              <a:t>basic: two roles, one fit</a:t>
+            </a:r>
+          </a:p>
+        </p:txBody>
+      </p:sp>
+      <p:sp>
+        <p:nvSpPr>
+          <p:cNvPr id="6" name="TextBox 5"/>
           <p:cNvSpPr txBox="1"/>
           <p:nvPr/>
         </p:nvSpPr>
         <p:spPr>
           <a:xfrm>
-            <a:off x="3246120" y="2103120"/>
-            <a:ext cx="2103120" cy="822960"/>
-          </a:xfrm>
-          <a:prstGeom prst="rect">
-            <a:avLst/>
-          </a:prstGeom>
-          <a:noFill/>
-        </p:spPr>
-        <p:txBody>
-          <a:bodyPr wrap="square" anchor="ctr" lIns="45720" rIns="45720">
-            <a:spAutoFit/>
-          </a:bodyPr>
-          <a:lstStyle/>
-          <a:p>
-            <a:pPr algn="ctr">
-              <a:lnSpc>
-                <a:spcPct val="110000"/>
-              </a:lnSpc>
-            </a:pPr>
-            <a:r>
-              <a:rPr sz="1500" b="1">
-                <a:solidFill>
-                  <a:srgbClr val="1F2937"/>
-                </a:solidFill>
-                <a:latin typeface="Arial"/>
-              </a:rPr>
-              <a:t>driver operates the real MainWindow</a:t>
-            </a:r>
-          </a:p>
-        </p:txBody>
-      </p:sp>
-      <p:sp>
-        <p:nvSpPr>
-          <p:cNvPr id="8" name="TextBox 7"/>
-          <p:cNvSpPr txBox="1"/>
-          <p:nvPr/>
-        </p:nvSpPr>
-        <p:spPr>
-          <a:xfrm>
-            <a:off x="5440680" y="2240280"/>
-            <a:ext cx="365760" cy="548640"/>
+            <a:off x="5577840" y="6446520"/>
+            <a:ext cx="4937760" cy="457200"/>
           </a:xfrm>
           <a:prstGeom prst="rect">
             <a:avLst/>
@@ -2979,117 +2908,33 @@
           </a:bodyPr>
           <a:lstStyle/>
           <a:p>
-            <a:pPr algn="ctr">
+            <a:pPr algn="l">
               <a:lnSpc>
                 <a:spcPct val="110000"/>
               </a:lnSpc>
             </a:pPr>
             <a:r>
-              <a:rPr sz="2400" b="0">
-                <a:solidFill>
-                  <a:srgbClr val="1D4E89"/>
-                </a:solidFill>
-                <a:latin typeface="Arial"/>
-              </a:rPr>
-              <a:t>→</a:t>
-            </a:r>
-          </a:p>
-        </p:txBody>
-      </p:sp>
-      <p:sp>
-        <p:nvSpPr>
-          <p:cNvPr id="9" name="Rounded Rectangle 8"/>
-          <p:cNvSpPr/>
-          <p:nvPr/>
-        </p:nvSpPr>
-        <p:spPr>
-          <a:xfrm>
-            <a:off x="5760720" y="2011680"/>
-            <a:ext cx="2286000" cy="1005840"/>
-          </a:xfrm>
-          <a:prstGeom prst="roundRect">
-            <a:avLst/>
-          </a:prstGeom>
-          <a:solidFill>
-            <a:srgbClr val="F2F4F7"/>
-          </a:solidFill>
-          <a:ln>
-            <a:solidFill>
-              <a:srgbClr val="C8D0DC"/>
-            </a:solidFill>
-          </a:ln>
-        </p:spPr>
-        <p:style>
-          <a:lnRef idx="1">
-            <a:schemeClr val="accent1"/>
-          </a:lnRef>
-          <a:fillRef idx="3">
-            <a:schemeClr val="accent1"/>
-          </a:fillRef>
-          <a:effectRef idx="2">
-            <a:schemeClr val="accent1"/>
-          </a:effectRef>
-          <a:fontRef idx="minor">
-            <a:schemeClr val="lt1"/>
-          </a:fontRef>
-        </p:style>
-        <p:txBody>
-          <a:bodyPr rtlCol="0" anchor="ctr"/>
-          <a:lstStyle/>
-          <a:p>
-            <a:pPr algn="ctr"/>
-          </a:p>
-        </p:txBody>
-      </p:sp>
-      <p:sp>
-        <p:nvSpPr>
-          <p:cNvPr id="10" name="TextBox 9"/>
+              <a:rPr sz="1400" b="0">
+                <a:solidFill>
+                  <a:srgbClr val="666666"/>
+                </a:solidFill>
+                <a:latin typeface="Arial"/>
+              </a:rPr>
+              <a:t>refined: colour by cell line, per-group fit, r / R² / P / n</a:t>
+            </a:r>
+          </a:p>
+        </p:txBody>
+      </p:sp>
+      <p:sp>
+        <p:nvSpPr>
+          <p:cNvPr id="7" name="TextBox 6"/>
           <p:cNvSpPr txBox="1"/>
           <p:nvPr/>
         </p:nvSpPr>
         <p:spPr>
           <a:xfrm>
-            <a:off x="5852160" y="2103120"/>
-            <a:ext cx="2103120" cy="822960"/>
-          </a:xfrm>
-          <a:prstGeom prst="rect">
-            <a:avLst/>
-          </a:prstGeom>
-          <a:noFill/>
-        </p:spPr>
-        <p:txBody>
-          <a:bodyPr wrap="square" anchor="ctr" lIns="45720" rIns="45720">
-            <a:spAutoFit/>
-          </a:bodyPr>
-          <a:lstStyle/>
-          <a:p>
-            <a:pPr algn="ctr">
-              <a:lnSpc>
-                <a:spcPct val="110000"/>
-              </a:lnSpc>
-            </a:pPr>
-            <a:r>
-              <a:rPr sz="1500" b="1">
-                <a:solidFill>
-                  <a:srgbClr val="1F2937"/>
-                </a:solidFill>
-                <a:latin typeface="Arial"/>
-              </a:rPr>
-              <a:t>screenshots (offscreen) or video (on screen)</a:t>
-            </a:r>
-          </a:p>
-        </p:txBody>
-      </p:sp>
-      <p:sp>
-        <p:nvSpPr>
-          <p:cNvPr id="11" name="TextBox 10"/>
-          <p:cNvSpPr txBox="1"/>
-          <p:nvPr/>
-        </p:nvSpPr>
-        <p:spPr>
-          <a:xfrm>
-            <a:off x="8046720" y="2240280"/>
-            <a:ext cx="365760" cy="548640"/>
+            <a:off x="548640" y="6949440"/>
+            <a:ext cx="9875520" cy="731520"/>
           </a:xfrm>
           <a:prstGeom prst="rect">
             <a:avLst/>
@@ -3102,247 +2947,26 @@
           </a:bodyPr>
           <a:lstStyle/>
           <a:p>
-            <a:pPr algn="ctr">
+            <a:pPr algn="l">
               <a:lnSpc>
                 <a:spcPct val="110000"/>
               </a:lnSpc>
             </a:pPr>
             <a:r>
-              <a:rPr sz="2400" b="0">
-                <a:solidFill>
-                  <a:srgbClr val="1D4E89"/>
-                </a:solidFill>
-                <a:latin typeface="Arial"/>
-              </a:rPr>
-              <a:t>→</a:t>
-            </a:r>
-          </a:p>
-        </p:txBody>
-      </p:sp>
-      <p:sp>
-        <p:nvSpPr>
-          <p:cNvPr id="12" name="Rounded Rectangle 11"/>
-          <p:cNvSpPr/>
-          <p:nvPr/>
-        </p:nvSpPr>
-        <p:spPr>
-          <a:xfrm>
-            <a:off x="8366760" y="2011680"/>
-            <a:ext cx="2286000" cy="1005840"/>
-          </a:xfrm>
-          <a:prstGeom prst="roundRect">
-            <a:avLst/>
-          </a:prstGeom>
-          <a:solidFill>
-            <a:srgbClr val="E3EBF5"/>
-          </a:solidFill>
-          <a:ln>
-            <a:solidFill>
-              <a:srgbClr val="C8D0DC"/>
-            </a:solidFill>
-          </a:ln>
-        </p:spPr>
-        <p:style>
-          <a:lnRef idx="1">
-            <a:schemeClr val="accent1"/>
-          </a:lnRef>
-          <a:fillRef idx="3">
-            <a:schemeClr val="accent1"/>
-          </a:fillRef>
-          <a:effectRef idx="2">
-            <a:schemeClr val="accent1"/>
-          </a:effectRef>
-          <a:fontRef idx="minor">
-            <a:schemeClr val="lt1"/>
-          </a:fontRef>
-        </p:style>
-        <p:txBody>
-          <a:bodyPr rtlCol="0" anchor="ctr"/>
-          <a:lstStyle/>
-          <a:p>
-            <a:pPr algn="ctr"/>
-          </a:p>
-        </p:txBody>
-      </p:sp>
-      <p:sp>
-        <p:nvSpPr>
-          <p:cNvPr id="13" name="TextBox 12"/>
-          <p:cNvSpPr txBox="1"/>
-          <p:nvPr/>
-        </p:nvSpPr>
-        <p:spPr>
-          <a:xfrm>
-            <a:off x="8458200" y="2103120"/>
-            <a:ext cx="2103120" cy="822960"/>
-          </a:xfrm>
-          <a:prstGeom prst="rect">
-            <a:avLst/>
-          </a:prstGeom>
-          <a:noFill/>
-        </p:spPr>
-        <p:txBody>
-          <a:bodyPr wrap="square" anchor="ctr" lIns="45720" rIns="45720">
-            <a:spAutoFit/>
-          </a:bodyPr>
-          <a:lstStyle/>
-          <a:p>
-            <a:pPr algn="ctr">
-              <a:lnSpc>
-                <a:spcPct val="110000"/>
-              </a:lnSpc>
-            </a:pPr>
-            <a:r>
-              <a:rPr sz="1500" b="1">
+              <a:rPr sz="1800" b="1">
                 <a:solidFill>
                   <a:srgbClr val="1F2937"/>
                 </a:solidFill>
                 <a:latin typeface="Arial"/>
               </a:rPr>
-              <a:t>validation record PASS / FAIL</a:t>
-            </a:r>
-          </a:p>
-        </p:txBody>
-      </p:sp>
-      <p:sp>
-        <p:nvSpPr>
-          <p:cNvPr id="14" name="TextBox 13"/>
-          <p:cNvSpPr txBox="1"/>
-          <p:nvPr/>
-        </p:nvSpPr>
-        <p:spPr>
-          <a:xfrm>
-            <a:off x="548640" y="3383280"/>
-            <a:ext cx="10058400" cy="4389120"/>
-          </a:xfrm>
-          <a:prstGeom prst="rect">
-            <a:avLst/>
-          </a:prstGeom>
-          <a:noFill/>
-        </p:spPr>
-        <p:txBody>
-          <a:bodyPr wrap="square" lIns="45720" rIns="45720">
-            <a:spAutoFit/>
-          </a:bodyPr>
-          <a:lstStyle/>
-          <a:p>
-            <a:pPr>
-              <a:lnSpc>
-                <a:spcPct val="108000"/>
-              </a:lnSpc>
-              <a:spcAft>
-                <a:spcPts val="600"/>
-              </a:spcAft>
-            </a:pPr>
-            <a:r>
-              <a:rPr sz="1600" b="0">
-                <a:solidFill>
-                  <a:srgbClr val="111111"/>
-                </a:solidFill>
-                <a:latin typeface="Arial"/>
-              </a:rPr>
-              <a:t>• No mock-ups: every screenshot is a grab of the production PySide6 widgets; every step is performed through the widgets a user would click</a:t>
-            </a:r>
-          </a:p>
-          <a:p>
-            <a:pPr>
-              <a:lnSpc>
-                <a:spcPct val="108000"/>
-              </a:lnSpc>
-              <a:spcAft>
-                <a:spcPts val="600"/>
-              </a:spcAft>
-            </a:pPr>
-            <a:r>
-              <a:rPr sz="1600" b="0">
-                <a:solidFill>
-                  <a:srgbClr val="111111"/>
-                </a:solidFill>
-                <a:latin typeface="Arial"/>
-              </a:rPr>
-              <a:t>• Same script, two modes: offscreen for deterministic screenshots (1680 x 1000, empty settings and presets), on screen for video recording - recording is separate (ffmpeg, OBS, OS recorder)</a:t>
-            </a:r>
-          </a:p>
-          <a:p>
-            <a:pPr>
-              <a:lnSpc>
-                <a:spcPct val="108000"/>
-              </a:lnSpc>
-              <a:spcAft>
-                <a:spcPts val="600"/>
-              </a:spcAft>
-            </a:pPr>
-            <a:r>
-              <a:rPr sz="1600" b="0">
-                <a:solidFill>
-                  <a:srgbClr val="111111"/>
-                </a:solidFill>
-                <a:latin typeface="Arial"/>
-              </a:rPr>
-              <a:t>• Inventory read from the live plot registry: 39 plot types, tutorial and video status per plot; a new plot type appears as MISSING</a:t>
-            </a:r>
-          </a:p>
-          <a:p>
-            <a:pPr>
-              <a:lnSpc>
-                <a:spcPct val="108000"/>
-              </a:lnSpc>
-              <a:spcAft>
-                <a:spcPts val="600"/>
-              </a:spcAft>
-            </a:pPr>
-            <a:r>
-              <a:rPr sz="1600" b="0">
-                <a:solidFill>
-                  <a:srgbClr val="111111"/>
-                </a:solidFill>
-                <a:latin typeface="Arial"/>
-              </a:rPr>
-              <a:t>• Facts recorded during the run (proposed roles, option names, messages) are what the written tutorial quotes - drift is caught by re-running</a:t>
-            </a:r>
-          </a:p>
-          <a:p>
-            <a:pPr>
-              <a:lnSpc>
-                <a:spcPct val="108000"/>
-              </a:lnSpc>
-              <a:spcAft>
-                <a:spcPts val="600"/>
-              </a:spcAft>
-            </a:pPr>
-            <a:r>
-              <a:rPr sz="1600" b="0">
-                <a:solidFill>
-                  <a:srgbClr val="111111"/>
-                </a:solidFill>
-                <a:latin typeface="Arial"/>
-              </a:rPr>
-              <a:t>• Sixteen simulated datasets with fixed seeds support all plots; one table deliberately has bad column names, one supports nine plots</a:t>
-            </a:r>
-          </a:p>
-          <a:p>
-            <a:pPr>
-              <a:lnSpc>
-                <a:spcPct val="108000"/>
-              </a:lnSpc>
-              <a:spcAft>
-                <a:spcPts val="600"/>
-              </a:spcAft>
-            </a:pPr>
-            <a:r>
-              <a:rPr sz="1600" b="0">
-                <a:solidFill>
-                  <a:srgbClr val="111111"/>
-                </a:solidFill>
-                <a:latin typeface="Arial"/>
-              </a:rPr>
-              <a:t>• Gallery, manifest, HTML copy and validation report regenerated by script; videos link through placeholders until a platform is chosen</a:t>
-            </a:r>
-          </a:p>
-        </p:txBody>
-      </p:sp>
-      <p:sp>
-        <p:nvSpPr>
-          <p:cNvPr id="15" name="TextBox 14"/>
+              <a:t>Adding a colour role turns one regression into one per group; the sixty points are the same.</a:t>
+            </a:r>
+          </a:p>
+        </p:txBody>
+      </p:sp>
+      <p:sp>
+        <p:nvSpPr>
+          <p:cNvPr id="8" name="TextBox 7"/>
           <p:cNvSpPr txBox="1"/>
           <p:nvPr/>
         </p:nvSpPr>
@@ -3431,7 +3055,2101 @@
                 </a:solidFill>
                 <a:latin typeface="Arial"/>
               </a:rPr>
-              <a:t>Pilot validation - every instruction executed against the application</a:t>
+              <a:t>Same data, different presentation - Kaplan-Meier</a:t>
+            </a:r>
+          </a:p>
+        </p:txBody>
+      </p:sp>
+      <p:pic>
+        <p:nvPicPr>
+          <p:cNvPr id="3" name="Picture 2" descr="A_default_pres.png"/>
+          <p:cNvPicPr>
+            <a:picLocks noChangeAspect="1"/>
+          </p:cNvPicPr>
+          <p:nvPr/>
+        </p:nvPicPr>
+        <p:blipFill>
+          <a:blip r:embed="rId2"/>
+          <a:stretch>
+            <a:fillRect/>
+          </a:stretch>
+        </p:blipFill>
+        <p:spPr>
+          <a:xfrm>
+            <a:off x="457200" y="2175632"/>
+            <a:ext cx="4937760" cy="3878335"/>
+          </a:xfrm>
+          <a:prstGeom prst="rect">
+            <a:avLst/>
+          </a:prstGeom>
+        </p:spPr>
+      </p:pic>
+      <p:pic>
+        <p:nvPicPr>
+          <p:cNvPr id="4" name="Picture 3" descr="B_refined_pres.png"/>
+          <p:cNvPicPr>
+            <a:picLocks noChangeAspect="1"/>
+          </p:cNvPicPr>
+          <p:nvPr/>
+        </p:nvPicPr>
+        <p:blipFill>
+          <a:blip r:embed="rId3"/>
+          <a:stretch>
+            <a:fillRect/>
+          </a:stretch>
+        </p:blipFill>
+        <p:spPr>
+          <a:xfrm>
+            <a:off x="5577840" y="2173299"/>
+            <a:ext cx="4937760" cy="3883002"/>
+          </a:xfrm>
+          <a:prstGeom prst="rect">
+            <a:avLst/>
+          </a:prstGeom>
+        </p:spPr>
+      </p:pic>
+      <p:sp>
+        <p:nvSpPr>
+          <p:cNvPr id="5" name="TextBox 4"/>
+          <p:cNvSpPr txBox="1"/>
+          <p:nvPr/>
+        </p:nvSpPr>
+        <p:spPr>
+          <a:xfrm>
+            <a:off x="457200" y="6446520"/>
+            <a:ext cx="4937760" cy="457200"/>
+          </a:xfrm>
+          <a:prstGeom prst="rect">
+            <a:avLst/>
+          </a:prstGeom>
+          <a:noFill/>
+        </p:spPr>
+        <p:txBody>
+          <a:bodyPr wrap="square" anchor="t" lIns="45720" rIns="45720">
+            <a:spAutoFit/>
+          </a:bodyPr>
+          <a:lstStyle/>
+          <a:p>
+            <a:pPr algn="l">
+              <a:lnSpc>
+                <a:spcPct val="110000"/>
+              </a:lnSpc>
+            </a:pPr>
+            <a:r>
+              <a:rPr sz="1400" b="0">
+                <a:solidFill>
+                  <a:srgbClr val="666666"/>
+                </a:solidFill>
+                <a:latin typeface="Arial"/>
+              </a:rPr>
+              <a:t>default: fraction, auto ticks</a:t>
+            </a:r>
+          </a:p>
+        </p:txBody>
+      </p:sp>
+      <p:sp>
+        <p:nvSpPr>
+          <p:cNvPr id="6" name="TextBox 5"/>
+          <p:cNvSpPr txBox="1"/>
+          <p:nvPr/>
+        </p:nvSpPr>
+        <p:spPr>
+          <a:xfrm>
+            <a:off x="5577840" y="6446520"/>
+            <a:ext cx="4937760" cy="457200"/>
+          </a:xfrm>
+          <a:prstGeom prst="rect">
+            <a:avLst/>
+          </a:prstGeom>
+          <a:noFill/>
+        </p:spPr>
+        <p:txBody>
+          <a:bodyPr wrap="square" anchor="t" lIns="45720" rIns="45720">
+            <a:spAutoFit/>
+          </a:bodyPr>
+          <a:lstStyle/>
+          <a:p>
+            <a:pPr algn="l">
+              <a:lnSpc>
+                <a:spcPct val="110000"/>
+              </a:lnSpc>
+            </a:pPr>
+            <a:r>
+              <a:rPr sz="1400" b="0">
+                <a:solidFill>
+                  <a:srgbClr val="666666"/>
+                </a:solidFill>
+                <a:latin typeface="Arial"/>
+              </a:rPr>
+              <a:t>refined: percent, 50 % reference, log-rank P on the figure</a:t>
+            </a:r>
+          </a:p>
+        </p:txBody>
+      </p:sp>
+      <p:sp>
+        <p:nvSpPr>
+          <p:cNvPr id="7" name="TextBox 6"/>
+          <p:cNvSpPr txBox="1"/>
+          <p:nvPr/>
+        </p:nvSpPr>
+        <p:spPr>
+          <a:xfrm>
+            <a:off x="548640" y="6949440"/>
+            <a:ext cx="9875520" cy="731520"/>
+          </a:xfrm>
+          <a:prstGeom prst="rect">
+            <a:avLst/>
+          </a:prstGeom>
+          <a:noFill/>
+        </p:spPr>
+        <p:txBody>
+          <a:bodyPr wrap="square" anchor="t" lIns="45720" rIns="45720">
+            <a:spAutoFit/>
+          </a:bodyPr>
+          <a:lstStyle/>
+          <a:p>
+            <a:pPr algn="l">
+              <a:lnSpc>
+                <a:spcPct val="110000"/>
+              </a:lnSpc>
+            </a:pPr>
+            <a:r>
+              <a:rPr sz="1800" b="1">
+                <a:solidFill>
+                  <a:srgbClr val="1F2937"/>
+                </a:solidFill>
+                <a:latin typeface="Arial"/>
+              </a:rPr>
+              <a:t>Eighty subjects, the same curves; the log-rank test is written on the figure and stored with it.</a:t>
+            </a:r>
+          </a:p>
+        </p:txBody>
+      </p:sp>
+      <p:sp>
+        <p:nvSpPr>
+          <p:cNvPr id="8" name="TextBox 7"/>
+          <p:cNvSpPr txBox="1"/>
+          <p:nvPr/>
+        </p:nvSpPr>
+        <p:spPr>
+          <a:xfrm>
+            <a:off x="457200" y="7818120"/>
+            <a:ext cx="7315200" cy="274320"/>
+          </a:xfrm>
+          <a:prstGeom prst="rect">
+            <a:avLst/>
+          </a:prstGeom>
+          <a:noFill/>
+        </p:spPr>
+        <p:txBody>
+          <a:bodyPr wrap="square" anchor="t" lIns="45720" rIns="45720">
+            <a:spAutoFit/>
+          </a:bodyPr>
+          <a:lstStyle/>
+          <a:p>
+            <a:pPr algn="l">
+              <a:lnSpc>
+                <a:spcPct val="110000"/>
+              </a:lnSpc>
+            </a:pPr>
+            <a:r>
+              <a:rPr sz="1000" b="0">
+                <a:solidFill>
+                  <a:srgbClr val="666666"/>
+                </a:solidFill>
+                <a:latin typeface="Arial"/>
+              </a:rPr>
+              <a:t>Make My Figure - desktop tutorial   |   13</a:t>
+            </a:r>
+          </a:p>
+        </p:txBody>
+      </p:sp>
+    </p:spTree>
+  </p:cSld>
+  <p:clrMapOvr>
+    <a:masterClrMapping/>
+  </p:clrMapOvr>
+</p:sld>
+</file>
+
+<file path=ppt/slides/slide14.xml><?xml version="1.0" encoding="utf-8"?>
+<p:sld xmlns:a="http://schemas.openxmlformats.org/drawingml/2006/main" xmlns:p="http://schemas.openxmlformats.org/presentationml/2006/main" xmlns:r="http://schemas.openxmlformats.org/officeDocument/2006/relationships">
+  <p:cSld>
+    <p:spTree>
+      <p:nvGrpSpPr>
+        <p:cNvPr id="1" name=""/>
+        <p:cNvGrpSpPr/>
+        <p:nvPr/>
+      </p:nvGrpSpPr>
+      <p:grpSpPr/>
+      <p:sp>
+        <p:nvSpPr>
+          <p:cNvPr id="2" name="TextBox 1"/>
+          <p:cNvSpPr txBox="1"/>
+          <p:nvPr/>
+        </p:nvSpPr>
+        <p:spPr>
+          <a:xfrm>
+            <a:off x="1691640" y="384048"/>
+            <a:ext cx="8869680" cy="1005840"/>
+          </a:xfrm>
+          <a:prstGeom prst="rect">
+            <a:avLst/>
+          </a:prstGeom>
+          <a:noFill/>
+        </p:spPr>
+        <p:txBody>
+          <a:bodyPr wrap="square" anchor="ctr" lIns="45720" rIns="45720">
+            <a:spAutoFit/>
+          </a:bodyPr>
+          <a:lstStyle/>
+          <a:p>
+            <a:pPr algn="l">
+              <a:lnSpc>
+                <a:spcPct val="110000"/>
+              </a:lnSpc>
+            </a:pPr>
+            <a:r>
+              <a:rPr sz="2800" b="1">
+                <a:solidFill>
+                  <a:srgbClr val="1F2937"/>
+                </a:solidFill>
+                <a:latin typeface="Arial"/>
+              </a:rPr>
+              <a:t>From an ambiguous table to a publication figure</a:t>
+            </a:r>
+          </a:p>
+        </p:txBody>
+      </p:sp>
+      <p:pic>
+        <p:nvPicPr>
+          <p:cNvPr id="3" name="Picture 2" descr="showcase_excerpt.png"/>
+          <p:cNvPicPr>
+            <a:picLocks noChangeAspect="1"/>
+          </p:cNvPicPr>
+          <p:nvPr/>
+        </p:nvPicPr>
+        <p:blipFill>
+          <a:blip r:embed="rId2"/>
+          <a:stretch>
+            <a:fillRect/>
+          </a:stretch>
+        </p:blipFill>
+        <p:spPr>
+          <a:xfrm>
+            <a:off x="1258096" y="1874520"/>
+            <a:ext cx="3244528" cy="2103120"/>
+          </a:xfrm>
+          <a:prstGeom prst="rect">
+            <a:avLst/>
+          </a:prstGeom>
+        </p:spPr>
+      </p:pic>
+      <p:sp>
+        <p:nvSpPr>
+          <p:cNvPr id="4" name="TextBox 3"/>
+          <p:cNvSpPr txBox="1"/>
+          <p:nvPr/>
+        </p:nvSpPr>
+        <p:spPr>
+          <a:xfrm>
+            <a:off x="457200" y="4023359"/>
+            <a:ext cx="4846320" cy="457200"/>
+          </a:xfrm>
+          <a:prstGeom prst="rect">
+            <a:avLst/>
+          </a:prstGeom>
+          <a:noFill/>
+        </p:spPr>
+        <p:txBody>
+          <a:bodyPr wrap="square" anchor="t" lIns="45720" rIns="45720">
+            <a:spAutoFit/>
+          </a:bodyPr>
+          <a:lstStyle/>
+          <a:p>
+            <a:pPr algn="l">
+              <a:lnSpc>
+                <a:spcPct val="110000"/>
+              </a:lnSpc>
+            </a:pPr>
+            <a:r>
+              <a:rPr sz="1400" b="0">
+                <a:solidFill>
+                  <a:srgbClr val="666666"/>
+                </a:solidFill>
+                <a:latin typeface="Arial"/>
+              </a:rPr>
+              <a:t>1  open the table: 40 animals, 4 groups, unequal n</a:t>
+            </a:r>
+          </a:p>
+        </p:txBody>
+      </p:sp>
+      <p:sp>
+        <p:nvSpPr>
+          <p:cNvPr id="5" name="TextBox 4"/>
+          <p:cNvSpPr txBox="1"/>
+          <p:nvPr/>
+        </p:nvSpPr>
+        <p:spPr>
+          <a:xfrm>
+            <a:off x="5349240" y="2651760"/>
+            <a:ext cx="457200" cy="731520"/>
+          </a:xfrm>
+          <a:prstGeom prst="rect">
+            <a:avLst/>
+          </a:prstGeom>
+          <a:noFill/>
+        </p:spPr>
+        <p:txBody>
+          <a:bodyPr wrap="square" anchor="t" lIns="45720" rIns="45720">
+            <a:spAutoFit/>
+          </a:bodyPr>
+          <a:lstStyle/>
+          <a:p>
+            <a:pPr algn="ctr">
+              <a:lnSpc>
+                <a:spcPct val="110000"/>
+              </a:lnSpc>
+            </a:pPr>
+            <a:r>
+              <a:rPr sz="3600" b="0">
+                <a:solidFill>
+                  <a:srgbClr val="1D4E89"/>
+                </a:solidFill>
+                <a:latin typeface="Arial"/>
+              </a:rPr>
+              <a:t>→</a:t>
+            </a:r>
+          </a:p>
+        </p:txBody>
+      </p:sp>
+      <p:pic>
+        <p:nvPicPr>
+          <p:cNvPr id="6" name="Picture 5" descr="observations_jitter_07b_options_after_0_0_566.png"/>
+          <p:cNvPicPr>
+            <a:picLocks noChangeAspect="1"/>
+          </p:cNvPicPr>
+          <p:nvPr/>
+        </p:nvPicPr>
+        <p:blipFill>
+          <a:blip r:embed="rId3"/>
+          <a:stretch>
+            <a:fillRect/>
+          </a:stretch>
+        </p:blipFill>
+        <p:spPr>
+          <a:xfrm>
+            <a:off x="5669280" y="1879205"/>
+            <a:ext cx="4937760" cy="2093749"/>
+          </a:xfrm>
+          <a:prstGeom prst="rect">
+            <a:avLst/>
+          </a:prstGeom>
+          <a:ln w="9525">
+            <a:solidFill>
+              <a:srgbClr val="C8C8C8"/>
+            </a:solidFill>
+          </a:ln>
+        </p:spPr>
+      </p:pic>
+      <p:sp>
+        <p:nvSpPr>
+          <p:cNvPr id="7" name="TextBox 6"/>
+          <p:cNvSpPr txBox="1"/>
+          <p:nvPr/>
+        </p:nvSpPr>
+        <p:spPr>
+          <a:xfrm>
+            <a:off x="5669280" y="4023359"/>
+            <a:ext cx="4937760" cy="457200"/>
+          </a:xfrm>
+          <a:prstGeom prst="rect">
+            <a:avLst/>
+          </a:prstGeom>
+          <a:noFill/>
+        </p:spPr>
+        <p:txBody>
+          <a:bodyPr wrap="square" anchor="t" lIns="45720" rIns="45720">
+            <a:spAutoFit/>
+          </a:bodyPr>
+          <a:lstStyle/>
+          <a:p>
+            <a:pPr algn="l">
+              <a:lnSpc>
+                <a:spcPct val="110000"/>
+              </a:lnSpc>
+            </a:pPr>
+            <a:r>
+              <a:rPr sz="1400" b="0">
+                <a:solidFill>
+                  <a:srgbClr val="666666"/>
+                </a:solidFill>
+                <a:latin typeface="Arial"/>
+              </a:rPr>
+              <a:t>2  map the roles; choose how the observations are drawn</a:t>
+            </a:r>
+          </a:p>
+        </p:txBody>
+      </p:sp>
+      <p:pic>
+        <p:nvPicPr>
+          <p:cNvPr id="8" name="Picture 7" descr="B_box_points_outline_preset_pres.png"/>
+          <p:cNvPicPr>
+            <a:picLocks noChangeAspect="1"/>
+          </p:cNvPicPr>
+          <p:nvPr/>
+        </p:nvPicPr>
+        <p:blipFill>
+          <a:blip r:embed="rId4"/>
+          <a:stretch>
+            <a:fillRect/>
+          </a:stretch>
+        </p:blipFill>
+        <p:spPr>
+          <a:xfrm>
+            <a:off x="457200" y="4532978"/>
+            <a:ext cx="3566160" cy="2821243"/>
+          </a:xfrm>
+          <a:prstGeom prst="rect">
+            <a:avLst/>
+          </a:prstGeom>
+        </p:spPr>
+      </p:pic>
+      <p:sp>
+        <p:nvSpPr>
+          <p:cNvPr id="9" name="TextBox 8"/>
+          <p:cNvSpPr txBox="1"/>
+          <p:nvPr/>
+        </p:nvSpPr>
+        <p:spPr>
+          <a:xfrm>
+            <a:off x="457200" y="7452360"/>
+            <a:ext cx="3657600" cy="457200"/>
+          </a:xfrm>
+          <a:prstGeom prst="rect">
+            <a:avLst/>
+          </a:prstGeom>
+          <a:noFill/>
+        </p:spPr>
+        <p:txBody>
+          <a:bodyPr wrap="square" anchor="t" lIns="45720" rIns="45720">
+            <a:spAutoFit/>
+          </a:bodyPr>
+          <a:lstStyle/>
+          <a:p>
+            <a:pPr algn="l">
+              <a:lnSpc>
+                <a:spcPct val="110000"/>
+              </a:lnSpc>
+            </a:pPr>
+            <a:r>
+              <a:rPr sz="1400" b="0">
+                <a:solidFill>
+                  <a:srgbClr val="666666"/>
+                </a:solidFill>
+                <a:latin typeface="Arial"/>
+              </a:rPr>
+              <a:t>3  statistics, publication preset, export</a:t>
+            </a:r>
+          </a:p>
+        </p:txBody>
+      </p:sp>
+      <p:sp>
+        <p:nvSpPr>
+          <p:cNvPr id="10" name="TextBox 9"/>
+          <p:cNvSpPr txBox="1"/>
+          <p:nvPr/>
+        </p:nvSpPr>
+        <p:spPr>
+          <a:xfrm>
+            <a:off x="4480560" y="4846320"/>
+            <a:ext cx="6126480" cy="2377440"/>
+          </a:xfrm>
+          <a:prstGeom prst="rect">
+            <a:avLst/>
+          </a:prstGeom>
+          <a:noFill/>
+        </p:spPr>
+        <p:txBody>
+          <a:bodyPr wrap="square" anchor="t" lIns="45720" rIns="45720">
+            <a:spAutoFit/>
+          </a:bodyPr>
+          <a:lstStyle/>
+          <a:p>
+            <a:pPr algn="l">
+              <a:lnSpc>
+                <a:spcPct val="110000"/>
+              </a:lnSpc>
+            </a:pPr>
+            <a:r>
+              <a:rPr sz="1900" b="0">
+                <a:solidFill>
+                  <a:srgbClr val="1F2937"/>
+                </a:solidFill>
+                <a:latin typeface="Arial"/>
+              </a:rPr>
+              <a:t>Open, map, draw, test, preset, export.</a:t>
+            </a:r>
+          </a:p>
+          <a:p>
+            <a:pPr algn="l">
+              <a:lnSpc>
+                <a:spcPct val="110000"/>
+              </a:lnSpc>
+            </a:pPr>
+            <a:r>
+              <a:rPr sz="1900" b="0">
+                <a:solidFill>
+                  <a:srgbClr val="1F2937"/>
+                </a:solidFill>
+                <a:latin typeface="Arial"/>
+              </a:rPr>
+              <a:t/>
+            </a:r>
+          </a:p>
+          <a:p>
+            <a:pPr algn="l">
+              <a:lnSpc>
+                <a:spcPct val="110000"/>
+              </a:lnSpc>
+            </a:pPr>
+            <a:r>
+              <a:rPr sz="1900" b="0">
+                <a:solidFill>
+                  <a:srgbClr val="1F2937"/>
+                </a:solidFill>
+                <a:latin typeface="Arial"/>
+              </a:rPr>
+              <a:t>Five minutes from a table with unnamed columns to a figure with brackets, a methods sentence, its PlotSpec and a Figure Package.</a:t>
+            </a:r>
+          </a:p>
+        </p:txBody>
+      </p:sp>
+      <p:sp>
+        <p:nvSpPr>
+          <p:cNvPr id="11" name="TextBox 10"/>
+          <p:cNvSpPr txBox="1"/>
+          <p:nvPr/>
+        </p:nvSpPr>
+        <p:spPr>
+          <a:xfrm>
+            <a:off x="457200" y="7818120"/>
+            <a:ext cx="7315200" cy="274320"/>
+          </a:xfrm>
+          <a:prstGeom prst="rect">
+            <a:avLst/>
+          </a:prstGeom>
+          <a:noFill/>
+        </p:spPr>
+        <p:txBody>
+          <a:bodyPr wrap="square" anchor="t" lIns="45720" rIns="45720">
+            <a:spAutoFit/>
+          </a:bodyPr>
+          <a:lstStyle/>
+          <a:p>
+            <a:pPr algn="l">
+              <a:lnSpc>
+                <a:spcPct val="110000"/>
+              </a:lnSpc>
+            </a:pPr>
+            <a:r>
+              <a:rPr sz="1000" b="0">
+                <a:solidFill>
+                  <a:srgbClr val="666666"/>
+                </a:solidFill>
+                <a:latin typeface="Arial"/>
+              </a:rPr>
+              <a:t>Make My Figure - desktop tutorial   |   14</a:t>
+            </a:r>
+          </a:p>
+        </p:txBody>
+      </p:sp>
+    </p:spTree>
+  </p:cSld>
+  <p:clrMapOvr>
+    <a:masterClrMapping/>
+  </p:clrMapOvr>
+</p:sld>
+</file>
+
+<file path=ppt/slides/slide15.xml><?xml version="1.0" encoding="utf-8"?>
+<p:sld xmlns:a="http://schemas.openxmlformats.org/drawingml/2006/main" xmlns:p="http://schemas.openxmlformats.org/presentationml/2006/main" xmlns:r="http://schemas.openxmlformats.org/officeDocument/2006/relationships">
+  <p:cSld>
+    <p:spTree>
+      <p:nvGrpSpPr>
+        <p:cNvPr id="1" name=""/>
+        <p:cNvGrpSpPr/>
+        <p:nvPr/>
+      </p:nvGrpSpPr>
+      <p:grpSpPr/>
+      <p:sp>
+        <p:nvSpPr>
+          <p:cNvPr id="2" name="TextBox 1"/>
+          <p:cNvSpPr txBox="1"/>
+          <p:nvPr/>
+        </p:nvSpPr>
+        <p:spPr>
+          <a:xfrm>
+            <a:off x="1691640" y="384048"/>
+            <a:ext cx="8869680" cy="1005840"/>
+          </a:xfrm>
+          <a:prstGeom prst="rect">
+            <a:avLst/>
+          </a:prstGeom>
+          <a:noFill/>
+        </p:spPr>
+        <p:txBody>
+          <a:bodyPr wrap="square" anchor="ctr" lIns="45720" rIns="45720">
+            <a:spAutoFit/>
+          </a:bodyPr>
+          <a:lstStyle/>
+          <a:p>
+            <a:pPr algn="l">
+              <a:lnSpc>
+                <a:spcPct val="110000"/>
+              </a:lnSpc>
+            </a:pPr>
+            <a:r>
+              <a:rPr sz="2800" b="1">
+                <a:solidFill>
+                  <a:srgbClr val="1F2937"/>
+                </a:solidFill>
+                <a:latin typeface="Arial"/>
+              </a:rPr>
+              <a:t>When the detector does not know your headers, you assign the roles</a:t>
+            </a:r>
+          </a:p>
+        </p:txBody>
+      </p:sp>
+      <p:pic>
+        <p:nvPicPr>
+          <p:cNvPr id="3" name="Picture 2" descr="volcano_manual_mapping_04b_window_before_612_48_1680.png"/>
+          <p:cNvPicPr>
+            <a:picLocks noChangeAspect="1"/>
+          </p:cNvPicPr>
+          <p:nvPr/>
+        </p:nvPicPr>
+        <p:blipFill>
+          <a:blip r:embed="rId2"/>
+          <a:stretch>
+            <a:fillRect/>
+          </a:stretch>
+        </p:blipFill>
+        <p:spPr>
+          <a:xfrm>
+            <a:off x="457200" y="2106288"/>
+            <a:ext cx="10058400" cy="725184"/>
+          </a:xfrm>
+          <a:prstGeom prst="rect">
+            <a:avLst/>
+          </a:prstGeom>
+          <a:ln w="9525">
+            <a:solidFill>
+              <a:srgbClr val="C8C8C8"/>
+            </a:solidFill>
+          </a:ln>
+        </p:spPr>
+      </p:pic>
+      <p:pic>
+        <p:nvPicPr>
+          <p:cNvPr id="4" name="Picture 3" descr="04_mapping_renamed_before.png"/>
+          <p:cNvPicPr>
+            <a:picLocks noChangeAspect="1"/>
+          </p:cNvPicPr>
+          <p:nvPr/>
+        </p:nvPicPr>
+        <p:blipFill>
+          <a:blip r:embed="rId3"/>
+          <a:stretch>
+            <a:fillRect/>
+          </a:stretch>
+        </p:blipFill>
+        <p:spPr>
+          <a:xfrm>
+            <a:off x="457200" y="3313569"/>
+            <a:ext cx="4937760" cy="1282421"/>
+          </a:xfrm>
+          <a:prstGeom prst="rect">
+            <a:avLst/>
+          </a:prstGeom>
+          <a:ln w="9525">
+            <a:solidFill>
+              <a:srgbClr val="C8C8C8"/>
+            </a:solidFill>
+          </a:ln>
+        </p:spPr>
+      </p:pic>
+      <p:sp>
+        <p:nvSpPr>
+          <p:cNvPr id="5" name="TextBox 4"/>
+          <p:cNvSpPr txBox="1"/>
+          <p:nvPr/>
+        </p:nvSpPr>
+        <p:spPr>
+          <a:xfrm>
+            <a:off x="457200" y="4617720"/>
+            <a:ext cx="4937760" cy="457200"/>
+          </a:xfrm>
+          <a:prstGeom prst="rect">
+            <a:avLst/>
+          </a:prstGeom>
+          <a:noFill/>
+        </p:spPr>
+        <p:txBody>
+          <a:bodyPr wrap="square" anchor="t" lIns="45720" rIns="45720">
+            <a:spAutoFit/>
+          </a:bodyPr>
+          <a:lstStyle/>
+          <a:p>
+            <a:pPr algn="l">
+              <a:lnSpc>
+                <a:spcPct val="110000"/>
+              </a:lnSpc>
+            </a:pPr>
+            <a:r>
+              <a:rPr sz="1300" b="0">
+                <a:solidFill>
+                  <a:srgbClr val="666666"/>
+                </a:solidFill>
+                <a:latin typeface="Arial"/>
+              </a:rPr>
+              <a:t>every role starts at (none): the detector does not know these headers</a:t>
+            </a:r>
+          </a:p>
+        </p:txBody>
+      </p:sp>
+      <p:pic>
+        <p:nvPicPr>
+          <p:cNvPr id="6" name="Picture 5" descr="05_mapping_renamed_after.png"/>
+          <p:cNvPicPr>
+            <a:picLocks noChangeAspect="1"/>
+          </p:cNvPicPr>
+          <p:nvPr/>
+        </p:nvPicPr>
+        <p:blipFill>
+          <a:blip r:embed="rId4"/>
+          <a:stretch>
+            <a:fillRect/>
+          </a:stretch>
+        </p:blipFill>
+        <p:spPr>
+          <a:xfrm>
+            <a:off x="457200" y="5096649"/>
+            <a:ext cx="4937760" cy="1282421"/>
+          </a:xfrm>
+          <a:prstGeom prst="rect">
+            <a:avLst/>
+          </a:prstGeom>
+          <a:ln w="9525">
+            <a:solidFill>
+              <a:srgbClr val="C8C8C8"/>
+            </a:solidFill>
+          </a:ln>
+        </p:spPr>
+      </p:pic>
+      <p:sp>
+        <p:nvSpPr>
+          <p:cNvPr id="7" name="TextBox 6"/>
+          <p:cNvSpPr txBox="1"/>
+          <p:nvPr/>
+        </p:nvSpPr>
+        <p:spPr>
+          <a:xfrm>
+            <a:off x="457200" y="6400800"/>
+            <a:ext cx="4937760" cy="457200"/>
+          </a:xfrm>
+          <a:prstGeom prst="rect">
+            <a:avLst/>
+          </a:prstGeom>
+          <a:noFill/>
+        </p:spPr>
+        <p:txBody>
+          <a:bodyPr wrap="square" anchor="t" lIns="45720" rIns="45720">
+            <a:spAutoFit/>
+          </a:bodyPr>
+          <a:lstStyle/>
+          <a:p>
+            <a:pPr algn="l">
+              <a:lnSpc>
+                <a:spcPct val="110000"/>
+              </a:lnSpc>
+            </a:pPr>
+            <a:r>
+              <a:rPr sz="1300" b="0">
+                <a:solidFill>
+                  <a:srgbClr val="666666"/>
+                </a:solidFill>
+                <a:latin typeface="Arial"/>
+              </a:rPr>
+              <a:t>x, p, label, id_col assigned by hand</a:t>
+            </a:r>
+          </a:p>
+        </p:txBody>
+      </p:sp>
+      <p:pic>
+        <p:nvPicPr>
+          <p:cNvPr id="8" name="Picture 7" descr="B_refined_pres.png"/>
+          <p:cNvPicPr>
+            <a:picLocks noChangeAspect="1"/>
+          </p:cNvPicPr>
+          <p:nvPr/>
+        </p:nvPicPr>
+        <p:blipFill>
+          <a:blip r:embed="rId5"/>
+          <a:stretch>
+            <a:fillRect/>
+          </a:stretch>
+        </p:blipFill>
+        <p:spPr>
+          <a:xfrm>
+            <a:off x="5577840" y="3702593"/>
+            <a:ext cx="5029200" cy="2927533"/>
+          </a:xfrm>
+          <a:prstGeom prst="rect">
+            <a:avLst/>
+          </a:prstGeom>
+        </p:spPr>
+      </p:pic>
+      <p:sp>
+        <p:nvSpPr>
+          <p:cNvPr id="9" name="TextBox 8"/>
+          <p:cNvSpPr txBox="1"/>
+          <p:nvPr/>
+        </p:nvSpPr>
+        <p:spPr>
+          <a:xfrm>
+            <a:off x="548640" y="7178040"/>
+            <a:ext cx="9875520" cy="731520"/>
+          </a:xfrm>
+          <a:prstGeom prst="rect">
+            <a:avLst/>
+          </a:prstGeom>
+          <a:noFill/>
+        </p:spPr>
+        <p:txBody>
+          <a:bodyPr wrap="square" anchor="t" lIns="45720" rIns="45720">
+            <a:spAutoFit/>
+          </a:bodyPr>
+          <a:lstStyle/>
+          <a:p>
+            <a:pPr algn="l">
+              <a:lnSpc>
+                <a:spcPct val="110000"/>
+              </a:lnSpc>
+            </a:pPr>
+            <a:r>
+              <a:rPr sz="1700" b="1">
+                <a:solidFill>
+                  <a:srgbClr val="1F2937"/>
+                </a:solidFill>
+                <a:latin typeface="Arial"/>
+              </a:rPr>
+              <a:t>The Messages tab names the missing roles; four drop-downs later the volcano renders - P values read from the table, never recomputed.</a:t>
+            </a:r>
+          </a:p>
+        </p:txBody>
+      </p:sp>
+      <p:sp>
+        <p:nvSpPr>
+          <p:cNvPr id="10" name="TextBox 9"/>
+          <p:cNvSpPr txBox="1"/>
+          <p:nvPr/>
+        </p:nvSpPr>
+        <p:spPr>
+          <a:xfrm>
+            <a:off x="457200" y="7818120"/>
+            <a:ext cx="7315200" cy="274320"/>
+          </a:xfrm>
+          <a:prstGeom prst="rect">
+            <a:avLst/>
+          </a:prstGeom>
+          <a:noFill/>
+        </p:spPr>
+        <p:txBody>
+          <a:bodyPr wrap="square" anchor="t" lIns="45720" rIns="45720">
+            <a:spAutoFit/>
+          </a:bodyPr>
+          <a:lstStyle/>
+          <a:p>
+            <a:pPr algn="l">
+              <a:lnSpc>
+                <a:spcPct val="110000"/>
+              </a:lnSpc>
+            </a:pPr>
+            <a:r>
+              <a:rPr sz="1000" b="0">
+                <a:solidFill>
+                  <a:srgbClr val="666666"/>
+                </a:solidFill>
+                <a:latin typeface="Arial"/>
+              </a:rPr>
+              <a:t>Make My Figure - desktop tutorial   |   15</a:t>
+            </a:r>
+          </a:p>
+        </p:txBody>
+      </p:sp>
+    </p:spTree>
+  </p:cSld>
+  <p:clrMapOvr>
+    <a:masterClrMapping/>
+  </p:clrMapOvr>
+</p:sld>
+</file>
+
+<file path=ppt/slides/slide16.xml><?xml version="1.0" encoding="utf-8"?>
+<p:sld xmlns:a="http://schemas.openxmlformats.org/drawingml/2006/main" xmlns:p="http://schemas.openxmlformats.org/presentationml/2006/main" xmlns:r="http://schemas.openxmlformats.org/officeDocument/2006/relationships">
+  <p:cSld>
+    <p:spTree>
+      <p:nvGrpSpPr>
+        <p:cNvPr id="1" name=""/>
+        <p:cNvGrpSpPr/>
+        <p:nvPr/>
+      </p:nvGrpSpPr>
+      <p:grpSpPr/>
+      <p:sp>
+        <p:nvSpPr>
+          <p:cNvPr id="2" name="TextBox 1"/>
+          <p:cNvSpPr txBox="1"/>
+          <p:nvPr/>
+        </p:nvSpPr>
+        <p:spPr>
+          <a:xfrm>
+            <a:off x="1691640" y="384048"/>
+            <a:ext cx="8869680" cy="1005840"/>
+          </a:xfrm>
+          <a:prstGeom prst="rect">
+            <a:avLst/>
+          </a:prstGeom>
+          <a:noFill/>
+        </p:spPr>
+        <p:txBody>
+          <a:bodyPr wrap="square" anchor="ctr" lIns="45720" rIns="45720">
+            <a:spAutoFit/>
+          </a:bodyPr>
+          <a:lstStyle/>
+          <a:p>
+            <a:pPr algn="l">
+              <a:lnSpc>
+                <a:spcPct val="110000"/>
+              </a:lnSpc>
+            </a:pPr>
+            <a:r>
+              <a:rPr sz="2800" b="1">
+                <a:solidFill>
+                  <a:srgbClr val="1F2937"/>
+                </a:solidFill>
+                <a:latin typeface="Arial"/>
+              </a:rPr>
+              <a:t>Reproducibility - a Figure Package carries the figure and its frozen data</a:t>
+            </a:r>
+          </a:p>
+        </p:txBody>
+      </p:sp>
+      <p:pic>
+        <p:nvPicPr>
+          <p:cNvPr id="3" name="Picture 2" descr="03_package_confirmation.png"/>
+          <p:cNvPicPr>
+            <a:picLocks noChangeAspect="1"/>
+          </p:cNvPicPr>
+          <p:nvPr/>
+        </p:nvPicPr>
+        <p:blipFill>
+          <a:blip r:embed="rId2"/>
+          <a:stretch>
+            <a:fillRect/>
+          </a:stretch>
+        </p:blipFill>
+        <p:spPr>
+          <a:xfrm>
+            <a:off x="457200" y="2034540"/>
+            <a:ext cx="4572000" cy="3520440"/>
+          </a:xfrm>
+          <a:prstGeom prst="rect">
+            <a:avLst/>
+          </a:prstGeom>
+          <a:ln w="9525">
+            <a:solidFill>
+              <a:srgbClr val="C8C8C8"/>
+            </a:solidFill>
+          </a:ln>
+        </p:spPr>
+      </p:pic>
+      <p:sp>
+        <p:nvSpPr>
+          <p:cNvPr id="4" name="TextBox 3"/>
+          <p:cNvSpPr txBox="1"/>
+          <p:nvPr/>
+        </p:nvSpPr>
+        <p:spPr>
+          <a:xfrm>
+            <a:off x="5394960" y="1874520"/>
+            <a:ext cx="5303520" cy="4023360"/>
+          </a:xfrm>
+          <a:prstGeom prst="rect">
+            <a:avLst/>
+          </a:prstGeom>
+          <a:noFill/>
+        </p:spPr>
+        <p:txBody>
+          <a:bodyPr wrap="square" lIns="45720" rIns="45720">
+            <a:spAutoFit/>
+          </a:bodyPr>
+          <a:lstStyle/>
+          <a:p>
+            <a:pPr>
+              <a:lnSpc>
+                <a:spcPct val="108000"/>
+              </a:lnSpc>
+              <a:spcAft>
+                <a:spcPts val="600"/>
+              </a:spcAft>
+            </a:pPr>
+            <a:r>
+              <a:rPr sz="1600" b="1">
+                <a:solidFill>
+                  <a:srgbClr val="111111"/>
+                </a:solidFill>
+                <a:latin typeface="Arial"/>
+              </a:rPr>
+              <a:t>• What is inside one .mmfpackage</a:t>
+            </a:r>
+          </a:p>
+          <a:p>
+            <a:pPr lvl="1">
+              <a:lnSpc>
+                <a:spcPct val="108000"/>
+              </a:lnSpc>
+              <a:spcAft>
+                <a:spcPts val="600"/>
+              </a:spcAft>
+            </a:pPr>
+            <a:r>
+              <a:rPr sz="1400" b="0">
+                <a:solidFill>
+                  <a:srgbClr val="1F2937"/>
+                </a:solidFill>
+                <a:latin typeface="Arial"/>
+              </a:rPr>
+              <a:t>– plot_spec.json, stats_spec.json (settings and results), render_metadata.json</a:t>
+            </a:r>
+          </a:p>
+          <a:p>
+            <a:pPr lvl="1">
+              <a:lnSpc>
+                <a:spcPct val="108000"/>
+              </a:lnSpc>
+              <a:spcAft>
+                <a:spcPts val="600"/>
+              </a:spcAft>
+            </a:pPr>
+            <a:r>
+              <a:rPr sz="1400" b="0">
+                <a:solidFill>
+                  <a:srgbClr val="1F2937"/>
+                </a:solidFill>
+                <a:latin typeface="Arial"/>
+              </a:rPr>
+              <a:t>– data/source.csv and the typed table; the original file when available</a:t>
+            </a:r>
+          </a:p>
+          <a:p>
+            <a:pPr lvl="1">
+              <a:lnSpc>
+                <a:spcPct val="108000"/>
+              </a:lnSpc>
+              <a:spcAft>
+                <a:spcPts val="600"/>
+              </a:spcAft>
+            </a:pPr>
+            <a:r>
+              <a:rPr sz="1400" b="0">
+                <a:solidFill>
+                  <a:srgbClr val="1F2937"/>
+                </a:solidFill>
+                <a:latin typeface="Arial"/>
+              </a:rPr>
+              <a:t>– preview/figure.png, .svg, .pdf; environment/environment.json</a:t>
+            </a:r>
+          </a:p>
+          <a:p>
+            <a:pPr lvl="1">
+              <a:lnSpc>
+                <a:spcPct val="108000"/>
+              </a:lnSpc>
+              <a:spcAft>
+                <a:spcPts val="600"/>
+              </a:spcAft>
+            </a:pPr>
+            <a:r>
+              <a:rPr sz="1400" b="0">
+                <a:solidFill>
+                  <a:srgbClr val="1F2937"/>
+                </a:solidFill>
+                <a:latin typeface="Arial"/>
+              </a:rPr>
+              <a:t>– manifest.json with a SHA-256 for every member - verified before drawing</a:t>
+            </a:r>
+          </a:p>
+          <a:p>
+            <a:pPr>
+              <a:lnSpc>
+                <a:spcPct val="108000"/>
+              </a:lnSpc>
+              <a:spcAft>
+                <a:spcPts val="600"/>
+              </a:spcAft>
+            </a:pPr>
+            <a:r>
+              <a:rPr sz="1600" b="1">
+                <a:solidFill>
+                  <a:srgbClr val="111111"/>
+                </a:solidFill>
+                <a:latin typeface="Arial"/>
+              </a:rPr>
+              <a:t>• PlotSpec alone is the recipe; it needs the data file to redraw</a:t>
+            </a:r>
+          </a:p>
+        </p:txBody>
+      </p:sp>
+      <p:sp>
+        <p:nvSpPr>
+          <p:cNvPr id="5" name="TextBox 4"/>
+          <p:cNvSpPr txBox="1"/>
+          <p:nvPr/>
+        </p:nvSpPr>
+        <p:spPr>
+          <a:xfrm>
+            <a:off x="548640" y="6309360"/>
+            <a:ext cx="9875520" cy="731520"/>
+          </a:xfrm>
+          <a:prstGeom prst="rect">
+            <a:avLst/>
+          </a:prstGeom>
+          <a:noFill/>
+        </p:spPr>
+        <p:txBody>
+          <a:bodyPr wrap="square" anchor="t" lIns="45720" rIns="45720">
+            <a:spAutoFit/>
+          </a:bodyPr>
+          <a:lstStyle/>
+          <a:p>
+            <a:pPr algn="l">
+              <a:lnSpc>
+                <a:spcPct val="110000"/>
+              </a:lnSpc>
+            </a:pPr>
+            <a:r>
+              <a:rPr sz="1900" b="1">
+                <a:solidFill>
+                  <a:srgbClr val="1F2937"/>
+                </a:solidFill>
+                <a:latin typeface="Arial"/>
+              </a:rPr>
+              <a:t>Move the one file anywhere, open it: integrity verified, mapping, options and brackets restored.</a:t>
+            </a:r>
+          </a:p>
+        </p:txBody>
+      </p:sp>
+      <p:sp>
+        <p:nvSpPr>
+          <p:cNvPr id="6" name="TextBox 5"/>
+          <p:cNvSpPr txBox="1"/>
+          <p:nvPr/>
+        </p:nvSpPr>
+        <p:spPr>
+          <a:xfrm>
+            <a:off x="457200" y="7818120"/>
+            <a:ext cx="7315200" cy="274320"/>
+          </a:xfrm>
+          <a:prstGeom prst="rect">
+            <a:avLst/>
+          </a:prstGeom>
+          <a:noFill/>
+        </p:spPr>
+        <p:txBody>
+          <a:bodyPr wrap="square" anchor="t" lIns="45720" rIns="45720">
+            <a:spAutoFit/>
+          </a:bodyPr>
+          <a:lstStyle/>
+          <a:p>
+            <a:pPr algn="l">
+              <a:lnSpc>
+                <a:spcPct val="110000"/>
+              </a:lnSpc>
+            </a:pPr>
+            <a:r>
+              <a:rPr sz="1000" b="0">
+                <a:solidFill>
+                  <a:srgbClr val="666666"/>
+                </a:solidFill>
+                <a:latin typeface="Arial"/>
+              </a:rPr>
+              <a:t>Make My Figure - desktop tutorial   |   16</a:t>
+            </a:r>
+          </a:p>
+        </p:txBody>
+      </p:sp>
+    </p:spTree>
+  </p:cSld>
+  <p:clrMapOvr>
+    <a:masterClrMapping/>
+  </p:clrMapOvr>
+</p:sld>
+</file>
+
+<file path=ppt/slides/slide17.xml><?xml version="1.0" encoding="utf-8"?>
+<p:sld xmlns:a="http://schemas.openxmlformats.org/drawingml/2006/main" xmlns:p="http://schemas.openxmlformats.org/presentationml/2006/main" xmlns:r="http://schemas.openxmlformats.org/officeDocument/2006/relationships">
+  <p:cSld>
+    <p:spTree>
+      <p:nvGrpSpPr>
+        <p:cNvPr id="1" name=""/>
+        <p:cNvGrpSpPr/>
+        <p:nvPr/>
+      </p:nvGrpSpPr>
+      <p:grpSpPr/>
+      <p:sp>
+        <p:nvSpPr>
+          <p:cNvPr id="2" name="TextBox 1"/>
+          <p:cNvSpPr txBox="1"/>
+          <p:nvPr/>
+        </p:nvSpPr>
+        <p:spPr>
+          <a:xfrm>
+            <a:off x="1691640" y="384048"/>
+            <a:ext cx="8869680" cy="1005840"/>
+          </a:xfrm>
+          <a:prstGeom prst="rect">
+            <a:avLst/>
+          </a:prstGeom>
+          <a:noFill/>
+        </p:spPr>
+        <p:txBody>
+          <a:bodyPr wrap="square" anchor="ctr" lIns="45720" rIns="45720">
+            <a:spAutoFit/>
+          </a:bodyPr>
+          <a:lstStyle/>
+          <a:p>
+            <a:pPr algn="l">
+              <a:lnSpc>
+                <a:spcPct val="110000"/>
+              </a:lnSpc>
+            </a:pPr>
+            <a:r>
+              <a:rPr sz="2800" b="1">
+                <a:solidFill>
+                  <a:srgbClr val="1F2937"/>
+                </a:solidFill>
+                <a:latin typeface="Arial"/>
+              </a:rPr>
+              <a:t>Figure Builder - panels carry their own data</a:t>
+            </a:r>
+          </a:p>
+        </p:txBody>
+      </p:sp>
+      <p:pic>
+        <p:nvPicPr>
+          <p:cNvPr id="3" name="Picture 2" descr="composite.png"/>
+          <p:cNvPicPr>
+            <a:picLocks noChangeAspect="1"/>
+          </p:cNvPicPr>
+          <p:nvPr/>
+        </p:nvPicPr>
+        <p:blipFill>
+          <a:blip r:embed="rId2"/>
+          <a:stretch>
+            <a:fillRect/>
+          </a:stretch>
+        </p:blipFill>
+        <p:spPr>
+          <a:xfrm>
+            <a:off x="457200" y="2143286"/>
+            <a:ext cx="10058400" cy="4217347"/>
+          </a:xfrm>
+          <a:prstGeom prst="rect">
+            <a:avLst/>
+          </a:prstGeom>
+        </p:spPr>
+      </p:pic>
+      <p:sp>
+        <p:nvSpPr>
+          <p:cNvPr id="4" name="TextBox 3"/>
+          <p:cNvSpPr txBox="1"/>
+          <p:nvPr/>
+        </p:nvSpPr>
+        <p:spPr>
+          <a:xfrm>
+            <a:off x="548640" y="7132320"/>
+            <a:ext cx="9875520" cy="731520"/>
+          </a:xfrm>
+          <a:prstGeom prst="rect">
+            <a:avLst/>
+          </a:prstGeom>
+          <a:noFill/>
+        </p:spPr>
+        <p:txBody>
+          <a:bodyPr wrap="square" anchor="t" lIns="45720" rIns="45720">
+            <a:spAutoFit/>
+          </a:bodyPr>
+          <a:lstStyle/>
+          <a:p>
+            <a:pPr algn="l">
+              <a:lnSpc>
+                <a:spcPct val="110000"/>
+              </a:lnSpc>
+            </a:pPr>
+            <a:r>
+              <a:rPr sz="1800" b="1">
+                <a:solidFill>
+                  <a:srgbClr val="1F2937"/>
+                </a:solidFill>
+                <a:latin typeface="Arial"/>
+              </a:rPr>
+              <a:t>Panel letters, width in millimetres, fonts for all panels; the composite exports as PNG, PDF, SVG and as a Figure Package.</a:t>
+            </a:r>
+          </a:p>
+        </p:txBody>
+      </p:sp>
+      <p:sp>
+        <p:nvSpPr>
+          <p:cNvPr id="5" name="TextBox 4"/>
+          <p:cNvSpPr txBox="1"/>
+          <p:nvPr/>
+        </p:nvSpPr>
+        <p:spPr>
+          <a:xfrm>
+            <a:off x="457200" y="7818120"/>
+            <a:ext cx="7315200" cy="274320"/>
+          </a:xfrm>
+          <a:prstGeom prst="rect">
+            <a:avLst/>
+          </a:prstGeom>
+          <a:noFill/>
+        </p:spPr>
+        <p:txBody>
+          <a:bodyPr wrap="square" anchor="t" lIns="45720" rIns="45720">
+            <a:spAutoFit/>
+          </a:bodyPr>
+          <a:lstStyle/>
+          <a:p>
+            <a:pPr algn="l">
+              <a:lnSpc>
+                <a:spcPct val="110000"/>
+              </a:lnSpc>
+            </a:pPr>
+            <a:r>
+              <a:rPr sz="1000" b="0">
+                <a:solidFill>
+                  <a:srgbClr val="666666"/>
+                </a:solidFill>
+                <a:latin typeface="Arial"/>
+              </a:rPr>
+              <a:t>Make My Figure - desktop tutorial   |   17</a:t>
+            </a:r>
+          </a:p>
+        </p:txBody>
+      </p:sp>
+    </p:spTree>
+  </p:cSld>
+  <p:clrMapOvr>
+    <a:masterClrMapping/>
+  </p:clrMapOvr>
+</p:sld>
+</file>
+
+<file path=ppt/slides/slide18.xml><?xml version="1.0" encoding="utf-8"?>
+<p:sld xmlns:a="http://schemas.openxmlformats.org/drawingml/2006/main" xmlns:p="http://schemas.openxmlformats.org/presentationml/2006/main" xmlns:r="http://schemas.openxmlformats.org/officeDocument/2006/relationships">
+  <p:cSld>
+    <p:spTree>
+      <p:nvGrpSpPr>
+        <p:cNvPr id="1" name=""/>
+        <p:cNvGrpSpPr/>
+        <p:nvPr/>
+      </p:nvGrpSpPr>
+      <p:grpSpPr/>
+      <p:sp>
+        <p:nvSpPr>
+          <p:cNvPr id="2" name="TextBox 1"/>
+          <p:cNvSpPr txBox="1"/>
+          <p:nvPr/>
+        </p:nvSpPr>
+        <p:spPr>
+          <a:xfrm>
+            <a:off x="1691640" y="384048"/>
+            <a:ext cx="8869680" cy="1005840"/>
+          </a:xfrm>
+          <a:prstGeom prst="rect">
+            <a:avLst/>
+          </a:prstGeom>
+          <a:noFill/>
+        </p:spPr>
+        <p:txBody>
+          <a:bodyPr wrap="square" anchor="ctr" lIns="45720" rIns="45720">
+            <a:spAutoFit/>
+          </a:bodyPr>
+          <a:lstStyle/>
+          <a:p>
+            <a:pPr algn="l">
+              <a:lnSpc>
+                <a:spcPct val="110000"/>
+              </a:lnSpc>
+            </a:pPr>
+            <a:r>
+              <a:rPr sz="2800" b="1">
+                <a:solidFill>
+                  <a:srgbClr val="1F2937"/>
+                </a:solidFill>
+                <a:latin typeface="Arial"/>
+              </a:rPr>
+              <a:t>The tutorial is generated from the real application and checked by running it</a:t>
+            </a:r>
+          </a:p>
+        </p:txBody>
+      </p:sp>
+      <p:sp>
+        <p:nvSpPr>
+          <p:cNvPr id="3" name="Rounded Rectangle 2"/>
+          <p:cNvSpPr/>
+          <p:nvPr/>
+        </p:nvSpPr>
+        <p:spPr>
+          <a:xfrm>
+            <a:off x="548640" y="2651760"/>
+            <a:ext cx="2286000" cy="1097280"/>
+          </a:xfrm>
+          <a:prstGeom prst="roundRect">
+            <a:avLst/>
+          </a:prstGeom>
+          <a:solidFill>
+            <a:srgbClr val="F2F4F7"/>
+          </a:solidFill>
+          <a:ln>
+            <a:solidFill>
+              <a:srgbClr val="C8D0DC"/>
+            </a:solidFill>
+          </a:ln>
+        </p:spPr>
+        <p:style>
+          <a:lnRef idx="1">
+            <a:schemeClr val="accent1"/>
+          </a:lnRef>
+          <a:fillRef idx="3">
+            <a:schemeClr val="accent1"/>
+          </a:fillRef>
+          <a:effectRef idx="2">
+            <a:schemeClr val="accent1"/>
+          </a:effectRef>
+          <a:fontRef idx="minor">
+            <a:schemeClr val="lt1"/>
+          </a:fontRef>
+        </p:style>
+        <p:txBody>
+          <a:bodyPr rtlCol="0" anchor="ctr"/>
+          <a:lstStyle/>
+          <a:p>
+            <a:pPr algn="ctr"/>
+          </a:p>
+        </p:txBody>
+      </p:sp>
+      <p:sp>
+        <p:nvSpPr>
+          <p:cNvPr id="4" name="TextBox 3"/>
+          <p:cNvSpPr txBox="1"/>
+          <p:nvPr/>
+        </p:nvSpPr>
+        <p:spPr>
+          <a:xfrm>
+            <a:off x="640080" y="2743200"/>
+            <a:ext cx="2103120" cy="914400"/>
+          </a:xfrm>
+          <a:prstGeom prst="rect">
+            <a:avLst/>
+          </a:prstGeom>
+          <a:noFill/>
+        </p:spPr>
+        <p:txBody>
+          <a:bodyPr wrap="square" anchor="ctr" lIns="45720" rIns="45720">
+            <a:spAutoFit/>
+          </a:bodyPr>
+          <a:lstStyle/>
+          <a:p>
+            <a:pPr algn="ctr">
+              <a:lnSpc>
+                <a:spcPct val="110000"/>
+              </a:lnSpc>
+            </a:pPr>
+            <a:r>
+              <a:rPr sz="1600" b="1">
+                <a:solidFill>
+                  <a:srgbClr val="1F2937"/>
+                </a:solidFill>
+                <a:latin typeface="Arial"/>
+              </a:rPr>
+              <a:t>tutorial action script</a:t>
+            </a:r>
+          </a:p>
+        </p:txBody>
+      </p:sp>
+      <p:sp>
+        <p:nvSpPr>
+          <p:cNvPr id="5" name="TextBox 4"/>
+          <p:cNvSpPr txBox="1"/>
+          <p:nvPr/>
+        </p:nvSpPr>
+        <p:spPr>
+          <a:xfrm>
+            <a:off x="2834640" y="2880360"/>
+            <a:ext cx="365760" cy="548640"/>
+          </a:xfrm>
+          <a:prstGeom prst="rect">
+            <a:avLst/>
+          </a:prstGeom>
+          <a:noFill/>
+        </p:spPr>
+        <p:txBody>
+          <a:bodyPr wrap="square" anchor="t" lIns="45720" rIns="45720">
+            <a:spAutoFit/>
+          </a:bodyPr>
+          <a:lstStyle/>
+          <a:p>
+            <a:pPr algn="ctr">
+              <a:lnSpc>
+                <a:spcPct val="110000"/>
+              </a:lnSpc>
+            </a:pPr>
+            <a:r>
+              <a:rPr sz="2400" b="0">
+                <a:solidFill>
+                  <a:srgbClr val="1D4E89"/>
+                </a:solidFill>
+                <a:latin typeface="Arial"/>
+              </a:rPr>
+              <a:t>→</a:t>
+            </a:r>
+          </a:p>
+        </p:txBody>
+      </p:sp>
+      <p:sp>
+        <p:nvSpPr>
+          <p:cNvPr id="6" name="Rounded Rectangle 5"/>
+          <p:cNvSpPr/>
+          <p:nvPr/>
+        </p:nvSpPr>
+        <p:spPr>
+          <a:xfrm>
+            <a:off x="3154680" y="2651760"/>
+            <a:ext cx="2286000" cy="1097280"/>
+          </a:xfrm>
+          <a:prstGeom prst="roundRect">
+            <a:avLst/>
+          </a:prstGeom>
+          <a:solidFill>
+            <a:srgbClr val="E3EBF5"/>
+          </a:solidFill>
+          <a:ln>
+            <a:solidFill>
+              <a:srgbClr val="C8D0DC"/>
+            </a:solidFill>
+          </a:ln>
+        </p:spPr>
+        <p:style>
+          <a:lnRef idx="1">
+            <a:schemeClr val="accent1"/>
+          </a:lnRef>
+          <a:fillRef idx="3">
+            <a:schemeClr val="accent1"/>
+          </a:fillRef>
+          <a:effectRef idx="2">
+            <a:schemeClr val="accent1"/>
+          </a:effectRef>
+          <a:fontRef idx="minor">
+            <a:schemeClr val="lt1"/>
+          </a:fontRef>
+        </p:style>
+        <p:txBody>
+          <a:bodyPr rtlCol="0" anchor="ctr"/>
+          <a:lstStyle/>
+          <a:p>
+            <a:pPr algn="ctr"/>
+          </a:p>
+        </p:txBody>
+      </p:sp>
+      <p:sp>
+        <p:nvSpPr>
+          <p:cNvPr id="7" name="TextBox 6"/>
+          <p:cNvSpPr txBox="1"/>
+          <p:nvPr/>
+        </p:nvSpPr>
+        <p:spPr>
+          <a:xfrm>
+            <a:off x="3246120" y="2743200"/>
+            <a:ext cx="2103120" cy="914400"/>
+          </a:xfrm>
+          <a:prstGeom prst="rect">
+            <a:avLst/>
+          </a:prstGeom>
+          <a:noFill/>
+        </p:spPr>
+        <p:txBody>
+          <a:bodyPr wrap="square" anchor="ctr" lIns="45720" rIns="45720">
+            <a:spAutoFit/>
+          </a:bodyPr>
+          <a:lstStyle/>
+          <a:p>
+            <a:pPr algn="ctr">
+              <a:lnSpc>
+                <a:spcPct val="110000"/>
+              </a:lnSpc>
+            </a:pPr>
+            <a:r>
+              <a:rPr sz="1600" b="1">
+                <a:solidFill>
+                  <a:srgbClr val="1F2937"/>
+                </a:solidFill>
+                <a:latin typeface="Arial"/>
+              </a:rPr>
+              <a:t>driver operates the real MainWindow</a:t>
+            </a:r>
+          </a:p>
+        </p:txBody>
+      </p:sp>
+      <p:sp>
+        <p:nvSpPr>
+          <p:cNvPr id="8" name="TextBox 7"/>
+          <p:cNvSpPr txBox="1"/>
+          <p:nvPr/>
+        </p:nvSpPr>
+        <p:spPr>
+          <a:xfrm>
+            <a:off x="5440680" y="2880360"/>
+            <a:ext cx="365760" cy="548640"/>
+          </a:xfrm>
+          <a:prstGeom prst="rect">
+            <a:avLst/>
+          </a:prstGeom>
+          <a:noFill/>
+        </p:spPr>
+        <p:txBody>
+          <a:bodyPr wrap="square" anchor="t" lIns="45720" rIns="45720">
+            <a:spAutoFit/>
+          </a:bodyPr>
+          <a:lstStyle/>
+          <a:p>
+            <a:pPr algn="ctr">
+              <a:lnSpc>
+                <a:spcPct val="110000"/>
+              </a:lnSpc>
+            </a:pPr>
+            <a:r>
+              <a:rPr sz="2400" b="0">
+                <a:solidFill>
+                  <a:srgbClr val="1D4E89"/>
+                </a:solidFill>
+                <a:latin typeface="Arial"/>
+              </a:rPr>
+              <a:t>→</a:t>
+            </a:r>
+          </a:p>
+        </p:txBody>
+      </p:sp>
+      <p:sp>
+        <p:nvSpPr>
+          <p:cNvPr id="9" name="Rounded Rectangle 8"/>
+          <p:cNvSpPr/>
+          <p:nvPr/>
+        </p:nvSpPr>
+        <p:spPr>
+          <a:xfrm>
+            <a:off x="5760720" y="2651760"/>
+            <a:ext cx="2286000" cy="1097280"/>
+          </a:xfrm>
+          <a:prstGeom prst="roundRect">
+            <a:avLst/>
+          </a:prstGeom>
+          <a:solidFill>
+            <a:srgbClr val="F2F4F7"/>
+          </a:solidFill>
+          <a:ln>
+            <a:solidFill>
+              <a:srgbClr val="C8D0DC"/>
+            </a:solidFill>
+          </a:ln>
+        </p:spPr>
+        <p:style>
+          <a:lnRef idx="1">
+            <a:schemeClr val="accent1"/>
+          </a:lnRef>
+          <a:fillRef idx="3">
+            <a:schemeClr val="accent1"/>
+          </a:fillRef>
+          <a:effectRef idx="2">
+            <a:schemeClr val="accent1"/>
+          </a:effectRef>
+          <a:fontRef idx="minor">
+            <a:schemeClr val="lt1"/>
+          </a:fontRef>
+        </p:style>
+        <p:txBody>
+          <a:bodyPr rtlCol="0" anchor="ctr"/>
+          <a:lstStyle/>
+          <a:p>
+            <a:pPr algn="ctr"/>
+          </a:p>
+        </p:txBody>
+      </p:sp>
+      <p:sp>
+        <p:nvSpPr>
+          <p:cNvPr id="10" name="TextBox 9"/>
+          <p:cNvSpPr txBox="1"/>
+          <p:nvPr/>
+        </p:nvSpPr>
+        <p:spPr>
+          <a:xfrm>
+            <a:off x="5852160" y="2743200"/>
+            <a:ext cx="2103120" cy="914400"/>
+          </a:xfrm>
+          <a:prstGeom prst="rect">
+            <a:avLst/>
+          </a:prstGeom>
+          <a:noFill/>
+        </p:spPr>
+        <p:txBody>
+          <a:bodyPr wrap="square" anchor="ctr" lIns="45720" rIns="45720">
+            <a:spAutoFit/>
+          </a:bodyPr>
+          <a:lstStyle/>
+          <a:p>
+            <a:pPr algn="ctr">
+              <a:lnSpc>
+                <a:spcPct val="110000"/>
+              </a:lnSpc>
+            </a:pPr>
+            <a:r>
+              <a:rPr sz="1600" b="1">
+                <a:solidFill>
+                  <a:srgbClr val="1F2937"/>
+                </a:solidFill>
+                <a:latin typeface="Arial"/>
+              </a:rPr>
+              <a:t>screenshots (offscreen) or video (on screen)</a:t>
+            </a:r>
+          </a:p>
+        </p:txBody>
+      </p:sp>
+      <p:sp>
+        <p:nvSpPr>
+          <p:cNvPr id="11" name="TextBox 10"/>
+          <p:cNvSpPr txBox="1"/>
+          <p:nvPr/>
+        </p:nvSpPr>
+        <p:spPr>
+          <a:xfrm>
+            <a:off x="8046720" y="2880360"/>
+            <a:ext cx="365760" cy="548640"/>
+          </a:xfrm>
+          <a:prstGeom prst="rect">
+            <a:avLst/>
+          </a:prstGeom>
+          <a:noFill/>
+        </p:spPr>
+        <p:txBody>
+          <a:bodyPr wrap="square" anchor="t" lIns="45720" rIns="45720">
+            <a:spAutoFit/>
+          </a:bodyPr>
+          <a:lstStyle/>
+          <a:p>
+            <a:pPr algn="ctr">
+              <a:lnSpc>
+                <a:spcPct val="110000"/>
+              </a:lnSpc>
+            </a:pPr>
+            <a:r>
+              <a:rPr sz="2400" b="0">
+                <a:solidFill>
+                  <a:srgbClr val="1D4E89"/>
+                </a:solidFill>
+                <a:latin typeface="Arial"/>
+              </a:rPr>
+              <a:t>→</a:t>
+            </a:r>
+          </a:p>
+        </p:txBody>
+      </p:sp>
+      <p:sp>
+        <p:nvSpPr>
+          <p:cNvPr id="12" name="Rounded Rectangle 11"/>
+          <p:cNvSpPr/>
+          <p:nvPr/>
+        </p:nvSpPr>
+        <p:spPr>
+          <a:xfrm>
+            <a:off x="8366760" y="2651760"/>
+            <a:ext cx="2286000" cy="1097280"/>
+          </a:xfrm>
+          <a:prstGeom prst="roundRect">
+            <a:avLst/>
+          </a:prstGeom>
+          <a:solidFill>
+            <a:srgbClr val="E3EBF5"/>
+          </a:solidFill>
+          <a:ln>
+            <a:solidFill>
+              <a:srgbClr val="C8D0DC"/>
+            </a:solidFill>
+          </a:ln>
+        </p:spPr>
+        <p:style>
+          <a:lnRef idx="1">
+            <a:schemeClr val="accent1"/>
+          </a:lnRef>
+          <a:fillRef idx="3">
+            <a:schemeClr val="accent1"/>
+          </a:fillRef>
+          <a:effectRef idx="2">
+            <a:schemeClr val="accent1"/>
+          </a:effectRef>
+          <a:fontRef idx="minor">
+            <a:schemeClr val="lt1"/>
+          </a:fontRef>
+        </p:style>
+        <p:txBody>
+          <a:bodyPr rtlCol="0" anchor="ctr"/>
+          <a:lstStyle/>
+          <a:p>
+            <a:pPr algn="ctr"/>
+          </a:p>
+        </p:txBody>
+      </p:sp>
+      <p:sp>
+        <p:nvSpPr>
+          <p:cNvPr id="13" name="TextBox 12"/>
+          <p:cNvSpPr txBox="1"/>
+          <p:nvPr/>
+        </p:nvSpPr>
+        <p:spPr>
+          <a:xfrm>
+            <a:off x="8458200" y="2743200"/>
+            <a:ext cx="2103120" cy="914400"/>
+          </a:xfrm>
+          <a:prstGeom prst="rect">
+            <a:avLst/>
+          </a:prstGeom>
+          <a:noFill/>
+        </p:spPr>
+        <p:txBody>
+          <a:bodyPr wrap="square" anchor="ctr" lIns="45720" rIns="45720">
+            <a:spAutoFit/>
+          </a:bodyPr>
+          <a:lstStyle/>
+          <a:p>
+            <a:pPr algn="ctr">
+              <a:lnSpc>
+                <a:spcPct val="110000"/>
+              </a:lnSpc>
+            </a:pPr>
+            <a:r>
+              <a:rPr sz="1600" b="1">
+                <a:solidFill>
+                  <a:srgbClr val="1F2937"/>
+                </a:solidFill>
+                <a:latin typeface="Arial"/>
+              </a:rPr>
+              <a:t>validation record PASS / FAIL</a:t>
+            </a:r>
+          </a:p>
+        </p:txBody>
+      </p:sp>
+      <p:sp>
+        <p:nvSpPr>
+          <p:cNvPr id="14" name="TextBox 13"/>
+          <p:cNvSpPr txBox="1"/>
+          <p:nvPr/>
+        </p:nvSpPr>
+        <p:spPr>
+          <a:xfrm>
+            <a:off x="548640" y="4480560"/>
+            <a:ext cx="9875520" cy="731520"/>
+          </a:xfrm>
+          <a:prstGeom prst="rect">
+            <a:avLst/>
+          </a:prstGeom>
+          <a:noFill/>
+        </p:spPr>
+        <p:txBody>
+          <a:bodyPr wrap="square" anchor="t" lIns="45720" rIns="45720">
+            <a:spAutoFit/>
+          </a:bodyPr>
+          <a:lstStyle/>
+          <a:p>
+            <a:pPr algn="l">
+              <a:lnSpc>
+                <a:spcPct val="110000"/>
+              </a:lnSpc>
+            </a:pPr>
+            <a:r>
+              <a:rPr sz="1900" b="1">
+                <a:solidFill>
+                  <a:srgbClr val="1F2937"/>
+                </a:solidFill>
+                <a:latin typeface="Arial"/>
+              </a:rPr>
+              <a:t>No mock-ups: every screenshot is a grab of the production widgets; every step is a step a user can click; every claim was executed.</a:t>
+            </a:r>
+          </a:p>
+        </p:txBody>
+      </p:sp>
+      <p:sp>
+        <p:nvSpPr>
+          <p:cNvPr id="15" name="TextBox 14"/>
+          <p:cNvSpPr txBox="1"/>
+          <p:nvPr/>
+        </p:nvSpPr>
+        <p:spPr>
+          <a:xfrm>
+            <a:off x="640080" y="5394960"/>
+            <a:ext cx="9692640" cy="2194560"/>
+          </a:xfrm>
+          <a:prstGeom prst="rect">
+            <a:avLst/>
+          </a:prstGeom>
+          <a:noFill/>
+        </p:spPr>
+        <p:txBody>
+          <a:bodyPr wrap="square" lIns="45720" rIns="45720">
+            <a:spAutoFit/>
+          </a:bodyPr>
+          <a:lstStyle/>
+          <a:p>
+            <a:pPr>
+              <a:lnSpc>
+                <a:spcPct val="108000"/>
+              </a:lnSpc>
+              <a:spcAft>
+                <a:spcPts val="600"/>
+              </a:spcAft>
+            </a:pPr>
+            <a:r>
+              <a:rPr sz="1600" b="0">
+                <a:solidFill>
+                  <a:srgbClr val="111111"/>
+                </a:solidFill>
+                <a:latin typeface="Arial"/>
+              </a:rPr>
+              <a:t>• Same script, two modes: deterministic screenshots, or a visible window for video recording (recording kept separate)</a:t>
+            </a:r>
+          </a:p>
+          <a:p>
+            <a:pPr>
+              <a:lnSpc>
+                <a:spcPct val="108000"/>
+              </a:lnSpc>
+              <a:spcAft>
+                <a:spcPts val="600"/>
+              </a:spcAft>
+            </a:pPr>
+            <a:r>
+              <a:rPr sz="1600" b="0">
+                <a:solidFill>
+                  <a:srgbClr val="111111"/>
+                </a:solidFill>
+                <a:latin typeface="Arial"/>
+              </a:rPr>
+              <a:t>• Same-data showcases rendered by the application's renderer; presets applied from their files; data integrity recorded per pair</a:t>
+            </a:r>
+          </a:p>
+        </p:txBody>
+      </p:sp>
+      <p:sp>
+        <p:nvSpPr>
+          <p:cNvPr id="16" name="TextBox 15"/>
+          <p:cNvSpPr txBox="1"/>
+          <p:nvPr/>
+        </p:nvSpPr>
+        <p:spPr>
+          <a:xfrm>
+            <a:off x="457200" y="7818120"/>
+            <a:ext cx="7315200" cy="274320"/>
+          </a:xfrm>
+          <a:prstGeom prst="rect">
+            <a:avLst/>
+          </a:prstGeom>
+          <a:noFill/>
+        </p:spPr>
+        <p:txBody>
+          <a:bodyPr wrap="square" anchor="t" lIns="45720" rIns="45720">
+            <a:spAutoFit/>
+          </a:bodyPr>
+          <a:lstStyle/>
+          <a:p>
+            <a:pPr algn="l">
+              <a:lnSpc>
+                <a:spcPct val="110000"/>
+              </a:lnSpc>
+            </a:pPr>
+            <a:r>
+              <a:rPr sz="1000" b="0">
+                <a:solidFill>
+                  <a:srgbClr val="666666"/>
+                </a:solidFill>
+                <a:latin typeface="Arial"/>
+              </a:rPr>
+              <a:t>Make My Figure - desktop tutorial   |   18</a:t>
+            </a:r>
+          </a:p>
+        </p:txBody>
+      </p:sp>
+    </p:spTree>
+  </p:cSld>
+  <p:clrMapOvr>
+    <a:masterClrMapping/>
+  </p:clrMapOvr>
+</p:sld>
+</file>
+
+<file path=ppt/slides/slide19.xml><?xml version="1.0" encoding="utf-8"?>
+<p:sld xmlns:a="http://schemas.openxmlformats.org/drawingml/2006/main" xmlns:p="http://schemas.openxmlformats.org/presentationml/2006/main" xmlns:r="http://schemas.openxmlformats.org/officeDocument/2006/relationships">
+  <p:cSld>
+    <p:spTree>
+      <p:nvGrpSpPr>
+        <p:cNvPr id="1" name=""/>
+        <p:cNvGrpSpPr/>
+        <p:nvPr/>
+      </p:nvGrpSpPr>
+      <p:grpSpPr/>
+      <p:sp>
+        <p:nvSpPr>
+          <p:cNvPr id="2" name="TextBox 1"/>
+          <p:cNvSpPr txBox="1"/>
+          <p:nvPr/>
+        </p:nvSpPr>
+        <p:spPr>
+          <a:xfrm>
+            <a:off x="1691640" y="384048"/>
+            <a:ext cx="8869680" cy="1005840"/>
+          </a:xfrm>
+          <a:prstGeom prst="rect">
+            <a:avLst/>
+          </a:prstGeom>
+          <a:noFill/>
+        </p:spPr>
+        <p:txBody>
+          <a:bodyPr wrap="square" anchor="ctr" lIns="45720" rIns="45720">
+            <a:spAutoFit/>
+          </a:bodyPr>
+          <a:lstStyle/>
+          <a:p>
+            <a:pPr algn="l">
+              <a:lnSpc>
+                <a:spcPct val="110000"/>
+              </a:lnSpc>
+            </a:pPr>
+            <a:r>
+              <a:rPr sz="2800" b="1">
+                <a:solidFill>
+                  <a:srgbClr val="1F2937"/>
+                </a:solidFill>
+                <a:latin typeface="Arial"/>
+              </a:rPr>
+              <a:t>Every tutorial instruction executed against the application</a:t>
             </a:r>
           </a:p>
         </p:txBody>
@@ -3445,8 +5163,8 @@
           <p:nvPr/>
         </p:nvGraphicFramePr>
         <p:xfrm>
-          <a:off x="548640" y="1920240"/>
-          <a:ext cx="9875520" cy="4224528"/>
+          <a:off x="548640" y="1874520"/>
+          <a:ext cx="9875520" cy="4517136"/>
         </p:xfrm>
         <a:graphic>
           <a:graphicData uri="http://schemas.openxmlformats.org/drawingml/2006/table">
@@ -3459,14 +5177,14 @@
                 <a:gridCol w="1280160"/>
                 <a:gridCol w="2926080"/>
               </a:tblGrid>
-              <a:tr h="384048">
+              <a:tr h="347472">
                 <a:tc>
                   <a:txBody>
                     <a:bodyPr/>
                     <a:lstStyle/>
                     <a:p>
                       <a:r>
-                        <a:rPr sz="1500" b="1">
+                        <a:rPr sz="1400" b="1">
                           <a:solidFill>
                             <a:srgbClr val="FFFFFF"/>
                           </a:solidFill>
@@ -3488,7 +5206,7 @@
                     <a:lstStyle/>
                     <a:p>
                       <a:r>
-                        <a:rPr sz="1500" b="1">
+                        <a:rPr sz="1400" b="1">
                           <a:solidFill>
                             <a:srgbClr val="FFFFFF"/>
                           </a:solidFill>
@@ -3510,7 +5228,7 @@
                     <a:lstStyle/>
                     <a:p>
                       <a:r>
-                        <a:rPr sz="1500" b="1">
+                        <a:rPr sz="1400" b="1">
                           <a:solidFill>
                             <a:srgbClr val="FFFFFF"/>
                           </a:solidFill>
@@ -3527,14 +5245,14 @@
                   </a:tcPr>
                 </a:tc>
               </a:tr>
-              <a:tr h="384048">
+              <a:tr h="347472">
                 <a:tc>
                   <a:txBody>
                     <a:bodyPr/>
                     <a:lstStyle/>
                     <a:p>
                       <a:r>
-                        <a:rPr sz="1400" b="0">
+                        <a:rPr sz="1300" b="0">
                           <a:solidFill>
                             <a:srgbClr val="111111"/>
                           </a:solidFill>
@@ -3556,7 +5274,7 @@
                     <a:lstStyle/>
                     <a:p>
                       <a:r>
-                        <a:rPr sz="1400" b="1">
+                        <a:rPr sz="1300" b="1">
                           <a:solidFill>
                             <a:srgbClr val="1B7A3E"/>
                           </a:solidFill>
@@ -3578,7 +5296,7 @@
                     <a:lstStyle/>
                     <a:p>
                       <a:r>
-                        <a:rPr sz="1400" b="0">
+                        <a:rPr sz="1300" b="0">
                           <a:solidFill>
                             <a:srgbClr val="111111"/>
                           </a:solidFill>
@@ -3595,14 +5313,14 @@
                   </a:tcPr>
                 </a:tc>
               </a:tr>
-              <a:tr h="384048">
+              <a:tr h="347472">
                 <a:tc>
                   <a:txBody>
                     <a:bodyPr/>
                     <a:lstStyle/>
                     <a:p>
                       <a:r>
-                        <a:rPr sz="1400" b="0">
+                        <a:rPr sz="1300" b="0">
                           <a:solidFill>
                             <a:srgbClr val="111111"/>
                           </a:solidFill>
@@ -3624,7 +5342,7 @@
                     <a:lstStyle/>
                     <a:p>
                       <a:r>
-                        <a:rPr sz="1400" b="1">
+                        <a:rPr sz="1300" b="1">
                           <a:solidFill>
                             <a:srgbClr val="1B7A3E"/>
                           </a:solidFill>
@@ -3646,7 +5364,7 @@
                     <a:lstStyle/>
                     <a:p>
                       <a:r>
-                        <a:rPr sz="1400" b="0">
+                        <a:rPr sz="1300" b="0">
                           <a:solidFill>
                             <a:srgbClr val="111111"/>
                           </a:solidFill>
@@ -3663,14 +5381,14 @@
                   </a:tcPr>
                 </a:tc>
               </a:tr>
-              <a:tr h="384048">
+              <a:tr h="347472">
                 <a:tc>
                   <a:txBody>
                     <a:bodyPr/>
                     <a:lstStyle/>
                     <a:p>
                       <a:r>
-                        <a:rPr sz="1400" b="0">
+                        <a:rPr sz="1300" b="0">
                           <a:solidFill>
                             <a:srgbClr val="111111"/>
                           </a:solidFill>
@@ -3692,7 +5410,7 @@
                     <a:lstStyle/>
                     <a:p>
                       <a:r>
-                        <a:rPr sz="1400" b="1">
+                        <a:rPr sz="1300" b="1">
                           <a:solidFill>
                             <a:srgbClr val="1B7A3E"/>
                           </a:solidFill>
@@ -3714,7 +5432,7 @@
                     <a:lstStyle/>
                     <a:p>
                       <a:r>
-                        <a:rPr sz="1400" b="0">
+                        <a:rPr sz="1300" b="0">
                           <a:solidFill>
                             <a:srgbClr val="111111"/>
                           </a:solidFill>
@@ -3731,14 +5449,14 @@
                   </a:tcPr>
                 </a:tc>
               </a:tr>
-              <a:tr h="384048">
+              <a:tr h="347472">
                 <a:tc>
                   <a:txBody>
                     <a:bodyPr/>
                     <a:lstStyle/>
                     <a:p>
                       <a:r>
-                        <a:rPr sz="1400" b="0">
+                        <a:rPr sz="1300" b="0">
                           <a:solidFill>
                             <a:srgbClr val="111111"/>
                           </a:solidFill>
@@ -3760,7 +5478,7 @@
                     <a:lstStyle/>
                     <a:p>
                       <a:r>
-                        <a:rPr sz="1400" b="1">
+                        <a:rPr sz="1300" b="1">
                           <a:solidFill>
                             <a:srgbClr val="1B7A3E"/>
                           </a:solidFill>
@@ -3782,7 +5500,7 @@
                     <a:lstStyle/>
                     <a:p>
                       <a:r>
-                        <a:rPr sz="1400" b="0">
+                        <a:rPr sz="1300" b="0">
                           <a:solidFill>
                             <a:srgbClr val="111111"/>
                           </a:solidFill>
@@ -3799,14 +5517,14 @@
                   </a:tcPr>
                 </a:tc>
               </a:tr>
-              <a:tr h="384048">
+              <a:tr h="347472">
                 <a:tc>
                   <a:txBody>
                     <a:bodyPr/>
                     <a:lstStyle/>
                     <a:p>
                       <a:r>
-                        <a:rPr sz="1400" b="0">
+                        <a:rPr sz="1300" b="0">
                           <a:solidFill>
                             <a:srgbClr val="111111"/>
                           </a:solidFill>
@@ -3828,7 +5546,7 @@
                     <a:lstStyle/>
                     <a:p>
                       <a:r>
-                        <a:rPr sz="1400" b="1">
+                        <a:rPr sz="1300" b="1">
                           <a:solidFill>
                             <a:srgbClr val="1B7A3E"/>
                           </a:solidFill>
@@ -3850,7 +5568,7 @@
                     <a:lstStyle/>
                     <a:p>
                       <a:r>
-                        <a:rPr sz="1400" b="0">
+                        <a:rPr sz="1300" b="0">
                           <a:solidFill>
                             <a:srgbClr val="111111"/>
                           </a:solidFill>
@@ -3867,14 +5585,14 @@
                   </a:tcPr>
                 </a:tc>
               </a:tr>
-              <a:tr h="384048">
+              <a:tr h="347472">
                 <a:tc>
                   <a:txBody>
                     <a:bodyPr/>
                     <a:lstStyle/>
                     <a:p>
                       <a:r>
-                        <a:rPr sz="1400" b="0">
+                        <a:rPr sz="1300" b="0">
                           <a:solidFill>
                             <a:srgbClr val="111111"/>
                           </a:solidFill>
@@ -3896,7 +5614,7 @@
                     <a:lstStyle/>
                     <a:p>
                       <a:r>
-                        <a:rPr sz="1400" b="1">
+                        <a:rPr sz="1300" b="1">
                           <a:solidFill>
                             <a:srgbClr val="1B7A3E"/>
                           </a:solidFill>
@@ -3918,7 +5636,7 @@
                     <a:lstStyle/>
                     <a:p>
                       <a:r>
-                        <a:rPr sz="1400" b="0">
+                        <a:rPr sz="1300" b="0">
                           <a:solidFill>
                             <a:srgbClr val="111111"/>
                           </a:solidFill>
@@ -3935,14 +5653,14 @@
                   </a:tcPr>
                 </a:tc>
               </a:tr>
-              <a:tr h="384048">
+              <a:tr h="347472">
                 <a:tc>
                   <a:txBody>
                     <a:bodyPr/>
                     <a:lstStyle/>
                     <a:p>
                       <a:r>
-                        <a:rPr sz="1400" b="0">
+                        <a:rPr sz="1300" b="0">
                           <a:solidFill>
                             <a:srgbClr val="111111"/>
                           </a:solidFill>
@@ -3964,7 +5682,7 @@
                     <a:lstStyle/>
                     <a:p>
                       <a:r>
-                        <a:rPr sz="1400" b="1">
+                        <a:rPr sz="1300" b="1">
                           <a:solidFill>
                             <a:srgbClr val="1B7A3E"/>
                           </a:solidFill>
@@ -3986,7 +5704,7 @@
                     <a:lstStyle/>
                     <a:p>
                       <a:r>
-                        <a:rPr sz="1400" b="0">
+                        <a:rPr sz="1300" b="0">
                           <a:solidFill>
                             <a:srgbClr val="111111"/>
                           </a:solidFill>
@@ -4003,14 +5721,14 @@
                   </a:tcPr>
                 </a:tc>
               </a:tr>
-              <a:tr h="384048">
+              <a:tr h="347472">
                 <a:tc>
                   <a:txBody>
                     <a:bodyPr/>
                     <a:lstStyle/>
                     <a:p>
                       <a:r>
-                        <a:rPr sz="1400" b="0">
+                        <a:rPr sz="1300" b="0">
                           <a:solidFill>
                             <a:srgbClr val="111111"/>
                           </a:solidFill>
@@ -4032,7 +5750,7 @@
                     <a:lstStyle/>
                     <a:p>
                       <a:r>
-                        <a:rPr sz="1400" b="1">
+                        <a:rPr sz="1300" b="1">
                           <a:solidFill>
                             <a:srgbClr val="1B7A3E"/>
                           </a:solidFill>
@@ -4054,7 +5772,7 @@
                     <a:lstStyle/>
                     <a:p>
                       <a:r>
-                        <a:rPr sz="1400" b="0">
+                        <a:rPr sz="1300" b="0">
                           <a:solidFill>
                             <a:srgbClr val="111111"/>
                           </a:solidFill>
@@ -4071,14 +5789,150 @@
                   </a:tcPr>
                 </a:tc>
               </a:tr>
-              <a:tr h="384048">
+              <a:tr h="347472">
                 <a:tc>
                   <a:txBody>
                     <a:bodyPr/>
                     <a:lstStyle/>
                     <a:p>
                       <a:r>
-                        <a:rPr sz="1400" b="0">
+                        <a:rPr sz="1300" b="0">
+                          <a:solidFill>
+                            <a:srgbClr val="111111"/>
+                          </a:solidFill>
+                          <a:latin typeface="Arial"/>
+                        </a:rPr>
+                        <a:t>Showing individual observations and controlling jitter</a:t>
+                      </a:r>
+                    </a:p>
+                  </a:txBody>
+                  <a:tcPr>
+                    <a:solidFill>
+                      <a:srgbClr val="FFFFFF"/>
+                    </a:solidFill>
+                  </a:tcPr>
+                </a:tc>
+                <a:tc>
+                  <a:txBody>
+                    <a:bodyPr/>
+                    <a:lstStyle/>
+                    <a:p>
+                      <a:r>
+                        <a:rPr sz="1300" b="1">
+                          <a:solidFill>
+                            <a:srgbClr val="1B7A3E"/>
+                          </a:solidFill>
+                          <a:latin typeface="Arial"/>
+                        </a:rPr>
+                        <a:t>PASS</a:t>
+                      </a:r>
+                    </a:p>
+                  </a:txBody>
+                  <a:tcPr>
+                    <a:solidFill>
+                      <a:srgbClr val="FFFFFF"/>
+                    </a:solidFill>
+                  </a:tcPr>
+                </a:tc>
+                <a:tc>
+                  <a:txBody>
+                    <a:bodyPr/>
+                    <a:lstStyle/>
+                    <a:p>
+                      <a:r>
+                        <a:rPr sz="1300" b="0">
+                          <a:solidFill>
+                            <a:srgbClr val="111111"/>
+                          </a:solidFill>
+                          <a:latin typeface="Arial"/>
+                        </a:rPr>
+                        <a:t>20 checks, 17 captures</a:t>
+                      </a:r>
+                    </a:p>
+                  </a:txBody>
+                  <a:tcPr>
+                    <a:solidFill>
+                      <a:srgbClr val="FFFFFF"/>
+                    </a:solidFill>
+                  </a:tcPr>
+                </a:tc>
+              </a:tr>
+              <a:tr h="347472">
+                <a:tc>
+                  <a:txBody>
+                    <a:bodyPr/>
+                    <a:lstStyle/>
+                    <a:p>
+                      <a:r>
+                        <a:rPr sz="1300" b="0">
+                          <a:solidFill>
+                            <a:srgbClr val="111111"/>
+                          </a:solidFill>
+                          <a:latin typeface="Arial"/>
+                        </a:rPr>
+                        <a:t>Publication presets: preview, apply, keep adjusting</a:t>
+                      </a:r>
+                    </a:p>
+                  </a:txBody>
+                  <a:tcPr>
+                    <a:solidFill>
+                      <a:srgbClr val="F2F4F7"/>
+                    </a:solidFill>
+                  </a:tcPr>
+                </a:tc>
+                <a:tc>
+                  <a:txBody>
+                    <a:bodyPr/>
+                    <a:lstStyle/>
+                    <a:p>
+                      <a:r>
+                        <a:rPr sz="1300" b="1">
+                          <a:solidFill>
+                            <a:srgbClr val="1B7A3E"/>
+                          </a:solidFill>
+                          <a:latin typeface="Arial"/>
+                        </a:rPr>
+                        <a:t>PASS</a:t>
+                      </a:r>
+                    </a:p>
+                  </a:txBody>
+                  <a:tcPr>
+                    <a:solidFill>
+                      <a:srgbClr val="F2F4F7"/>
+                    </a:solidFill>
+                  </a:tcPr>
+                </a:tc>
+                <a:tc>
+                  <a:txBody>
+                    <a:bodyPr/>
+                    <a:lstStyle/>
+                    <a:p>
+                      <a:r>
+                        <a:rPr sz="1300" b="0">
+                          <a:solidFill>
+                            <a:srgbClr val="111111"/>
+                          </a:solidFill>
+                          <a:latin typeface="Arial"/>
+                        </a:rPr>
+                        <a:t>13 checks, 9 captures</a:t>
+                      </a:r>
+                    </a:p>
+                  </a:txBody>
+                  <a:tcPr>
+                    <a:solidFill>
+                      <a:srgbClr val="F2F4F7"/>
+                    </a:solidFill>
+                  </a:tcPr>
+                </a:tc>
+              </a:tr>
+              <a:tr h="347472">
+                <a:tc>
+                  <a:txBody>
+                    <a:bodyPr/>
+                    <a:lstStyle/>
+                    <a:p>
+                      <a:r>
+                        <a:rPr sz="1300" b="0">
                           <a:solidFill>
                             <a:srgbClr val="111111"/>
                           </a:solidFill>
@@ -4100,7 +5954,7 @@
                     <a:lstStyle/>
                     <a:p>
                       <a:r>
-                        <a:rPr sz="1400" b="1">
+                        <a:rPr sz="1300" b="1">
                           <a:solidFill>
                             <a:srgbClr val="1B7A3E"/>
                           </a:solidFill>
@@ -4122,7 +5976,7 @@
                     <a:lstStyle/>
                     <a:p>
                       <a:r>
-                        <a:rPr sz="1400" b="0">
+                        <a:rPr sz="1300" b="0">
                           <a:solidFill>
                             <a:srgbClr val="111111"/>
                           </a:solidFill>
@@ -4139,14 +5993,14 @@
                   </a:tcPr>
                 </a:tc>
               </a:tr>
-              <a:tr h="384048">
+              <a:tr h="347472">
                 <a:tc>
                   <a:txBody>
                     <a:bodyPr/>
                     <a:lstStyle/>
                     <a:p>
                       <a:r>
-                        <a:rPr sz="1400" b="0">
+                        <a:rPr sz="1300" b="0">
                           <a:solidFill>
                             <a:srgbClr val="111111"/>
                           </a:solidFill>
@@ -4168,7 +6022,7 @@
                     <a:lstStyle/>
                     <a:p>
                       <a:r>
-                        <a:rPr sz="1400" b="1">
+                        <a:rPr sz="1300" b="1">
                           <a:solidFill>
                             <a:srgbClr val="1B7A3E"/>
                           </a:solidFill>
@@ -4190,7 +6044,7 @@
                     <a:lstStyle/>
                     <a:p>
                       <a:r>
-                        <a:rPr sz="1400" b="0">
+                        <a:rPr sz="1300" b="0">
                           <a:solidFill>
                             <a:srgbClr val="111111"/>
                           </a:solidFill>
@@ -4219,8 +6073,8 @@
         </p:nvSpPr>
         <p:spPr>
           <a:xfrm>
-            <a:off x="548640" y="6327648"/>
-            <a:ext cx="9875520" cy="1097280"/>
+            <a:off x="457200" y="7818120"/>
+            <a:ext cx="7315200" cy="274320"/>
           </a:xfrm>
           <a:prstGeom prst="rect">
             <a:avLst/>
@@ -4239,1666 +6093,13 @@
               </a:lnSpc>
             </a:pPr>
             <a:r>
-              <a:rPr sz="1500" b="0">
+              <a:rPr sz="1000" b="0">
                 <a:solidFill>
                   <a:srgbClr val="666666"/>
                 </a:solidFill>
                 <a:latin typeface="Arial"/>
               </a:rPr>
-              <a:t>Checks are the tutorial's own steps: dataset exists, plot type exists, each column role exists, the figure rendered, options exist, statistics ran, every export was written. Report: tutorial/audit/validation_report.md</a:t>
-            </a:r>
-          </a:p>
-        </p:txBody>
-      </p:sp>
-      <p:sp>
-        <p:nvSpPr>
-          <p:cNvPr id="5" name="TextBox 4"/>
-          <p:cNvSpPr txBox="1"/>
-          <p:nvPr/>
-        </p:nvSpPr>
-        <p:spPr>
-          <a:xfrm>
-            <a:off x="457200" y="7818120"/>
-            <a:ext cx="7315200" cy="274320"/>
-          </a:xfrm>
-          <a:prstGeom prst="rect">
-            <a:avLst/>
-          </a:prstGeom>
-          <a:noFill/>
-        </p:spPr>
-        <p:txBody>
-          <a:bodyPr wrap="square" anchor="t" lIns="45720" rIns="45720">
-            <a:spAutoFit/>
-          </a:bodyPr>
-          <a:lstStyle/>
-          <a:p>
-            <a:pPr algn="l">
-              <a:lnSpc>
-                <a:spcPct val="110000"/>
-              </a:lnSpc>
-            </a:pPr>
-            <a:r>
-              <a:rPr sz="1000" b="0">
-                <a:solidFill>
-                  <a:srgbClr val="666666"/>
-                </a:solidFill>
-                <a:latin typeface="Arial"/>
-              </a:rPr>
-              <a:t>Make My Figure - desktop tutorial   |   13</a:t>
-            </a:r>
-          </a:p>
-        </p:txBody>
-      </p:sp>
-    </p:spTree>
-  </p:cSld>
-  <p:clrMapOvr>
-    <a:masterClrMapping/>
-  </p:clrMapOvr>
-</p:sld>
-</file>
-
-<file path=ppt/slides/slide14.xml><?xml version="1.0" encoding="utf-8"?>
-<p:sld xmlns:a="http://schemas.openxmlformats.org/drawingml/2006/main" xmlns:p="http://schemas.openxmlformats.org/presentationml/2006/main" xmlns:r="http://schemas.openxmlformats.org/officeDocument/2006/relationships">
-  <p:cSld>
-    <p:spTree>
-      <p:nvGrpSpPr>
-        <p:cNvPr id="1" name=""/>
-        <p:cNvGrpSpPr/>
-        <p:nvPr/>
-      </p:nvGrpSpPr>
-      <p:grpSpPr/>
-      <p:sp>
-        <p:nvSpPr>
-          <p:cNvPr id="2" name="TextBox 1"/>
-          <p:cNvSpPr txBox="1"/>
-          <p:nvPr/>
-        </p:nvSpPr>
-        <p:spPr>
-          <a:xfrm>
-            <a:off x="1691640" y="384048"/>
-            <a:ext cx="8869680" cy="1005840"/>
-          </a:xfrm>
-          <a:prstGeom prst="rect">
-            <a:avLst/>
-          </a:prstGeom>
-          <a:noFill/>
-        </p:spPr>
-        <p:txBody>
-          <a:bodyPr wrap="square" anchor="ctr" lIns="45720" rIns="45720">
-            <a:spAutoFit/>
-          </a:bodyPr>
-          <a:lstStyle/>
-          <a:p>
-            <a:pPr algn="l">
-              <a:lnSpc>
-                <a:spcPct val="110000"/>
-              </a:lnSpc>
-            </a:pPr>
-            <a:r>
-              <a:rPr sz="2800" b="1">
-                <a:solidFill>
-                  <a:srgbClr val="1F2937"/>
-                </a:solidFill>
-                <a:latin typeface="Arial"/>
-              </a:rPr>
-              <a:t>39 plot types, one workflow</a:t>
-            </a:r>
-          </a:p>
-        </p:txBody>
-      </p:sp>
-      <p:pic>
-        <p:nvPicPr>
-          <p:cNvPr id="3" name="Picture 2" descr="barplot_with_error_bar.png"/>
-          <p:cNvPicPr>
-            <a:picLocks noChangeAspect="1"/>
-          </p:cNvPicPr>
-          <p:nvPr/>
-        </p:nvPicPr>
-        <p:blipFill>
-          <a:blip r:embed="rId2"/>
-          <a:stretch>
-            <a:fillRect/>
-          </a:stretch>
-        </p:blipFill>
-        <p:spPr>
-          <a:xfrm>
-            <a:off x="411480" y="1859534"/>
-            <a:ext cx="1188720" cy="944372"/>
-          </a:xfrm>
-          <a:prstGeom prst="rect">
-            <a:avLst/>
-          </a:prstGeom>
-        </p:spPr>
-      </p:pic>
-      <p:pic>
-        <p:nvPicPr>
-          <p:cNvPr id="4" name="Picture 3" descr="grouped_barplot_with_error_bar.png"/>
-          <p:cNvPicPr>
-            <a:picLocks noChangeAspect="1"/>
-          </p:cNvPicPr>
-          <p:nvPr/>
-        </p:nvPicPr>
-        <p:blipFill>
-          <a:blip r:embed="rId3"/>
-          <a:stretch>
-            <a:fillRect/>
-          </a:stretch>
-        </p:blipFill>
-        <p:spPr>
-          <a:xfrm>
-            <a:off x="1673352" y="1941720"/>
-            <a:ext cx="1188720" cy="780000"/>
-          </a:xfrm>
-          <a:prstGeom prst="rect">
-            <a:avLst/>
-          </a:prstGeom>
-        </p:spPr>
-      </p:pic>
-      <p:pic>
-        <p:nvPicPr>
-          <p:cNvPr id="5" name="Picture 4" descr="heatmap_clustered_matrix.png"/>
-          <p:cNvPicPr>
-            <a:picLocks noChangeAspect="1"/>
-          </p:cNvPicPr>
-          <p:nvPr/>
-        </p:nvPicPr>
-        <p:blipFill>
-          <a:blip r:embed="rId4"/>
-          <a:stretch>
-            <a:fillRect/>
-          </a:stretch>
-        </p:blipFill>
-        <p:spPr>
-          <a:xfrm>
-            <a:off x="3091400" y="1783080"/>
-            <a:ext cx="876367" cy="1097280"/>
-          </a:xfrm>
-          <a:prstGeom prst="rect">
-            <a:avLst/>
-          </a:prstGeom>
-        </p:spPr>
-      </p:pic>
-      <p:pic>
-        <p:nvPicPr>
-          <p:cNvPr id="6" name="Picture 5" descr="volcano_plot.png"/>
-          <p:cNvPicPr>
-            <a:picLocks noChangeAspect="1"/>
-          </p:cNvPicPr>
-          <p:nvPr/>
-        </p:nvPicPr>
-        <p:blipFill>
-          <a:blip r:embed="rId5"/>
-          <a:stretch>
-            <a:fillRect/>
-          </a:stretch>
-        </p:blipFill>
-        <p:spPr>
-          <a:xfrm>
-            <a:off x="4197096" y="1865260"/>
-            <a:ext cx="1188720" cy="932919"/>
-          </a:xfrm>
-          <a:prstGeom prst="rect">
-            <a:avLst/>
-          </a:prstGeom>
-        </p:spPr>
-      </p:pic>
-      <p:pic>
-        <p:nvPicPr>
-          <p:cNvPr id="7" name="Picture 6" descr="scatterplot_with_regression.png"/>
-          <p:cNvPicPr>
-            <a:picLocks noChangeAspect="1"/>
-          </p:cNvPicPr>
-          <p:nvPr/>
-        </p:nvPicPr>
-        <p:blipFill>
-          <a:blip r:embed="rId6"/>
-          <a:stretch>
-            <a:fillRect/>
-          </a:stretch>
-        </p:blipFill>
-        <p:spPr>
-          <a:xfrm>
-            <a:off x="5458968" y="1933514"/>
-            <a:ext cx="1188720" cy="796412"/>
-          </a:xfrm>
-          <a:prstGeom prst="rect">
-            <a:avLst/>
-          </a:prstGeom>
-        </p:spPr>
-      </p:pic>
-      <p:pic>
-        <p:nvPicPr>
-          <p:cNvPr id="8" name="Picture 7" descr="boxplot_or_violin_with_points.png"/>
-          <p:cNvPicPr>
-            <a:picLocks noChangeAspect="1"/>
-          </p:cNvPicPr>
-          <p:nvPr/>
-        </p:nvPicPr>
-        <p:blipFill>
-          <a:blip r:embed="rId7"/>
-          <a:stretch>
-            <a:fillRect/>
-          </a:stretch>
-        </p:blipFill>
-        <p:spPr>
-          <a:xfrm>
-            <a:off x="6720840" y="1859534"/>
-            <a:ext cx="1188720" cy="944372"/>
-          </a:xfrm>
-          <a:prstGeom prst="rect">
-            <a:avLst/>
-          </a:prstGeom>
-        </p:spPr>
-      </p:pic>
-      <p:pic>
-        <p:nvPicPr>
-          <p:cNvPr id="9" name="Picture 8" descr="lineplot_timecourse_with_error_band.png"/>
-          <p:cNvPicPr>
-            <a:picLocks noChangeAspect="1"/>
-          </p:cNvPicPr>
-          <p:nvPr/>
-        </p:nvPicPr>
-        <p:blipFill>
-          <a:blip r:embed="rId8"/>
-          <a:stretch>
-            <a:fillRect/>
-          </a:stretch>
-        </p:blipFill>
-        <p:spPr>
-          <a:xfrm>
-            <a:off x="7982712" y="1920621"/>
-            <a:ext cx="1188720" cy="822198"/>
-          </a:xfrm>
-          <a:prstGeom prst="rect">
-            <a:avLst/>
-          </a:prstGeom>
-        </p:spPr>
-      </p:pic>
-      <p:pic>
-        <p:nvPicPr>
-          <p:cNvPr id="10" name="Picture 9" descr="ridge_or_density_plot.png"/>
-          <p:cNvPicPr>
-            <a:picLocks noChangeAspect="1"/>
-          </p:cNvPicPr>
-          <p:nvPr/>
-        </p:nvPicPr>
-        <p:blipFill>
-          <a:blip r:embed="rId9"/>
-          <a:stretch>
-            <a:fillRect/>
-          </a:stretch>
-        </p:blipFill>
-        <p:spPr>
-          <a:xfrm>
-            <a:off x="9244584" y="1798447"/>
-            <a:ext cx="1188720" cy="1066546"/>
-          </a:xfrm>
-          <a:prstGeom prst="rect">
-            <a:avLst/>
-          </a:prstGeom>
-        </p:spPr>
-      </p:pic>
-      <p:pic>
-        <p:nvPicPr>
-          <p:cNvPr id="11" name="Picture 10" descr="histogram_distribution.png"/>
-          <p:cNvPicPr>
-            <a:picLocks noChangeAspect="1"/>
-          </p:cNvPicPr>
-          <p:nvPr/>
-        </p:nvPicPr>
-        <p:blipFill>
-          <a:blip r:embed="rId10"/>
-          <a:stretch>
-            <a:fillRect/>
-          </a:stretch>
-        </p:blipFill>
-        <p:spPr>
-          <a:xfrm>
-            <a:off x="411480" y="3173603"/>
-            <a:ext cx="1188720" cy="657098"/>
-          </a:xfrm>
-          <a:prstGeom prst="rect">
-            <a:avLst/>
-          </a:prstGeom>
-        </p:spPr>
-      </p:pic>
-      <p:pic>
-        <p:nvPicPr>
-          <p:cNvPr id="12" name="Picture 11" descr="enrichment_dotplot.png"/>
-          <p:cNvPicPr>
-            <a:picLocks noChangeAspect="1"/>
-          </p:cNvPicPr>
-          <p:nvPr/>
-        </p:nvPicPr>
-        <p:blipFill>
-          <a:blip r:embed="rId11"/>
-          <a:stretch>
-            <a:fillRect/>
-          </a:stretch>
-        </p:blipFill>
-        <p:spPr>
-          <a:xfrm>
-            <a:off x="1673352" y="2962446"/>
-            <a:ext cx="1188720" cy="1079412"/>
-          </a:xfrm>
-          <a:prstGeom prst="rect">
-            <a:avLst/>
-          </a:prstGeom>
-        </p:spPr>
-      </p:pic>
-      <p:pic>
-        <p:nvPicPr>
-          <p:cNvPr id="13" name="Picture 12" descr="kaplan_meier_survival_curve.png"/>
-          <p:cNvPicPr>
-            <a:picLocks noChangeAspect="1"/>
-          </p:cNvPicPr>
-          <p:nvPr/>
-        </p:nvPicPr>
-        <p:blipFill>
-          <a:blip r:embed="rId12"/>
-          <a:stretch>
-            <a:fillRect/>
-          </a:stretch>
-        </p:blipFill>
-        <p:spPr>
-          <a:xfrm>
-            <a:off x="2935224" y="3029966"/>
-            <a:ext cx="1188720" cy="944372"/>
-          </a:xfrm>
-          <a:prstGeom prst="rect">
-            <a:avLst/>
-          </a:prstGeom>
-        </p:spPr>
-      </p:pic>
-      <p:pic>
-        <p:nvPicPr>
-          <p:cNvPr id="14" name="Picture 13" descr="stacked_bar_composition.png"/>
-          <p:cNvPicPr>
-            <a:picLocks noChangeAspect="1"/>
-          </p:cNvPicPr>
-          <p:nvPr/>
-        </p:nvPicPr>
-        <p:blipFill>
-          <a:blip r:embed="rId13"/>
-          <a:stretch>
-            <a:fillRect/>
-          </a:stretch>
-        </p:blipFill>
-        <p:spPr>
-          <a:xfrm>
-            <a:off x="4197096" y="3091053"/>
-            <a:ext cx="1188720" cy="822198"/>
-          </a:xfrm>
-          <a:prstGeom prst="rect">
-            <a:avLst/>
-          </a:prstGeom>
-        </p:spPr>
-      </p:pic>
-      <p:pic>
-        <p:nvPicPr>
-          <p:cNvPr id="15" name="Picture 14" descr="waterfall_plot.png"/>
-          <p:cNvPicPr>
-            <a:picLocks noChangeAspect="1"/>
-          </p:cNvPicPr>
-          <p:nvPr/>
-        </p:nvPicPr>
-        <p:blipFill>
-          <a:blip r:embed="rId14"/>
-          <a:stretch>
-            <a:fillRect/>
-          </a:stretch>
-        </p:blipFill>
-        <p:spPr>
-          <a:xfrm>
-            <a:off x="5458968" y="3151165"/>
-            <a:ext cx="1188720" cy="701973"/>
-          </a:xfrm>
-          <a:prstGeom prst="rect">
-            <a:avLst/>
-          </a:prstGeom>
-        </p:spPr>
-      </p:pic>
-      <p:pic>
-        <p:nvPicPr>
-          <p:cNvPr id="16" name="Picture 15" descr="pca_scatter_from_matrix.png"/>
-          <p:cNvPicPr>
-            <a:picLocks noChangeAspect="1"/>
-          </p:cNvPicPr>
-          <p:nvPr/>
-        </p:nvPicPr>
-        <p:blipFill>
-          <a:blip r:embed="rId15"/>
-          <a:stretch>
-            <a:fillRect/>
-          </a:stretch>
-        </p:blipFill>
-        <p:spPr>
-          <a:xfrm>
-            <a:off x="6720840" y="2998597"/>
-            <a:ext cx="1188720" cy="1007110"/>
-          </a:xfrm>
-          <a:prstGeom prst="rect">
-            <a:avLst/>
-          </a:prstGeom>
-        </p:spPr>
-      </p:pic>
-      <p:pic>
-        <p:nvPicPr>
-          <p:cNvPr id="17" name="Picture 16" descr="oncoprint_mutation_heatmap.png"/>
-          <p:cNvPicPr>
-            <a:picLocks noChangeAspect="1"/>
-          </p:cNvPicPr>
-          <p:nvPr/>
-        </p:nvPicPr>
-        <p:blipFill>
-          <a:blip r:embed="rId16"/>
-          <a:stretch>
-            <a:fillRect/>
-          </a:stretch>
-        </p:blipFill>
-        <p:spPr>
-          <a:xfrm>
-            <a:off x="7982712" y="3089908"/>
-            <a:ext cx="1188720" cy="824488"/>
-          </a:xfrm>
-          <a:prstGeom prst="rect">
-            <a:avLst/>
-          </a:prstGeom>
-        </p:spPr>
-      </p:pic>
-      <p:pic>
-        <p:nvPicPr>
-          <p:cNvPr id="18" name="Picture 17" descr="lollipop_mutation_plot.png"/>
-          <p:cNvPicPr>
-            <a:picLocks noChangeAspect="1"/>
-          </p:cNvPicPr>
-          <p:nvPr/>
-        </p:nvPicPr>
-        <p:blipFill>
-          <a:blip r:embed="rId17"/>
-          <a:stretch>
-            <a:fillRect/>
-          </a:stretch>
-        </p:blipFill>
-        <p:spPr>
-          <a:xfrm>
-            <a:off x="9244584" y="3261234"/>
-            <a:ext cx="1188720" cy="481835"/>
-          </a:xfrm>
-          <a:prstGeom prst="rect">
-            <a:avLst/>
-          </a:prstGeom>
-        </p:spPr>
-      </p:pic>
-      <p:pic>
-        <p:nvPicPr>
-          <p:cNvPr id="19" name="Picture 18" descr="roc_curve.png"/>
-          <p:cNvPicPr>
-            <a:picLocks noChangeAspect="1"/>
-          </p:cNvPicPr>
-          <p:nvPr/>
-        </p:nvPicPr>
-        <p:blipFill>
-          <a:blip r:embed="rId18"/>
-          <a:stretch>
-            <a:fillRect/>
-          </a:stretch>
-        </p:blipFill>
-        <p:spPr>
-          <a:xfrm>
-            <a:off x="446532" y="4123944"/>
-            <a:ext cx="1118616" cy="1097280"/>
-          </a:xfrm>
-          <a:prstGeom prst="rect">
-            <a:avLst/>
-          </a:prstGeom>
-        </p:spPr>
-      </p:pic>
-      <p:pic>
-        <p:nvPicPr>
-          <p:cNvPr id="20" name="Picture 19" descr="forest_plot.png"/>
-          <p:cNvPicPr>
-            <a:picLocks noChangeAspect="1"/>
-          </p:cNvPicPr>
-          <p:nvPr/>
-        </p:nvPicPr>
-        <p:blipFill>
-          <a:blip r:embed="rId19"/>
-          <a:stretch>
-            <a:fillRect/>
-          </a:stretch>
-        </p:blipFill>
-        <p:spPr>
-          <a:xfrm>
-            <a:off x="1673352" y="4259188"/>
-            <a:ext cx="1188720" cy="826791"/>
-          </a:xfrm>
-          <a:prstGeom prst="rect">
-            <a:avLst/>
-          </a:prstGeom>
-        </p:spPr>
-      </p:pic>
-      <p:pic>
-        <p:nvPicPr>
-          <p:cNvPr id="21" name="Picture 20" descr="dot_strip_plot.png"/>
-          <p:cNvPicPr>
-            <a:picLocks noChangeAspect="1"/>
-          </p:cNvPicPr>
-          <p:nvPr/>
-        </p:nvPicPr>
-        <p:blipFill>
-          <a:blip r:embed="rId20"/>
-          <a:stretch>
-            <a:fillRect/>
-          </a:stretch>
-        </p:blipFill>
-        <p:spPr>
-          <a:xfrm>
-            <a:off x="2935224" y="4248277"/>
-            <a:ext cx="1188720" cy="848614"/>
-          </a:xfrm>
-          <a:prstGeom prst="rect">
-            <a:avLst/>
-          </a:prstGeom>
-        </p:spPr>
-      </p:pic>
-      <p:pic>
-        <p:nvPicPr>
-          <p:cNvPr id="22" name="Picture 21" descr="beeswarm_plot.png"/>
-          <p:cNvPicPr>
-            <a:picLocks noChangeAspect="1"/>
-          </p:cNvPicPr>
-          <p:nvPr/>
-        </p:nvPicPr>
-        <p:blipFill>
-          <a:blip r:embed="rId21"/>
-          <a:stretch>
-            <a:fillRect/>
-          </a:stretch>
-        </p:blipFill>
-        <p:spPr>
-          <a:xfrm>
-            <a:off x="4197096" y="4248277"/>
-            <a:ext cx="1188720" cy="848614"/>
-          </a:xfrm>
-          <a:prstGeom prst="rect">
-            <a:avLst/>
-          </a:prstGeom>
-        </p:spPr>
-      </p:pic>
-      <p:pic>
-        <p:nvPicPr>
-          <p:cNvPr id="23" name="Picture 22" descr="paired_slopegraph.png"/>
-          <p:cNvPicPr>
-            <a:picLocks noChangeAspect="1"/>
-          </p:cNvPicPr>
-          <p:nvPr/>
-        </p:nvPicPr>
-        <p:blipFill>
-          <a:blip r:embed="rId22"/>
-          <a:stretch>
-            <a:fillRect/>
-          </a:stretch>
-        </p:blipFill>
-        <p:spPr>
-          <a:xfrm>
-            <a:off x="5458968" y="4169029"/>
-            <a:ext cx="1188720" cy="1007110"/>
-          </a:xfrm>
-          <a:prstGeom prst="rect">
-            <a:avLst/>
-          </a:prstGeom>
-        </p:spPr>
-      </p:pic>
-      <p:pic>
-        <p:nvPicPr>
-          <p:cNvPr id="24" name="Picture 23" descr="raincloud_plot.png"/>
-          <p:cNvPicPr>
-            <a:picLocks noChangeAspect="1"/>
-          </p:cNvPicPr>
-          <p:nvPr/>
-        </p:nvPicPr>
-        <p:blipFill>
-          <a:blip r:embed="rId23"/>
-          <a:stretch>
-            <a:fillRect/>
-          </a:stretch>
-        </p:blipFill>
-        <p:spPr>
-          <a:xfrm>
-            <a:off x="6720840" y="4248277"/>
-            <a:ext cx="1188720" cy="848614"/>
-          </a:xfrm>
-          <a:prstGeom prst="rect">
-            <a:avLst/>
-          </a:prstGeom>
-        </p:spPr>
-      </p:pic>
-      <p:pic>
-        <p:nvPicPr>
-          <p:cNvPr id="25" name="Picture 24" descr="hierarchical_dendrogram.png"/>
-          <p:cNvPicPr>
-            <a:picLocks noChangeAspect="1"/>
-          </p:cNvPicPr>
-          <p:nvPr/>
-        </p:nvPicPr>
-        <p:blipFill>
-          <a:blip r:embed="rId24"/>
-          <a:stretch>
-            <a:fillRect/>
-          </a:stretch>
-        </p:blipFill>
-        <p:spPr>
-          <a:xfrm>
-            <a:off x="7982712" y="4273042"/>
-            <a:ext cx="1188720" cy="799084"/>
-          </a:xfrm>
-          <a:prstGeom prst="rect">
-            <a:avLst/>
-          </a:prstGeom>
-        </p:spPr>
-      </p:pic>
-      <p:pic>
-        <p:nvPicPr>
-          <p:cNvPr id="26" name="Picture 25" descr="ma_plot.png"/>
-          <p:cNvPicPr>
-            <a:picLocks noChangeAspect="1"/>
-          </p:cNvPicPr>
-          <p:nvPr/>
-        </p:nvPicPr>
-        <p:blipFill>
-          <a:blip r:embed="rId25"/>
-          <a:stretch>
-            <a:fillRect/>
-          </a:stretch>
-        </p:blipFill>
-        <p:spPr>
-          <a:xfrm>
-            <a:off x="9244584" y="4260237"/>
-            <a:ext cx="1188720" cy="824694"/>
-          </a:xfrm>
-          <a:prstGeom prst="rect">
-            <a:avLst/>
-          </a:prstGeom>
-        </p:spPr>
-      </p:pic>
-      <p:pic>
-        <p:nvPicPr>
-          <p:cNvPr id="27" name="Picture 26" descr="manhattan_plot.png"/>
-          <p:cNvPicPr>
-            <a:picLocks noChangeAspect="1"/>
-          </p:cNvPicPr>
-          <p:nvPr/>
-        </p:nvPicPr>
-        <p:blipFill>
-          <a:blip r:embed="rId26"/>
-          <a:stretch>
-            <a:fillRect/>
-          </a:stretch>
-        </p:blipFill>
-        <p:spPr>
-          <a:xfrm>
-            <a:off x="411480" y="5552440"/>
-            <a:ext cx="1188720" cy="581152"/>
-          </a:xfrm>
-          <a:prstGeom prst="rect">
-            <a:avLst/>
-          </a:prstGeom>
-        </p:spPr>
-      </p:pic>
-      <p:pic>
-        <p:nvPicPr>
-          <p:cNvPr id="28" name="Picture 27" descr="qq_plot.png"/>
-          <p:cNvPicPr>
-            <a:picLocks noChangeAspect="1"/>
-          </p:cNvPicPr>
-          <p:nvPr/>
-        </p:nvPicPr>
-        <p:blipFill>
-          <a:blip r:embed="rId27"/>
-          <a:stretch>
-            <a:fillRect/>
-          </a:stretch>
-        </p:blipFill>
-        <p:spPr>
-          <a:xfrm>
-            <a:off x="1673352" y="5296535"/>
-            <a:ext cx="1188720" cy="1092962"/>
-          </a:xfrm>
-          <a:prstGeom prst="rect">
-            <a:avLst/>
-          </a:prstGeom>
-        </p:spPr>
-      </p:pic>
-      <p:pic>
-        <p:nvPicPr>
-          <p:cNvPr id="29" name="Picture 28" descr="bland_altman_plot.png"/>
-          <p:cNvPicPr>
-            <a:picLocks noChangeAspect="1"/>
-          </p:cNvPicPr>
-          <p:nvPr/>
-        </p:nvPicPr>
-        <p:blipFill>
-          <a:blip r:embed="rId28"/>
-          <a:stretch>
-            <a:fillRect/>
-          </a:stretch>
-        </p:blipFill>
-        <p:spPr>
-          <a:xfrm>
-            <a:off x="2935224" y="5418709"/>
-            <a:ext cx="1188720" cy="848614"/>
-          </a:xfrm>
-          <a:prstGeom prst="rect">
-            <a:avLst/>
-          </a:prstGeom>
-        </p:spPr>
-      </p:pic>
-      <p:pic>
-        <p:nvPicPr>
-          <p:cNvPr id="30" name="Picture 29" descr="precision_recall_curve.png"/>
-          <p:cNvPicPr>
-            <a:picLocks noChangeAspect="1"/>
-          </p:cNvPicPr>
-          <p:nvPr/>
-        </p:nvPicPr>
-        <p:blipFill>
-          <a:blip r:embed="rId29"/>
-          <a:stretch>
-            <a:fillRect/>
-          </a:stretch>
-        </p:blipFill>
-        <p:spPr>
-          <a:xfrm>
-            <a:off x="4232148" y="5294376"/>
-            <a:ext cx="1118616" cy="1097280"/>
-          </a:xfrm>
-          <a:prstGeom prst="rect">
-            <a:avLst/>
-          </a:prstGeom>
-        </p:spPr>
-      </p:pic>
-      <p:pic>
-        <p:nvPicPr>
-          <p:cNvPr id="31" name="Picture 30" descr="confusion_matrix.png"/>
-          <p:cNvPicPr>
-            <a:picLocks noChangeAspect="1"/>
-          </p:cNvPicPr>
-          <p:nvPr/>
-        </p:nvPicPr>
-        <p:blipFill>
-          <a:blip r:embed="rId30"/>
-          <a:stretch>
-            <a:fillRect/>
-          </a:stretch>
-        </p:blipFill>
-        <p:spPr>
-          <a:xfrm>
-            <a:off x="5503164" y="5294376"/>
-            <a:ext cx="1100328" cy="1097280"/>
-          </a:xfrm>
-          <a:prstGeom prst="rect">
-            <a:avLst/>
-          </a:prstGeom>
-        </p:spPr>
-      </p:pic>
-      <p:pic>
-        <p:nvPicPr>
-          <p:cNvPr id="32" name="Picture 31" descr="calibration_plot.png"/>
-          <p:cNvPicPr>
-            <a:picLocks noChangeAspect="1"/>
-          </p:cNvPicPr>
-          <p:nvPr/>
-        </p:nvPicPr>
-        <p:blipFill>
-          <a:blip r:embed="rId31"/>
-          <a:stretch>
-            <a:fillRect/>
-          </a:stretch>
-        </p:blipFill>
-        <p:spPr>
-          <a:xfrm>
-            <a:off x="6754126" y="5294376"/>
-            <a:ext cx="1122147" cy="1097280"/>
-          </a:xfrm>
-          <a:prstGeom prst="rect">
-            <a:avLst/>
-          </a:prstGeom>
-        </p:spPr>
-      </p:pic>
-      <p:pic>
-        <p:nvPicPr>
-          <p:cNvPr id="33" name="Picture 32" descr="dose_response_curve.png"/>
-          <p:cNvPicPr>
-            <a:picLocks noChangeAspect="1"/>
-          </p:cNvPicPr>
-          <p:nvPr/>
-        </p:nvPicPr>
-        <p:blipFill>
-          <a:blip r:embed="rId32"/>
-          <a:stretch>
-            <a:fillRect/>
-          </a:stretch>
-        </p:blipFill>
-        <p:spPr>
-          <a:xfrm>
-            <a:off x="7982712" y="5424521"/>
-            <a:ext cx="1188720" cy="836989"/>
-          </a:xfrm>
-          <a:prstGeom prst="rect">
-            <a:avLst/>
-          </a:prstGeom>
-        </p:spPr>
-      </p:pic>
-      <p:pic>
-        <p:nvPicPr>
-          <p:cNvPr id="34" name="Picture 33" descr="upset_plot.png"/>
-          <p:cNvPicPr>
-            <a:picLocks noChangeAspect="1"/>
-          </p:cNvPicPr>
-          <p:nvPr/>
-        </p:nvPicPr>
-        <p:blipFill>
-          <a:blip r:embed="rId33"/>
-          <a:stretch>
-            <a:fillRect/>
-          </a:stretch>
-        </p:blipFill>
-        <p:spPr>
-          <a:xfrm>
-            <a:off x="9244584" y="5332836"/>
-            <a:ext cx="1188720" cy="1020360"/>
-          </a:xfrm>
-          <a:prstGeom prst="rect">
-            <a:avLst/>
-          </a:prstGeom>
-        </p:spPr>
-      </p:pic>
-      <p:pic>
-        <p:nvPicPr>
-          <p:cNvPr id="35" name="Picture 34" descr="swimmer_plot.png"/>
-          <p:cNvPicPr>
-            <a:picLocks noChangeAspect="1"/>
-          </p:cNvPicPr>
-          <p:nvPr/>
-        </p:nvPicPr>
-        <p:blipFill>
-          <a:blip r:embed="rId34"/>
-          <a:stretch>
-            <a:fillRect/>
-          </a:stretch>
-        </p:blipFill>
-        <p:spPr>
-          <a:xfrm>
-            <a:off x="482917" y="6464808"/>
-            <a:ext cx="1045845" cy="1097280"/>
-          </a:xfrm>
-          <a:prstGeom prst="rect">
-            <a:avLst/>
-          </a:prstGeom>
-        </p:spPr>
-      </p:pic>
-      <p:pic>
-        <p:nvPicPr>
-          <p:cNvPr id="36" name="Picture 35" descr="spider_plot.png"/>
-          <p:cNvPicPr>
-            <a:picLocks noChangeAspect="1"/>
-          </p:cNvPicPr>
-          <p:nvPr/>
-        </p:nvPicPr>
-        <p:blipFill>
-          <a:blip r:embed="rId35"/>
-          <a:stretch>
-            <a:fillRect/>
-          </a:stretch>
-        </p:blipFill>
-        <p:spPr>
-          <a:xfrm>
-            <a:off x="1673352" y="6646684"/>
-            <a:ext cx="1188720" cy="733527"/>
-          </a:xfrm>
-          <a:prstGeom prst="rect">
-            <a:avLst/>
-          </a:prstGeom>
-        </p:spPr>
-      </p:pic>
-      <p:pic>
-        <p:nvPicPr>
-          <p:cNvPr id="37" name="Picture 36" descr="sankey_plot.png"/>
-          <p:cNvPicPr>
-            <a:picLocks noChangeAspect="1"/>
-          </p:cNvPicPr>
-          <p:nvPr/>
-        </p:nvPicPr>
-        <p:blipFill>
-          <a:blip r:embed="rId36"/>
-          <a:stretch>
-            <a:fillRect/>
-          </a:stretch>
-        </p:blipFill>
-        <p:spPr>
-          <a:xfrm>
-            <a:off x="2935224" y="6632555"/>
-            <a:ext cx="1188720" cy="761785"/>
-          </a:xfrm>
-          <a:prstGeom prst="rect">
-            <a:avLst/>
-          </a:prstGeom>
-        </p:spPr>
-      </p:pic>
-      <p:pic>
-        <p:nvPicPr>
-          <p:cNvPr id="38" name="Picture 37" descr="embedding_scatter.png"/>
-          <p:cNvPicPr>
-            <a:picLocks noChangeAspect="1"/>
-          </p:cNvPicPr>
-          <p:nvPr/>
-        </p:nvPicPr>
-        <p:blipFill>
-          <a:blip r:embed="rId37"/>
-          <a:stretch>
-            <a:fillRect/>
-          </a:stretch>
-        </p:blipFill>
-        <p:spPr>
-          <a:xfrm>
-            <a:off x="4197096" y="6680606"/>
-            <a:ext cx="1188720" cy="665683"/>
-          </a:xfrm>
-          <a:prstGeom prst="rect">
-            <a:avLst/>
-          </a:prstGeom>
-        </p:spPr>
-      </p:pic>
-      <p:pic>
-        <p:nvPicPr>
-          <p:cNvPr id="39" name="Picture 38" descr="hierarchical_clustering.png"/>
-          <p:cNvPicPr>
-            <a:picLocks noChangeAspect="1"/>
-          </p:cNvPicPr>
-          <p:nvPr/>
-        </p:nvPicPr>
-        <p:blipFill>
-          <a:blip r:embed="rId38"/>
-          <a:stretch>
-            <a:fillRect/>
-          </a:stretch>
-        </p:blipFill>
-        <p:spPr>
-          <a:xfrm>
-            <a:off x="5629486" y="6464808"/>
-            <a:ext cx="847684" cy="1097280"/>
-          </a:xfrm>
-          <a:prstGeom prst="rect">
-            <a:avLst/>
-          </a:prstGeom>
-        </p:spPr>
-      </p:pic>
-      <p:pic>
-        <p:nvPicPr>
-          <p:cNvPr id="40" name="Picture 39" descr="network_graph.png"/>
-          <p:cNvPicPr>
-            <a:picLocks noChangeAspect="1"/>
-          </p:cNvPicPr>
-          <p:nvPr/>
-        </p:nvPicPr>
-        <p:blipFill>
-          <a:blip r:embed="rId39"/>
-          <a:stretch>
-            <a:fillRect/>
-          </a:stretch>
-        </p:blipFill>
-        <p:spPr>
-          <a:xfrm>
-            <a:off x="6720840" y="6518148"/>
-            <a:ext cx="1188720" cy="990600"/>
-          </a:xfrm>
-          <a:prstGeom prst="rect">
-            <a:avLst/>
-          </a:prstGeom>
-        </p:spPr>
-      </p:pic>
-      <p:pic>
-        <p:nvPicPr>
-          <p:cNvPr id="41" name="Picture 40" descr="chord_diagram.png"/>
-          <p:cNvPicPr>
-            <a:picLocks noChangeAspect="1"/>
-          </p:cNvPicPr>
-          <p:nvPr/>
-        </p:nvPicPr>
-        <p:blipFill>
-          <a:blip r:embed="rId40"/>
-          <a:stretch>
-            <a:fillRect/>
-          </a:stretch>
-        </p:blipFill>
-        <p:spPr>
-          <a:xfrm>
-            <a:off x="8083430" y="6464808"/>
-            <a:ext cx="987283" cy="1097280"/>
-          </a:xfrm>
-          <a:prstGeom prst="rect">
-            <a:avLst/>
-          </a:prstGeom>
-        </p:spPr>
-      </p:pic>
-      <p:sp>
-        <p:nvSpPr>
-          <p:cNvPr id="42" name="TextBox 41"/>
-          <p:cNvSpPr txBox="1"/>
-          <p:nvPr/>
-        </p:nvSpPr>
-        <p:spPr>
-          <a:xfrm>
-            <a:off x="457200" y="7680960"/>
-            <a:ext cx="10058400" cy="457200"/>
-          </a:xfrm>
-          <a:prstGeom prst="rect">
-            <a:avLst/>
-          </a:prstGeom>
-          <a:noFill/>
-        </p:spPr>
-        <p:txBody>
-          <a:bodyPr wrap="square" anchor="t" lIns="45720" rIns="45720">
-            <a:spAutoFit/>
-          </a:bodyPr>
-          <a:lstStyle/>
-          <a:p>
-            <a:pPr algn="l">
-              <a:lnSpc>
-                <a:spcPct val="110000"/>
-              </a:lnSpc>
-            </a:pPr>
-            <a:r>
-              <a:rPr sz="1300" b="0">
-                <a:solidFill>
-                  <a:srgbClr val="666666"/>
-                </a:solidFill>
-                <a:latin typeface="Arial"/>
-              </a:rPr>
-              <a:t>Every thumbnail is a real render of the bundled synthetic example with the application's own renderer (tutorial/PLOT_GALLERY.md)</a:t>
-            </a:r>
-          </a:p>
-        </p:txBody>
-      </p:sp>
-      <p:sp>
-        <p:nvSpPr>
-          <p:cNvPr id="43" name="TextBox 42"/>
-          <p:cNvSpPr txBox="1"/>
-          <p:nvPr/>
-        </p:nvSpPr>
-        <p:spPr>
-          <a:xfrm>
-            <a:off x="457200" y="7818120"/>
-            <a:ext cx="7315200" cy="274320"/>
-          </a:xfrm>
-          <a:prstGeom prst="rect">
-            <a:avLst/>
-          </a:prstGeom>
-          <a:noFill/>
-        </p:spPr>
-        <p:txBody>
-          <a:bodyPr wrap="square" anchor="t" lIns="45720" rIns="45720">
-            <a:spAutoFit/>
-          </a:bodyPr>
-          <a:lstStyle/>
-          <a:p>
-            <a:pPr algn="l">
-              <a:lnSpc>
-                <a:spcPct val="110000"/>
-              </a:lnSpc>
-            </a:pPr>
-            <a:r>
-              <a:rPr sz="1000" b="0">
-                <a:solidFill>
-                  <a:srgbClr val="666666"/>
-                </a:solidFill>
-                <a:latin typeface="Arial"/>
-              </a:rPr>
-              <a:t>Make My Figure - desktop tutorial   |   14</a:t>
-            </a:r>
-          </a:p>
-        </p:txBody>
-      </p:sp>
-    </p:spTree>
-  </p:cSld>
-  <p:clrMapOvr>
-    <a:masterClrMapping/>
-  </p:clrMapOvr>
-</p:sld>
-</file>
-
-<file path=ppt/slides/slide15.xml><?xml version="1.0" encoding="utf-8"?>
-<p:sld xmlns:a="http://schemas.openxmlformats.org/drawingml/2006/main" xmlns:p="http://schemas.openxmlformats.org/presentationml/2006/main" xmlns:r="http://schemas.openxmlformats.org/officeDocument/2006/relationships">
-  <p:cSld>
-    <p:spTree>
-      <p:nvGrpSpPr>
-        <p:cNvPr id="1" name=""/>
-        <p:cNvGrpSpPr/>
-        <p:nvPr/>
-      </p:nvGrpSpPr>
-      <p:grpSpPr/>
-      <p:sp>
-        <p:nvSpPr>
-          <p:cNvPr id="2" name="TextBox 1"/>
-          <p:cNvSpPr txBox="1"/>
-          <p:nvPr/>
-        </p:nvSpPr>
-        <p:spPr>
-          <a:xfrm>
-            <a:off x="1691640" y="384048"/>
-            <a:ext cx="8869680" cy="1005840"/>
-          </a:xfrm>
-          <a:prstGeom prst="rect">
-            <a:avLst/>
-          </a:prstGeom>
-          <a:noFill/>
-        </p:spPr>
-        <p:txBody>
-          <a:bodyPr wrap="square" anchor="ctr" lIns="45720" rIns="45720">
-            <a:spAutoFit/>
-          </a:bodyPr>
-          <a:lstStyle/>
-          <a:p>
-            <a:pPr algn="l">
-              <a:lnSpc>
-                <a:spcPct val="110000"/>
-              </a:lnSpc>
-            </a:pPr>
-            <a:r>
-              <a:rPr sz="2800" b="1">
-                <a:solidFill>
-                  <a:srgbClr val="1F2937"/>
-                </a:solidFill>
-                <a:latin typeface="Arial"/>
-              </a:rPr>
-              <a:t>Where this goes next</a:t>
-            </a:r>
-          </a:p>
-        </p:txBody>
-      </p:sp>
-      <p:sp>
-        <p:nvSpPr>
-          <p:cNvPr id="3" name="TextBox 2"/>
-          <p:cNvSpPr txBox="1"/>
-          <p:nvPr/>
-        </p:nvSpPr>
-        <p:spPr>
-          <a:xfrm>
-            <a:off x="548640" y="1828800"/>
-            <a:ext cx="10058400" cy="5943600"/>
-          </a:xfrm>
-          <a:prstGeom prst="rect">
-            <a:avLst/>
-          </a:prstGeom>
-          <a:noFill/>
-        </p:spPr>
-        <p:txBody>
-          <a:bodyPr wrap="square" lIns="45720" rIns="45720">
-            <a:spAutoFit/>
-          </a:bodyPr>
-          <a:lstStyle/>
-          <a:p>
-            <a:pPr>
-              <a:lnSpc>
-                <a:spcPct val="108000"/>
-              </a:lnSpc>
-              <a:spcAft>
-                <a:spcPts val="600"/>
-              </a:spcAft>
-            </a:pPr>
-            <a:r>
-              <a:rPr sz="1800" b="1">
-                <a:solidFill>
-                  <a:srgbClr val="111111"/>
-                </a:solidFill>
-                <a:latin typeface="Arial"/>
-              </a:rPr>
-              <a:t>• Pilot delivered for review</a:t>
-            </a:r>
-          </a:p>
-          <a:p>
-            <a:pPr lvl="1">
-              <a:lnSpc>
-                <a:spcPct val="108000"/>
-              </a:lnSpc>
-              <a:spcAft>
-                <a:spcPts val="600"/>
-              </a:spcAft>
-            </a:pPr>
-            <a:r>
-              <a:rPr sz="1600" b="0">
-                <a:solidFill>
-                  <a:srgbClr val="1F2937"/>
-                </a:solidFill>
-                <a:latin typeface="Arial"/>
-              </a:rPr>
-              <a:t>– nine tutorials, getting started, mapping master tutorial, gallery, video scripts, automation, validation</a:t>
-            </a:r>
-          </a:p>
-          <a:p>
-            <a:pPr>
-              <a:lnSpc>
-                <a:spcPct val="108000"/>
-              </a:lnSpc>
-              <a:spcAft>
-                <a:spcPts val="600"/>
-              </a:spcAft>
-            </a:pPr>
-            <a:r>
-              <a:rPr sz="1800" b="1">
-                <a:solidFill>
-                  <a:srgbClr val="111111"/>
-                </a:solidFill>
-                <a:latin typeface="Arial"/>
-              </a:rPr>
-              <a:t>• After review</a:t>
-            </a:r>
-          </a:p>
-          <a:p>
-            <a:pPr lvl="1">
-              <a:lnSpc>
-                <a:spcPct val="108000"/>
-              </a:lnSpc>
-              <a:spcAft>
-                <a:spcPts val="600"/>
-              </a:spcAft>
-            </a:pPr>
-            <a:r>
-              <a:rPr sz="1600" b="0">
-                <a:solidFill>
-                  <a:srgbClr val="1F2937"/>
-                </a:solidFill>
-                <a:latin typeface="Arial"/>
-              </a:rPr>
-              <a:t>– tutorials for the remaining plot types, generated with the same template and validated the same way</a:t>
-            </a:r>
-          </a:p>
-          <a:p>
-            <a:pPr lvl="1">
-              <a:lnSpc>
-                <a:spcPct val="108000"/>
-              </a:lnSpc>
-              <a:spcAft>
-                <a:spcPts val="600"/>
-              </a:spcAft>
-            </a:pPr>
-            <a:r>
-              <a:rPr sz="1600" b="0">
-                <a:solidFill>
-                  <a:srgbClr val="1F2937"/>
-                </a:solidFill>
-                <a:latin typeface="Arial"/>
-              </a:rPr>
-              <a:t>– matrix workflow tutorial and video: expression matrix, metadata, preprocessing you confirm, PCA, heatmap, differential summary, volcano</a:t>
-            </a:r>
-          </a:p>
-          <a:p>
-            <a:pPr lvl="1">
-              <a:lnSpc>
-                <a:spcPct val="108000"/>
-              </a:lnSpc>
-              <a:spcAft>
-                <a:spcPts val="600"/>
-              </a:spcAft>
-            </a:pPr>
-            <a:r>
-              <a:rPr sz="1600" b="0">
-                <a:solidFill>
-                  <a:srgbClr val="1F2937"/>
-                </a:solidFill>
-                <a:latin typeface="Arial"/>
-              </a:rPr>
-              <a:t>– master video (8-12 min) and 1-4 min plot videos recorded from the on-screen runs</a:t>
-            </a:r>
-          </a:p>
-          <a:p>
-            <a:pPr>
-              <a:lnSpc>
-                <a:spcPct val="108000"/>
-              </a:lnSpc>
-              <a:spcAft>
-                <a:spcPts val="600"/>
-              </a:spcAft>
-            </a:pPr>
-            <a:r>
-              <a:rPr sz="1800" b="1">
-                <a:solidFill>
-                  <a:srgbClr val="111111"/>
-                </a:solidFill>
-                <a:latin typeface="Arial"/>
-              </a:rPr>
-              <a:t>• Maintenance loop</a:t>
-            </a:r>
-          </a:p>
-          <a:p>
-            <a:pPr lvl="1">
-              <a:lnSpc>
-                <a:spcPct val="108000"/>
-              </a:lnSpc>
-              <a:spcAft>
-                <a:spcPts val="600"/>
-              </a:spcAft>
-            </a:pPr>
-            <a:r>
-              <a:rPr sz="1600" b="0">
-                <a:solidFill>
-                  <a:srgbClr val="1F2937"/>
-                </a:solidFill>
-                <a:latin typeface="Arial"/>
-              </a:rPr>
-              <a:t>– new plot type appears as MISSING in the inventory; dataset, action script, tutorial, video script, gallery entry, validation</a:t>
-            </a:r>
-          </a:p>
-          <a:p>
-            <a:pPr>
-              <a:lnSpc>
-                <a:spcPct val="108000"/>
-              </a:lnSpc>
-              <a:spcAft>
-                <a:spcPts val="600"/>
-              </a:spcAft>
-            </a:pPr>
-            <a:r>
-              <a:rPr sz="1800" b="1">
-                <a:solidFill>
-                  <a:srgbClr val="111111"/>
-                </a:solidFill>
-                <a:latin typeface="Arial"/>
-              </a:rPr>
-              <a:t>• Not yet: merged, tagged, released or published - author review first</a:t>
-            </a:r>
-          </a:p>
-        </p:txBody>
-      </p:sp>
-      <p:sp>
-        <p:nvSpPr>
-          <p:cNvPr id="4" name="TextBox 3"/>
-          <p:cNvSpPr txBox="1"/>
-          <p:nvPr/>
-        </p:nvSpPr>
-        <p:spPr>
-          <a:xfrm>
-            <a:off x="457200" y="7818120"/>
-            <a:ext cx="7315200" cy="274320"/>
-          </a:xfrm>
-          <a:prstGeom prst="rect">
-            <a:avLst/>
-          </a:prstGeom>
-          <a:noFill/>
-        </p:spPr>
-        <p:txBody>
-          <a:bodyPr wrap="square" anchor="t" lIns="45720" rIns="45720">
-            <a:spAutoFit/>
-          </a:bodyPr>
-          <a:lstStyle/>
-          <a:p>
-            <a:pPr algn="l">
-              <a:lnSpc>
-                <a:spcPct val="110000"/>
-              </a:lnSpc>
-            </a:pPr>
-            <a:r>
-              <a:rPr sz="1000" b="0">
-                <a:solidFill>
-                  <a:srgbClr val="666666"/>
-                </a:solidFill>
-                <a:latin typeface="Arial"/>
-              </a:rPr>
-              <a:t>Make My Figure - desktop tutorial   |   15</a:t>
-            </a:r>
-          </a:p>
-        </p:txBody>
-      </p:sp>
-    </p:spTree>
-  </p:cSld>
-  <p:clrMapOvr>
-    <a:masterClrMapping/>
-  </p:clrMapOvr>
-</p:sld>
-</file>
-
-<file path=ppt/slides/slide16.xml><?xml version="1.0" encoding="utf-8"?>
-<p:sld xmlns:a="http://schemas.openxmlformats.org/drawingml/2006/main" xmlns:p="http://schemas.openxmlformats.org/presentationml/2006/main" xmlns:r="http://schemas.openxmlformats.org/officeDocument/2006/relationships">
-  <p:cSld>
-    <p:spTree>
-      <p:nvGrpSpPr>
-        <p:cNvPr id="1" name=""/>
-        <p:cNvGrpSpPr/>
-        <p:nvPr/>
-      </p:nvGrpSpPr>
-      <p:grpSpPr/>
-      <p:sp>
-        <p:nvSpPr>
-          <p:cNvPr id="2" name="TextBox 1"/>
-          <p:cNvSpPr txBox="1"/>
-          <p:nvPr/>
-        </p:nvSpPr>
-        <p:spPr>
-          <a:xfrm>
-            <a:off x="1691640" y="384048"/>
-            <a:ext cx="8869680" cy="1005840"/>
-          </a:xfrm>
-          <a:prstGeom prst="rect">
-            <a:avLst/>
-          </a:prstGeom>
-          <a:noFill/>
-        </p:spPr>
-        <p:txBody>
-          <a:bodyPr wrap="square" anchor="ctr" lIns="45720" rIns="45720">
-            <a:spAutoFit/>
-          </a:bodyPr>
-          <a:lstStyle/>
-          <a:p>
-            <a:pPr algn="l">
-              <a:lnSpc>
-                <a:spcPct val="110000"/>
-              </a:lnSpc>
-            </a:pPr>
-            <a:r>
-              <a:rPr sz="2800" b="1">
-                <a:solidFill>
-                  <a:srgbClr val="1F2937"/>
-                </a:solidFill>
-                <a:latin typeface="Arial"/>
-              </a:rPr>
-              <a:t>Summary</a:t>
-            </a:r>
-          </a:p>
-        </p:txBody>
-      </p:sp>
-      <p:sp>
-        <p:nvSpPr>
-          <p:cNvPr id="3" name="TextBox 2"/>
-          <p:cNvSpPr txBox="1"/>
-          <p:nvPr/>
-        </p:nvSpPr>
-        <p:spPr>
-          <a:xfrm>
-            <a:off x="548640" y="1828800"/>
-            <a:ext cx="10058400" cy="4572000"/>
-          </a:xfrm>
-          <a:prstGeom prst="rect">
-            <a:avLst/>
-          </a:prstGeom>
-          <a:noFill/>
-        </p:spPr>
-        <p:txBody>
-          <a:bodyPr wrap="square" lIns="45720" rIns="45720">
-            <a:spAutoFit/>
-          </a:bodyPr>
-          <a:lstStyle/>
-          <a:p>
-            <a:pPr>
-              <a:lnSpc>
-                <a:spcPct val="108000"/>
-              </a:lnSpc>
-              <a:spcAft>
-                <a:spcPts val="600"/>
-              </a:spcAft>
-            </a:pPr>
-            <a:r>
-              <a:rPr sz="1900" b="0">
-                <a:solidFill>
-                  <a:srgbClr val="111111"/>
-                </a:solidFill>
-                <a:latin typeface="Arial"/>
-              </a:rPr>
-              <a:t>• Open any table; the application detects, recommends and proposes - and you assign every role yourself</a:t>
-            </a:r>
-          </a:p>
-          <a:p>
-            <a:pPr>
-              <a:lnSpc>
-                <a:spcPct val="108000"/>
-              </a:lnSpc>
-              <a:spcAft>
-                <a:spcPts val="600"/>
-              </a:spcAft>
-            </a:pPr>
-            <a:r>
-              <a:rPr sz="1900" b="0">
-                <a:solidFill>
-                  <a:srgbClr val="111111"/>
-                </a:solidFill>
-                <a:latin typeface="Arial"/>
-              </a:rPr>
-              <a:t>• One table, many figures; one workflow for all plot types</a:t>
-            </a:r>
-          </a:p>
-          <a:p>
-            <a:pPr>
-              <a:lnSpc>
-                <a:spcPct val="108000"/>
-              </a:lnSpc>
-              <a:spcAft>
-                <a:spcPts val="600"/>
-              </a:spcAft>
-            </a:pPr>
-            <a:r>
-              <a:rPr sz="1900" b="0">
-                <a:solidFill>
-                  <a:srgbClr val="111111"/>
-                </a:solidFill>
-                <a:latin typeface="Arial"/>
-              </a:rPr>
-              <a:t>• Statistics run on the figure, with the table and the methods sentence a reviewer expects</a:t>
-            </a:r>
-          </a:p>
-          <a:p>
-            <a:pPr>
-              <a:lnSpc>
-                <a:spcPct val="108000"/>
-              </a:lnSpc>
-              <a:spcAft>
-                <a:spcPts val="600"/>
-              </a:spcAft>
-            </a:pPr>
-            <a:r>
-              <a:rPr sz="1900" b="0">
-                <a:solidFill>
-                  <a:srgbClr val="111111"/>
-                </a:solidFill>
-                <a:latin typeface="Arial"/>
-              </a:rPr>
-              <a:t>• Presets carry the look; PlotSpec carries the recipe; a Figure Package carries recipe and ingredients, verified</a:t>
-            </a:r>
-          </a:p>
-          <a:p>
-            <a:pPr>
-              <a:lnSpc>
-                <a:spcPct val="108000"/>
-              </a:lnSpc>
-              <a:spcAft>
-                <a:spcPts val="600"/>
-              </a:spcAft>
-            </a:pPr>
-            <a:r>
-              <a:rPr sz="1900" b="0">
-                <a:solidFill>
-                  <a:srgbClr val="111111"/>
-                </a:solidFill>
-                <a:latin typeface="Arial"/>
-              </a:rPr>
-              <a:t>• The tutorial is generated from the real application and checked by running it, so it stays honest as the software changes</a:t>
-            </a:r>
-          </a:p>
-        </p:txBody>
-      </p:sp>
-      <p:sp>
-        <p:nvSpPr>
-          <p:cNvPr id="4" name="TextBox 3"/>
-          <p:cNvSpPr txBox="1"/>
-          <p:nvPr/>
-        </p:nvSpPr>
-        <p:spPr>
-          <a:xfrm>
-            <a:off x="548640" y="6309360"/>
-            <a:ext cx="10058400" cy="1097280"/>
-          </a:xfrm>
-          <a:prstGeom prst="rect">
-            <a:avLst/>
-          </a:prstGeom>
-          <a:noFill/>
-        </p:spPr>
-        <p:txBody>
-          <a:bodyPr wrap="square" anchor="t" lIns="45720" rIns="45720">
-            <a:spAutoFit/>
-          </a:bodyPr>
-          <a:lstStyle/>
-          <a:p>
-            <a:pPr algn="l">
-              <a:lnSpc>
-                <a:spcPct val="110000"/>
-              </a:lnSpc>
-            </a:pPr>
-            <a:r>
-              <a:rPr sz="1600" b="0">
-                <a:solidFill>
-                  <a:srgbClr val="666666"/>
-                </a:solidFill>
-                <a:latin typeface="Arial"/>
-              </a:rPr>
-              <a:t>github.com/surPoudel/make-my-figure  -  tutorial/ in the repository (pilot branch, not yet published)</a:t>
-            </a:r>
-          </a:p>
-        </p:txBody>
-      </p:sp>
-      <p:sp>
-        <p:nvSpPr>
-          <p:cNvPr id="5" name="TextBox 4"/>
-          <p:cNvSpPr txBox="1"/>
-          <p:nvPr/>
-        </p:nvSpPr>
-        <p:spPr>
-          <a:xfrm>
-            <a:off x="457200" y="7818120"/>
-            <a:ext cx="7315200" cy="274320"/>
-          </a:xfrm>
-          <a:prstGeom prst="rect">
-            <a:avLst/>
-          </a:prstGeom>
-          <a:noFill/>
-        </p:spPr>
-        <p:txBody>
-          <a:bodyPr wrap="square" anchor="t" lIns="45720" rIns="45720">
-            <a:spAutoFit/>
-          </a:bodyPr>
-          <a:lstStyle/>
-          <a:p>
-            <a:pPr algn="l">
-              <a:lnSpc>
-                <a:spcPct val="110000"/>
-              </a:lnSpc>
-            </a:pPr>
-            <a:r>
-              <a:rPr sz="1000" b="0">
-                <a:solidFill>
-                  <a:srgbClr val="666666"/>
-                </a:solidFill>
-                <a:latin typeface="Arial"/>
-              </a:rPr>
-              <a:t>Make My Figure - desktop tutorial   |   16</a:t>
+              <a:t>Make My Figure - desktop tutorial   |   19</a:t>
             </a:r>
           </a:p>
         </p:txBody>
@@ -5955,151 +6156,14 @@
                 </a:solidFill>
                 <a:latin typeface="Arial"/>
               </a:rPr>
-              <a:t>The problem this solves</a:t>
-            </a:r>
-          </a:p>
-        </p:txBody>
-      </p:sp>
-      <p:sp>
-        <p:nvSpPr>
-          <p:cNvPr id="3" name="TextBox 2"/>
-          <p:cNvSpPr txBox="1"/>
-          <p:nvPr/>
-        </p:nvSpPr>
-        <p:spPr>
-          <a:xfrm>
-            <a:off x="548640" y="1828800"/>
-            <a:ext cx="5669280" cy="5486400"/>
-          </a:xfrm>
-          <a:prstGeom prst="rect">
-            <a:avLst/>
-          </a:prstGeom>
-          <a:noFill/>
-        </p:spPr>
-        <p:txBody>
-          <a:bodyPr wrap="square" lIns="45720" rIns="45720">
-            <a:spAutoFit/>
-          </a:bodyPr>
-          <a:lstStyle/>
-          <a:p>
-            <a:pPr>
-              <a:lnSpc>
-                <a:spcPct val="108000"/>
-              </a:lnSpc>
-              <a:spcAft>
-                <a:spcPts val="600"/>
-              </a:spcAft>
-            </a:pPr>
-            <a:r>
-              <a:rPr sz="1900" b="0">
-                <a:solidFill>
-                  <a:srgbClr val="111111"/>
-                </a:solidFill>
-                <a:latin typeface="Arial"/>
-              </a:rPr>
-              <a:t>• Figures are made from tables whose columns were never named for a plotting program</a:t>
-            </a:r>
-          </a:p>
-          <a:p>
-            <a:pPr>
-              <a:lnSpc>
-                <a:spcPct val="108000"/>
-              </a:lnSpc>
-              <a:spcAft>
-                <a:spcPts val="600"/>
-              </a:spcAft>
-            </a:pPr>
-            <a:r>
-              <a:rPr sz="1900" b="0">
-                <a:solidFill>
-                  <a:srgbClr val="111111"/>
-                </a:solidFill>
-                <a:latin typeface="Arial"/>
-              </a:rPr>
-              <a:t>• Every figure type needs its own script, style and statistics call</a:t>
-            </a:r>
-          </a:p>
-          <a:p>
-            <a:pPr>
-              <a:lnSpc>
-                <a:spcPct val="108000"/>
-              </a:lnSpc>
-              <a:spcAft>
-                <a:spcPts val="600"/>
-              </a:spcAft>
-            </a:pPr>
-            <a:r>
-              <a:rPr sz="1900" b="0">
-                <a:solidFill>
-                  <a:srgbClr val="111111"/>
-                </a:solidFill>
-                <a:latin typeface="Arial"/>
-              </a:rPr>
-              <a:t>• Six months later nobody can say which file, which cut-off and which test produced the panel</a:t>
-            </a:r>
-          </a:p>
-          <a:p>
-            <a:pPr>
-              <a:lnSpc>
-                <a:spcPct val="108000"/>
-              </a:lnSpc>
-              <a:spcAft>
-                <a:spcPts val="600"/>
-              </a:spcAft>
-            </a:pPr>
-            <a:r>
-              <a:rPr sz="1900" b="0">
-                <a:solidFill>
-                  <a:srgbClr val="111111"/>
-                </a:solidFill>
-                <a:latin typeface="Arial"/>
-              </a:rPr>
-              <a:t>• Journals ask for editable vector files, exact P values and a methods sentence</a:t>
-            </a:r>
-          </a:p>
-          <a:p>
-            <a:pPr>
-              <a:lnSpc>
-                <a:spcPct val="108000"/>
-              </a:lnSpc>
-              <a:spcAft>
-                <a:spcPts val="600"/>
-              </a:spcAft>
-            </a:pPr>
-            <a:r>
-              <a:rPr sz="1900" b="1">
-                <a:solidFill>
-                  <a:srgbClr val="111111"/>
-                </a:solidFill>
-                <a:latin typeface="Arial"/>
-              </a:rPr>
-              <a:t>• What a scientist actually wants</a:t>
-            </a:r>
-          </a:p>
-          <a:p>
-            <a:pPr lvl="1">
-              <a:lnSpc>
-                <a:spcPct val="108000"/>
-              </a:lnSpc>
-              <a:spcAft>
-                <a:spcPts val="600"/>
-              </a:spcAft>
-            </a:pPr>
-            <a:r>
-              <a:rPr sz="1700" b="0">
-                <a:solidFill>
-                  <a:srgbClr val="1F2937"/>
-                </a:solidFill>
-                <a:latin typeface="Arial"/>
-              </a:rPr>
-              <a:t>– open the table, say what each column means, pick the figure, add the test, keep the record</a:t>
+              <a:t>A real table rarely arrives ready to plot</a:t>
             </a:r>
           </a:p>
         </p:txBody>
       </p:sp>
       <p:pic>
         <p:nvPicPr>
-          <p:cNvPr id="4" name="Picture 3" descr="01b_data_preview.png"/>
+          <p:cNvPr id="3" name="Picture 2" descr="table_excerpt.png"/>
           <p:cNvPicPr>
             <a:picLocks noChangeAspect="1"/>
           </p:cNvPicPr>
@@ -6113,29 +6177,24 @@
         </p:blipFill>
         <p:spPr>
           <a:xfrm>
-            <a:off x="6400800" y="2490344"/>
-            <a:ext cx="4206240" cy="505712"/>
-          </a:xfrm>
-          <a:prstGeom prst="rect">
-            <a:avLst/>
-          </a:prstGeom>
-          <a:ln w="9525">
-            <a:solidFill>
-              <a:srgbClr val="C8C8C8"/>
-            </a:solidFill>
-          </a:ln>
+            <a:off x="457200" y="3360349"/>
+            <a:ext cx="4754880" cy="1874662"/>
+          </a:xfrm>
+          <a:prstGeom prst="rect">
+            <a:avLst/>
+          </a:prstGeom>
         </p:spPr>
       </p:pic>
       <p:sp>
         <p:nvSpPr>
-          <p:cNvPr id="5" name="TextBox 4"/>
+          <p:cNvPr id="4" name="TextBox 3"/>
           <p:cNvSpPr txBox="1"/>
           <p:nvPr/>
         </p:nvSpPr>
         <p:spPr>
           <a:xfrm>
-            <a:off x="6400800" y="3520440"/>
-            <a:ext cx="4206240" cy="457200"/>
+            <a:off x="5257800" y="3931920"/>
+            <a:ext cx="548640" cy="731520"/>
           </a:xfrm>
           <a:prstGeom prst="rect">
             <a:avLst/>
@@ -6148,26 +6207,26 @@
           </a:bodyPr>
           <a:lstStyle/>
           <a:p>
-            <a:pPr algn="l">
+            <a:pPr algn="ctr">
               <a:lnSpc>
                 <a:spcPct val="110000"/>
               </a:lnSpc>
             </a:pPr>
             <a:r>
-              <a:rPr sz="1300" b="0">
-                <a:solidFill>
-                  <a:srgbClr val="666666"/>
-                </a:solidFill>
-                <a:latin typeface="Arial"/>
-              </a:rPr>
-              <a:t>A real table: col_A, measurement_2, condition_code, thing ...</a:t>
+              <a:rPr sz="4000" b="0">
+                <a:solidFill>
+                  <a:srgbClr val="1D4E89"/>
+                </a:solidFill>
+                <a:latin typeface="Arial"/>
+              </a:rPr>
+              <a:t>→</a:t>
             </a:r>
           </a:p>
         </p:txBody>
       </p:sp>
       <p:pic>
         <p:nvPicPr>
-          <p:cNvPr id="6" name="Picture 5" descr="06_final.png"/>
+          <p:cNvPr id="5" name="Picture 4" descr="J4_black_edged_filled_pres.png"/>
           <p:cNvPicPr>
             <a:picLocks noChangeAspect="1"/>
           </p:cNvPicPr>
@@ -6181,8 +6240,8 @@
         </p:blipFill>
         <p:spPr>
           <a:xfrm>
-            <a:off x="6400800" y="4236407"/>
-            <a:ext cx="4206240" cy="2865746"/>
+            <a:off x="5852160" y="2453021"/>
+            <a:ext cx="4663440" cy="3689318"/>
           </a:xfrm>
           <a:prstGeom prst="rect">
             <a:avLst/>
@@ -6196,14 +6255,14 @@
       </p:pic>
       <p:sp>
         <p:nvSpPr>
-          <p:cNvPr id="7" name="TextBox 6"/>
+          <p:cNvPr id="6" name="TextBox 5"/>
           <p:cNvSpPr txBox="1"/>
           <p:nvPr/>
         </p:nvSpPr>
         <p:spPr>
           <a:xfrm>
-            <a:off x="6400800" y="7269480"/>
-            <a:ext cx="4206240" cy="457200"/>
+            <a:off x="548640" y="7178040"/>
+            <a:ext cx="9875520" cy="731520"/>
           </a:xfrm>
           <a:prstGeom prst="rect">
             <a:avLst/>
@@ -6222,20 +6281,20 @@
               </a:lnSpc>
             </a:pPr>
             <a:r>
-              <a:rPr sz="1300" b="0">
-                <a:solidFill>
-                  <a:srgbClr val="666666"/>
-                </a:solidFill>
-                <a:latin typeface="Arial"/>
-              </a:rPr>
-              <a:t>... and the figure it became, without renaming a column</a:t>
-            </a:r>
-          </a:p>
-        </p:txBody>
-      </p:sp>
-      <p:sp>
-        <p:nvSpPr>
-          <p:cNvPr id="8" name="TextBox 7"/>
+              <a:rPr sz="2000" b="1">
+                <a:solidFill>
+                  <a:srgbClr val="1F2937"/>
+                </a:solidFill>
+                <a:latin typeface="Arial"/>
+              </a:rPr>
+              <a:t>Column names like col_A and measurement_2 are fine: you tell the application what each column means, and the figure follows.</a:t>
+            </a:r>
+          </a:p>
+        </p:txBody>
+      </p:sp>
+      <p:sp>
+        <p:nvSpPr>
+          <p:cNvPr id="7" name="TextBox 6"/>
           <p:cNvSpPr txBox="1"/>
           <p:nvPr/>
         </p:nvSpPr>
@@ -6268,6 +6327,1563 @@
                 <a:latin typeface="Arial"/>
               </a:rPr>
               <a:t>Make My Figure - desktop tutorial   |   2</a:t>
+            </a:r>
+          </a:p>
+        </p:txBody>
+      </p:sp>
+    </p:spTree>
+  </p:cSld>
+  <p:clrMapOvr>
+    <a:masterClrMapping/>
+  </p:clrMapOvr>
+</p:sld>
+</file>
+
+<file path=ppt/slides/slide20.xml><?xml version="1.0" encoding="utf-8"?>
+<p:sld xmlns:a="http://schemas.openxmlformats.org/drawingml/2006/main" xmlns:p="http://schemas.openxmlformats.org/presentationml/2006/main" xmlns:r="http://schemas.openxmlformats.org/officeDocument/2006/relationships">
+  <p:cSld>
+    <p:spTree>
+      <p:nvGrpSpPr>
+        <p:cNvPr id="1" name=""/>
+        <p:cNvGrpSpPr/>
+        <p:nvPr/>
+      </p:nvGrpSpPr>
+      <p:grpSpPr/>
+      <p:sp>
+        <p:nvSpPr>
+          <p:cNvPr id="2" name="TextBox 1"/>
+          <p:cNvSpPr txBox="1"/>
+          <p:nvPr/>
+        </p:nvSpPr>
+        <p:spPr>
+          <a:xfrm>
+            <a:off x="1691640" y="384048"/>
+            <a:ext cx="8869680" cy="1005840"/>
+          </a:xfrm>
+          <a:prstGeom prst="rect">
+            <a:avLst/>
+          </a:prstGeom>
+          <a:noFill/>
+        </p:spPr>
+        <p:txBody>
+          <a:bodyPr wrap="square" anchor="ctr" lIns="45720" rIns="45720">
+            <a:spAutoFit/>
+          </a:bodyPr>
+          <a:lstStyle/>
+          <a:p>
+            <a:pPr algn="l">
+              <a:lnSpc>
+                <a:spcPct val="110000"/>
+              </a:lnSpc>
+            </a:pPr>
+            <a:r>
+              <a:rPr sz="2800" b="1">
+                <a:solidFill>
+                  <a:srgbClr val="1F2937"/>
+                </a:solidFill>
+                <a:latin typeface="Arial"/>
+              </a:rPr>
+              <a:t>39 plot types, one workflow</a:t>
+            </a:r>
+          </a:p>
+        </p:txBody>
+      </p:sp>
+      <p:pic>
+        <p:nvPicPr>
+          <p:cNvPr id="3" name="Picture 2" descr="barplot_with_error_bar.png"/>
+          <p:cNvPicPr>
+            <a:picLocks noChangeAspect="1"/>
+          </p:cNvPicPr>
+          <p:nvPr/>
+        </p:nvPicPr>
+        <p:blipFill>
+          <a:blip r:embed="rId2"/>
+          <a:stretch>
+            <a:fillRect/>
+          </a:stretch>
+        </p:blipFill>
+        <p:spPr>
+          <a:xfrm>
+            <a:off x="411480" y="1859534"/>
+            <a:ext cx="1188720" cy="944372"/>
+          </a:xfrm>
+          <a:prstGeom prst="rect">
+            <a:avLst/>
+          </a:prstGeom>
+        </p:spPr>
+      </p:pic>
+      <p:pic>
+        <p:nvPicPr>
+          <p:cNvPr id="4" name="Picture 3" descr="grouped_barplot_with_error_bar.png"/>
+          <p:cNvPicPr>
+            <a:picLocks noChangeAspect="1"/>
+          </p:cNvPicPr>
+          <p:nvPr/>
+        </p:nvPicPr>
+        <p:blipFill>
+          <a:blip r:embed="rId3"/>
+          <a:stretch>
+            <a:fillRect/>
+          </a:stretch>
+        </p:blipFill>
+        <p:spPr>
+          <a:xfrm>
+            <a:off x="1673352" y="1941720"/>
+            <a:ext cx="1188720" cy="780000"/>
+          </a:xfrm>
+          <a:prstGeom prst="rect">
+            <a:avLst/>
+          </a:prstGeom>
+        </p:spPr>
+      </p:pic>
+      <p:pic>
+        <p:nvPicPr>
+          <p:cNvPr id="5" name="Picture 4" descr="heatmap_clustered_matrix.png"/>
+          <p:cNvPicPr>
+            <a:picLocks noChangeAspect="1"/>
+          </p:cNvPicPr>
+          <p:nvPr/>
+        </p:nvPicPr>
+        <p:blipFill>
+          <a:blip r:embed="rId4"/>
+          <a:stretch>
+            <a:fillRect/>
+          </a:stretch>
+        </p:blipFill>
+        <p:spPr>
+          <a:xfrm>
+            <a:off x="3091400" y="1783080"/>
+            <a:ext cx="876367" cy="1097280"/>
+          </a:xfrm>
+          <a:prstGeom prst="rect">
+            <a:avLst/>
+          </a:prstGeom>
+        </p:spPr>
+      </p:pic>
+      <p:pic>
+        <p:nvPicPr>
+          <p:cNvPr id="6" name="Picture 5" descr="volcano_plot.png"/>
+          <p:cNvPicPr>
+            <a:picLocks noChangeAspect="1"/>
+          </p:cNvPicPr>
+          <p:nvPr/>
+        </p:nvPicPr>
+        <p:blipFill>
+          <a:blip r:embed="rId5"/>
+          <a:stretch>
+            <a:fillRect/>
+          </a:stretch>
+        </p:blipFill>
+        <p:spPr>
+          <a:xfrm>
+            <a:off x="4197096" y="1865260"/>
+            <a:ext cx="1188720" cy="932919"/>
+          </a:xfrm>
+          <a:prstGeom prst="rect">
+            <a:avLst/>
+          </a:prstGeom>
+        </p:spPr>
+      </p:pic>
+      <p:pic>
+        <p:nvPicPr>
+          <p:cNvPr id="7" name="Picture 6" descr="scatterplot_with_regression.png"/>
+          <p:cNvPicPr>
+            <a:picLocks noChangeAspect="1"/>
+          </p:cNvPicPr>
+          <p:nvPr/>
+        </p:nvPicPr>
+        <p:blipFill>
+          <a:blip r:embed="rId6"/>
+          <a:stretch>
+            <a:fillRect/>
+          </a:stretch>
+        </p:blipFill>
+        <p:spPr>
+          <a:xfrm>
+            <a:off x="5458968" y="1933514"/>
+            <a:ext cx="1188720" cy="796412"/>
+          </a:xfrm>
+          <a:prstGeom prst="rect">
+            <a:avLst/>
+          </a:prstGeom>
+        </p:spPr>
+      </p:pic>
+      <p:pic>
+        <p:nvPicPr>
+          <p:cNvPr id="8" name="Picture 7" descr="boxplot_or_violin_with_points.png"/>
+          <p:cNvPicPr>
+            <a:picLocks noChangeAspect="1"/>
+          </p:cNvPicPr>
+          <p:nvPr/>
+        </p:nvPicPr>
+        <p:blipFill>
+          <a:blip r:embed="rId7"/>
+          <a:stretch>
+            <a:fillRect/>
+          </a:stretch>
+        </p:blipFill>
+        <p:spPr>
+          <a:xfrm>
+            <a:off x="6720840" y="1859534"/>
+            <a:ext cx="1188720" cy="944372"/>
+          </a:xfrm>
+          <a:prstGeom prst="rect">
+            <a:avLst/>
+          </a:prstGeom>
+        </p:spPr>
+      </p:pic>
+      <p:pic>
+        <p:nvPicPr>
+          <p:cNvPr id="9" name="Picture 8" descr="lineplot_timecourse_with_error_band.png"/>
+          <p:cNvPicPr>
+            <a:picLocks noChangeAspect="1"/>
+          </p:cNvPicPr>
+          <p:nvPr/>
+        </p:nvPicPr>
+        <p:blipFill>
+          <a:blip r:embed="rId8"/>
+          <a:stretch>
+            <a:fillRect/>
+          </a:stretch>
+        </p:blipFill>
+        <p:spPr>
+          <a:xfrm>
+            <a:off x="7982712" y="1920621"/>
+            <a:ext cx="1188720" cy="822198"/>
+          </a:xfrm>
+          <a:prstGeom prst="rect">
+            <a:avLst/>
+          </a:prstGeom>
+        </p:spPr>
+      </p:pic>
+      <p:pic>
+        <p:nvPicPr>
+          <p:cNvPr id="10" name="Picture 9" descr="ridge_or_density_plot.png"/>
+          <p:cNvPicPr>
+            <a:picLocks noChangeAspect="1"/>
+          </p:cNvPicPr>
+          <p:nvPr/>
+        </p:nvPicPr>
+        <p:blipFill>
+          <a:blip r:embed="rId9"/>
+          <a:stretch>
+            <a:fillRect/>
+          </a:stretch>
+        </p:blipFill>
+        <p:spPr>
+          <a:xfrm>
+            <a:off x="9244584" y="1798447"/>
+            <a:ext cx="1188720" cy="1066546"/>
+          </a:xfrm>
+          <a:prstGeom prst="rect">
+            <a:avLst/>
+          </a:prstGeom>
+        </p:spPr>
+      </p:pic>
+      <p:pic>
+        <p:nvPicPr>
+          <p:cNvPr id="11" name="Picture 10" descr="histogram_distribution.png"/>
+          <p:cNvPicPr>
+            <a:picLocks noChangeAspect="1"/>
+          </p:cNvPicPr>
+          <p:nvPr/>
+        </p:nvPicPr>
+        <p:blipFill>
+          <a:blip r:embed="rId10"/>
+          <a:stretch>
+            <a:fillRect/>
+          </a:stretch>
+        </p:blipFill>
+        <p:spPr>
+          <a:xfrm>
+            <a:off x="411480" y="3173603"/>
+            <a:ext cx="1188720" cy="657098"/>
+          </a:xfrm>
+          <a:prstGeom prst="rect">
+            <a:avLst/>
+          </a:prstGeom>
+        </p:spPr>
+      </p:pic>
+      <p:pic>
+        <p:nvPicPr>
+          <p:cNvPr id="12" name="Picture 11" descr="enrichment_dotplot.png"/>
+          <p:cNvPicPr>
+            <a:picLocks noChangeAspect="1"/>
+          </p:cNvPicPr>
+          <p:nvPr/>
+        </p:nvPicPr>
+        <p:blipFill>
+          <a:blip r:embed="rId11"/>
+          <a:stretch>
+            <a:fillRect/>
+          </a:stretch>
+        </p:blipFill>
+        <p:spPr>
+          <a:xfrm>
+            <a:off x="1673352" y="2962446"/>
+            <a:ext cx="1188720" cy="1079412"/>
+          </a:xfrm>
+          <a:prstGeom prst="rect">
+            <a:avLst/>
+          </a:prstGeom>
+        </p:spPr>
+      </p:pic>
+      <p:pic>
+        <p:nvPicPr>
+          <p:cNvPr id="13" name="Picture 12" descr="kaplan_meier_survival_curve.png"/>
+          <p:cNvPicPr>
+            <a:picLocks noChangeAspect="1"/>
+          </p:cNvPicPr>
+          <p:nvPr/>
+        </p:nvPicPr>
+        <p:blipFill>
+          <a:blip r:embed="rId12"/>
+          <a:stretch>
+            <a:fillRect/>
+          </a:stretch>
+        </p:blipFill>
+        <p:spPr>
+          <a:xfrm>
+            <a:off x="2935224" y="3029966"/>
+            <a:ext cx="1188720" cy="944372"/>
+          </a:xfrm>
+          <a:prstGeom prst="rect">
+            <a:avLst/>
+          </a:prstGeom>
+        </p:spPr>
+      </p:pic>
+      <p:pic>
+        <p:nvPicPr>
+          <p:cNvPr id="14" name="Picture 13" descr="stacked_bar_composition.png"/>
+          <p:cNvPicPr>
+            <a:picLocks noChangeAspect="1"/>
+          </p:cNvPicPr>
+          <p:nvPr/>
+        </p:nvPicPr>
+        <p:blipFill>
+          <a:blip r:embed="rId13"/>
+          <a:stretch>
+            <a:fillRect/>
+          </a:stretch>
+        </p:blipFill>
+        <p:spPr>
+          <a:xfrm>
+            <a:off x="4197096" y="3091053"/>
+            <a:ext cx="1188720" cy="822198"/>
+          </a:xfrm>
+          <a:prstGeom prst="rect">
+            <a:avLst/>
+          </a:prstGeom>
+        </p:spPr>
+      </p:pic>
+      <p:pic>
+        <p:nvPicPr>
+          <p:cNvPr id="15" name="Picture 14" descr="waterfall_plot.png"/>
+          <p:cNvPicPr>
+            <a:picLocks noChangeAspect="1"/>
+          </p:cNvPicPr>
+          <p:nvPr/>
+        </p:nvPicPr>
+        <p:blipFill>
+          <a:blip r:embed="rId14"/>
+          <a:stretch>
+            <a:fillRect/>
+          </a:stretch>
+        </p:blipFill>
+        <p:spPr>
+          <a:xfrm>
+            <a:off x="5458968" y="3151165"/>
+            <a:ext cx="1188720" cy="701973"/>
+          </a:xfrm>
+          <a:prstGeom prst="rect">
+            <a:avLst/>
+          </a:prstGeom>
+        </p:spPr>
+      </p:pic>
+      <p:pic>
+        <p:nvPicPr>
+          <p:cNvPr id="16" name="Picture 15" descr="pca_scatter_from_matrix.png"/>
+          <p:cNvPicPr>
+            <a:picLocks noChangeAspect="1"/>
+          </p:cNvPicPr>
+          <p:nvPr/>
+        </p:nvPicPr>
+        <p:blipFill>
+          <a:blip r:embed="rId15"/>
+          <a:stretch>
+            <a:fillRect/>
+          </a:stretch>
+        </p:blipFill>
+        <p:spPr>
+          <a:xfrm>
+            <a:off x="6720840" y="2998597"/>
+            <a:ext cx="1188720" cy="1007110"/>
+          </a:xfrm>
+          <a:prstGeom prst="rect">
+            <a:avLst/>
+          </a:prstGeom>
+        </p:spPr>
+      </p:pic>
+      <p:pic>
+        <p:nvPicPr>
+          <p:cNvPr id="17" name="Picture 16" descr="oncoprint_mutation_heatmap.png"/>
+          <p:cNvPicPr>
+            <a:picLocks noChangeAspect="1"/>
+          </p:cNvPicPr>
+          <p:nvPr/>
+        </p:nvPicPr>
+        <p:blipFill>
+          <a:blip r:embed="rId16"/>
+          <a:stretch>
+            <a:fillRect/>
+          </a:stretch>
+        </p:blipFill>
+        <p:spPr>
+          <a:xfrm>
+            <a:off x="7982712" y="3089908"/>
+            <a:ext cx="1188720" cy="824488"/>
+          </a:xfrm>
+          <a:prstGeom prst="rect">
+            <a:avLst/>
+          </a:prstGeom>
+        </p:spPr>
+      </p:pic>
+      <p:pic>
+        <p:nvPicPr>
+          <p:cNvPr id="18" name="Picture 17" descr="lollipop_mutation_plot.png"/>
+          <p:cNvPicPr>
+            <a:picLocks noChangeAspect="1"/>
+          </p:cNvPicPr>
+          <p:nvPr/>
+        </p:nvPicPr>
+        <p:blipFill>
+          <a:blip r:embed="rId17"/>
+          <a:stretch>
+            <a:fillRect/>
+          </a:stretch>
+        </p:blipFill>
+        <p:spPr>
+          <a:xfrm>
+            <a:off x="9244584" y="3261234"/>
+            <a:ext cx="1188720" cy="481835"/>
+          </a:xfrm>
+          <a:prstGeom prst="rect">
+            <a:avLst/>
+          </a:prstGeom>
+        </p:spPr>
+      </p:pic>
+      <p:pic>
+        <p:nvPicPr>
+          <p:cNvPr id="19" name="Picture 18" descr="roc_curve.png"/>
+          <p:cNvPicPr>
+            <a:picLocks noChangeAspect="1"/>
+          </p:cNvPicPr>
+          <p:nvPr/>
+        </p:nvPicPr>
+        <p:blipFill>
+          <a:blip r:embed="rId18"/>
+          <a:stretch>
+            <a:fillRect/>
+          </a:stretch>
+        </p:blipFill>
+        <p:spPr>
+          <a:xfrm>
+            <a:off x="446532" y="4123944"/>
+            <a:ext cx="1118616" cy="1097280"/>
+          </a:xfrm>
+          <a:prstGeom prst="rect">
+            <a:avLst/>
+          </a:prstGeom>
+        </p:spPr>
+      </p:pic>
+      <p:pic>
+        <p:nvPicPr>
+          <p:cNvPr id="20" name="Picture 19" descr="forest_plot.png"/>
+          <p:cNvPicPr>
+            <a:picLocks noChangeAspect="1"/>
+          </p:cNvPicPr>
+          <p:nvPr/>
+        </p:nvPicPr>
+        <p:blipFill>
+          <a:blip r:embed="rId19"/>
+          <a:stretch>
+            <a:fillRect/>
+          </a:stretch>
+        </p:blipFill>
+        <p:spPr>
+          <a:xfrm>
+            <a:off x="1673352" y="4259188"/>
+            <a:ext cx="1188720" cy="826791"/>
+          </a:xfrm>
+          <a:prstGeom prst="rect">
+            <a:avLst/>
+          </a:prstGeom>
+        </p:spPr>
+      </p:pic>
+      <p:pic>
+        <p:nvPicPr>
+          <p:cNvPr id="21" name="Picture 20" descr="dot_strip_plot.png"/>
+          <p:cNvPicPr>
+            <a:picLocks noChangeAspect="1"/>
+          </p:cNvPicPr>
+          <p:nvPr/>
+        </p:nvPicPr>
+        <p:blipFill>
+          <a:blip r:embed="rId20"/>
+          <a:stretch>
+            <a:fillRect/>
+          </a:stretch>
+        </p:blipFill>
+        <p:spPr>
+          <a:xfrm>
+            <a:off x="2935224" y="4248277"/>
+            <a:ext cx="1188720" cy="848614"/>
+          </a:xfrm>
+          <a:prstGeom prst="rect">
+            <a:avLst/>
+          </a:prstGeom>
+        </p:spPr>
+      </p:pic>
+      <p:pic>
+        <p:nvPicPr>
+          <p:cNvPr id="22" name="Picture 21" descr="beeswarm_plot.png"/>
+          <p:cNvPicPr>
+            <a:picLocks noChangeAspect="1"/>
+          </p:cNvPicPr>
+          <p:nvPr/>
+        </p:nvPicPr>
+        <p:blipFill>
+          <a:blip r:embed="rId21"/>
+          <a:stretch>
+            <a:fillRect/>
+          </a:stretch>
+        </p:blipFill>
+        <p:spPr>
+          <a:xfrm>
+            <a:off x="4197096" y="4248277"/>
+            <a:ext cx="1188720" cy="848614"/>
+          </a:xfrm>
+          <a:prstGeom prst="rect">
+            <a:avLst/>
+          </a:prstGeom>
+        </p:spPr>
+      </p:pic>
+      <p:pic>
+        <p:nvPicPr>
+          <p:cNvPr id="23" name="Picture 22" descr="paired_slopegraph.png"/>
+          <p:cNvPicPr>
+            <a:picLocks noChangeAspect="1"/>
+          </p:cNvPicPr>
+          <p:nvPr/>
+        </p:nvPicPr>
+        <p:blipFill>
+          <a:blip r:embed="rId22"/>
+          <a:stretch>
+            <a:fillRect/>
+          </a:stretch>
+        </p:blipFill>
+        <p:spPr>
+          <a:xfrm>
+            <a:off x="5458968" y="4169029"/>
+            <a:ext cx="1188720" cy="1007110"/>
+          </a:xfrm>
+          <a:prstGeom prst="rect">
+            <a:avLst/>
+          </a:prstGeom>
+        </p:spPr>
+      </p:pic>
+      <p:pic>
+        <p:nvPicPr>
+          <p:cNvPr id="24" name="Picture 23" descr="raincloud_plot.png"/>
+          <p:cNvPicPr>
+            <a:picLocks noChangeAspect="1"/>
+          </p:cNvPicPr>
+          <p:nvPr/>
+        </p:nvPicPr>
+        <p:blipFill>
+          <a:blip r:embed="rId23"/>
+          <a:stretch>
+            <a:fillRect/>
+          </a:stretch>
+        </p:blipFill>
+        <p:spPr>
+          <a:xfrm>
+            <a:off x="6720840" y="4248277"/>
+            <a:ext cx="1188720" cy="848614"/>
+          </a:xfrm>
+          <a:prstGeom prst="rect">
+            <a:avLst/>
+          </a:prstGeom>
+        </p:spPr>
+      </p:pic>
+      <p:pic>
+        <p:nvPicPr>
+          <p:cNvPr id="25" name="Picture 24" descr="hierarchical_dendrogram.png"/>
+          <p:cNvPicPr>
+            <a:picLocks noChangeAspect="1"/>
+          </p:cNvPicPr>
+          <p:nvPr/>
+        </p:nvPicPr>
+        <p:blipFill>
+          <a:blip r:embed="rId24"/>
+          <a:stretch>
+            <a:fillRect/>
+          </a:stretch>
+        </p:blipFill>
+        <p:spPr>
+          <a:xfrm>
+            <a:off x="7982712" y="4273042"/>
+            <a:ext cx="1188720" cy="799084"/>
+          </a:xfrm>
+          <a:prstGeom prst="rect">
+            <a:avLst/>
+          </a:prstGeom>
+        </p:spPr>
+      </p:pic>
+      <p:pic>
+        <p:nvPicPr>
+          <p:cNvPr id="26" name="Picture 25" descr="ma_plot.png"/>
+          <p:cNvPicPr>
+            <a:picLocks noChangeAspect="1"/>
+          </p:cNvPicPr>
+          <p:nvPr/>
+        </p:nvPicPr>
+        <p:blipFill>
+          <a:blip r:embed="rId25"/>
+          <a:stretch>
+            <a:fillRect/>
+          </a:stretch>
+        </p:blipFill>
+        <p:spPr>
+          <a:xfrm>
+            <a:off x="9244584" y="4260237"/>
+            <a:ext cx="1188720" cy="824694"/>
+          </a:xfrm>
+          <a:prstGeom prst="rect">
+            <a:avLst/>
+          </a:prstGeom>
+        </p:spPr>
+      </p:pic>
+      <p:pic>
+        <p:nvPicPr>
+          <p:cNvPr id="27" name="Picture 26" descr="manhattan_plot.png"/>
+          <p:cNvPicPr>
+            <a:picLocks noChangeAspect="1"/>
+          </p:cNvPicPr>
+          <p:nvPr/>
+        </p:nvPicPr>
+        <p:blipFill>
+          <a:blip r:embed="rId26"/>
+          <a:stretch>
+            <a:fillRect/>
+          </a:stretch>
+        </p:blipFill>
+        <p:spPr>
+          <a:xfrm>
+            <a:off x="411480" y="5552440"/>
+            <a:ext cx="1188720" cy="581152"/>
+          </a:xfrm>
+          <a:prstGeom prst="rect">
+            <a:avLst/>
+          </a:prstGeom>
+        </p:spPr>
+      </p:pic>
+      <p:pic>
+        <p:nvPicPr>
+          <p:cNvPr id="28" name="Picture 27" descr="qq_plot.png"/>
+          <p:cNvPicPr>
+            <a:picLocks noChangeAspect="1"/>
+          </p:cNvPicPr>
+          <p:nvPr/>
+        </p:nvPicPr>
+        <p:blipFill>
+          <a:blip r:embed="rId27"/>
+          <a:stretch>
+            <a:fillRect/>
+          </a:stretch>
+        </p:blipFill>
+        <p:spPr>
+          <a:xfrm>
+            <a:off x="1673352" y="5296535"/>
+            <a:ext cx="1188720" cy="1092962"/>
+          </a:xfrm>
+          <a:prstGeom prst="rect">
+            <a:avLst/>
+          </a:prstGeom>
+        </p:spPr>
+      </p:pic>
+      <p:pic>
+        <p:nvPicPr>
+          <p:cNvPr id="29" name="Picture 28" descr="bland_altman_plot.png"/>
+          <p:cNvPicPr>
+            <a:picLocks noChangeAspect="1"/>
+          </p:cNvPicPr>
+          <p:nvPr/>
+        </p:nvPicPr>
+        <p:blipFill>
+          <a:blip r:embed="rId28"/>
+          <a:stretch>
+            <a:fillRect/>
+          </a:stretch>
+        </p:blipFill>
+        <p:spPr>
+          <a:xfrm>
+            <a:off x="2935224" y="5418709"/>
+            <a:ext cx="1188720" cy="848614"/>
+          </a:xfrm>
+          <a:prstGeom prst="rect">
+            <a:avLst/>
+          </a:prstGeom>
+        </p:spPr>
+      </p:pic>
+      <p:pic>
+        <p:nvPicPr>
+          <p:cNvPr id="30" name="Picture 29" descr="precision_recall_curve.png"/>
+          <p:cNvPicPr>
+            <a:picLocks noChangeAspect="1"/>
+          </p:cNvPicPr>
+          <p:nvPr/>
+        </p:nvPicPr>
+        <p:blipFill>
+          <a:blip r:embed="rId29"/>
+          <a:stretch>
+            <a:fillRect/>
+          </a:stretch>
+        </p:blipFill>
+        <p:spPr>
+          <a:xfrm>
+            <a:off x="4232148" y="5294376"/>
+            <a:ext cx="1118616" cy="1097280"/>
+          </a:xfrm>
+          <a:prstGeom prst="rect">
+            <a:avLst/>
+          </a:prstGeom>
+        </p:spPr>
+      </p:pic>
+      <p:pic>
+        <p:nvPicPr>
+          <p:cNvPr id="31" name="Picture 30" descr="confusion_matrix.png"/>
+          <p:cNvPicPr>
+            <a:picLocks noChangeAspect="1"/>
+          </p:cNvPicPr>
+          <p:nvPr/>
+        </p:nvPicPr>
+        <p:blipFill>
+          <a:blip r:embed="rId30"/>
+          <a:stretch>
+            <a:fillRect/>
+          </a:stretch>
+        </p:blipFill>
+        <p:spPr>
+          <a:xfrm>
+            <a:off x="5503164" y="5294376"/>
+            <a:ext cx="1100328" cy="1097280"/>
+          </a:xfrm>
+          <a:prstGeom prst="rect">
+            <a:avLst/>
+          </a:prstGeom>
+        </p:spPr>
+      </p:pic>
+      <p:pic>
+        <p:nvPicPr>
+          <p:cNvPr id="32" name="Picture 31" descr="calibration_plot.png"/>
+          <p:cNvPicPr>
+            <a:picLocks noChangeAspect="1"/>
+          </p:cNvPicPr>
+          <p:nvPr/>
+        </p:nvPicPr>
+        <p:blipFill>
+          <a:blip r:embed="rId31"/>
+          <a:stretch>
+            <a:fillRect/>
+          </a:stretch>
+        </p:blipFill>
+        <p:spPr>
+          <a:xfrm>
+            <a:off x="6754126" y="5294376"/>
+            <a:ext cx="1122147" cy="1097280"/>
+          </a:xfrm>
+          <a:prstGeom prst="rect">
+            <a:avLst/>
+          </a:prstGeom>
+        </p:spPr>
+      </p:pic>
+      <p:pic>
+        <p:nvPicPr>
+          <p:cNvPr id="33" name="Picture 32" descr="dose_response_curve.png"/>
+          <p:cNvPicPr>
+            <a:picLocks noChangeAspect="1"/>
+          </p:cNvPicPr>
+          <p:nvPr/>
+        </p:nvPicPr>
+        <p:blipFill>
+          <a:blip r:embed="rId32"/>
+          <a:stretch>
+            <a:fillRect/>
+          </a:stretch>
+        </p:blipFill>
+        <p:spPr>
+          <a:xfrm>
+            <a:off x="7982712" y="5424521"/>
+            <a:ext cx="1188720" cy="836989"/>
+          </a:xfrm>
+          <a:prstGeom prst="rect">
+            <a:avLst/>
+          </a:prstGeom>
+        </p:spPr>
+      </p:pic>
+      <p:pic>
+        <p:nvPicPr>
+          <p:cNvPr id="34" name="Picture 33" descr="upset_plot.png"/>
+          <p:cNvPicPr>
+            <a:picLocks noChangeAspect="1"/>
+          </p:cNvPicPr>
+          <p:nvPr/>
+        </p:nvPicPr>
+        <p:blipFill>
+          <a:blip r:embed="rId33"/>
+          <a:stretch>
+            <a:fillRect/>
+          </a:stretch>
+        </p:blipFill>
+        <p:spPr>
+          <a:xfrm>
+            <a:off x="9244584" y="5332836"/>
+            <a:ext cx="1188720" cy="1020360"/>
+          </a:xfrm>
+          <a:prstGeom prst="rect">
+            <a:avLst/>
+          </a:prstGeom>
+        </p:spPr>
+      </p:pic>
+      <p:pic>
+        <p:nvPicPr>
+          <p:cNvPr id="35" name="Picture 34" descr="swimmer_plot.png"/>
+          <p:cNvPicPr>
+            <a:picLocks noChangeAspect="1"/>
+          </p:cNvPicPr>
+          <p:nvPr/>
+        </p:nvPicPr>
+        <p:blipFill>
+          <a:blip r:embed="rId34"/>
+          <a:stretch>
+            <a:fillRect/>
+          </a:stretch>
+        </p:blipFill>
+        <p:spPr>
+          <a:xfrm>
+            <a:off x="482917" y="6464808"/>
+            <a:ext cx="1045845" cy="1097280"/>
+          </a:xfrm>
+          <a:prstGeom prst="rect">
+            <a:avLst/>
+          </a:prstGeom>
+        </p:spPr>
+      </p:pic>
+      <p:pic>
+        <p:nvPicPr>
+          <p:cNvPr id="36" name="Picture 35" descr="spider_plot.png"/>
+          <p:cNvPicPr>
+            <a:picLocks noChangeAspect="1"/>
+          </p:cNvPicPr>
+          <p:nvPr/>
+        </p:nvPicPr>
+        <p:blipFill>
+          <a:blip r:embed="rId35"/>
+          <a:stretch>
+            <a:fillRect/>
+          </a:stretch>
+        </p:blipFill>
+        <p:spPr>
+          <a:xfrm>
+            <a:off x="1673352" y="6646684"/>
+            <a:ext cx="1188720" cy="733527"/>
+          </a:xfrm>
+          <a:prstGeom prst="rect">
+            <a:avLst/>
+          </a:prstGeom>
+        </p:spPr>
+      </p:pic>
+      <p:pic>
+        <p:nvPicPr>
+          <p:cNvPr id="37" name="Picture 36" descr="sankey_plot.png"/>
+          <p:cNvPicPr>
+            <a:picLocks noChangeAspect="1"/>
+          </p:cNvPicPr>
+          <p:nvPr/>
+        </p:nvPicPr>
+        <p:blipFill>
+          <a:blip r:embed="rId36"/>
+          <a:stretch>
+            <a:fillRect/>
+          </a:stretch>
+        </p:blipFill>
+        <p:spPr>
+          <a:xfrm>
+            <a:off x="2935224" y="6632555"/>
+            <a:ext cx="1188720" cy="761785"/>
+          </a:xfrm>
+          <a:prstGeom prst="rect">
+            <a:avLst/>
+          </a:prstGeom>
+        </p:spPr>
+      </p:pic>
+      <p:pic>
+        <p:nvPicPr>
+          <p:cNvPr id="38" name="Picture 37" descr="embedding_scatter.png"/>
+          <p:cNvPicPr>
+            <a:picLocks noChangeAspect="1"/>
+          </p:cNvPicPr>
+          <p:nvPr/>
+        </p:nvPicPr>
+        <p:blipFill>
+          <a:blip r:embed="rId37"/>
+          <a:stretch>
+            <a:fillRect/>
+          </a:stretch>
+        </p:blipFill>
+        <p:spPr>
+          <a:xfrm>
+            <a:off x="4197096" y="6680606"/>
+            <a:ext cx="1188720" cy="665683"/>
+          </a:xfrm>
+          <a:prstGeom prst="rect">
+            <a:avLst/>
+          </a:prstGeom>
+        </p:spPr>
+      </p:pic>
+      <p:pic>
+        <p:nvPicPr>
+          <p:cNvPr id="39" name="Picture 38" descr="hierarchical_clustering.png"/>
+          <p:cNvPicPr>
+            <a:picLocks noChangeAspect="1"/>
+          </p:cNvPicPr>
+          <p:nvPr/>
+        </p:nvPicPr>
+        <p:blipFill>
+          <a:blip r:embed="rId38"/>
+          <a:stretch>
+            <a:fillRect/>
+          </a:stretch>
+        </p:blipFill>
+        <p:spPr>
+          <a:xfrm>
+            <a:off x="5629486" y="6464808"/>
+            <a:ext cx="847684" cy="1097280"/>
+          </a:xfrm>
+          <a:prstGeom prst="rect">
+            <a:avLst/>
+          </a:prstGeom>
+        </p:spPr>
+      </p:pic>
+      <p:pic>
+        <p:nvPicPr>
+          <p:cNvPr id="40" name="Picture 39" descr="network_graph.png"/>
+          <p:cNvPicPr>
+            <a:picLocks noChangeAspect="1"/>
+          </p:cNvPicPr>
+          <p:nvPr/>
+        </p:nvPicPr>
+        <p:blipFill>
+          <a:blip r:embed="rId39"/>
+          <a:stretch>
+            <a:fillRect/>
+          </a:stretch>
+        </p:blipFill>
+        <p:spPr>
+          <a:xfrm>
+            <a:off x="6720840" y="6518148"/>
+            <a:ext cx="1188720" cy="990600"/>
+          </a:xfrm>
+          <a:prstGeom prst="rect">
+            <a:avLst/>
+          </a:prstGeom>
+        </p:spPr>
+      </p:pic>
+      <p:pic>
+        <p:nvPicPr>
+          <p:cNvPr id="41" name="Picture 40" descr="chord_diagram.png"/>
+          <p:cNvPicPr>
+            <a:picLocks noChangeAspect="1"/>
+          </p:cNvPicPr>
+          <p:nvPr/>
+        </p:nvPicPr>
+        <p:blipFill>
+          <a:blip r:embed="rId40"/>
+          <a:stretch>
+            <a:fillRect/>
+          </a:stretch>
+        </p:blipFill>
+        <p:spPr>
+          <a:xfrm>
+            <a:off x="8083430" y="6464808"/>
+            <a:ext cx="987283" cy="1097280"/>
+          </a:xfrm>
+          <a:prstGeom prst="rect">
+            <a:avLst/>
+          </a:prstGeom>
+        </p:spPr>
+      </p:pic>
+      <p:sp>
+        <p:nvSpPr>
+          <p:cNvPr id="42" name="TextBox 41"/>
+          <p:cNvSpPr txBox="1"/>
+          <p:nvPr/>
+        </p:nvSpPr>
+        <p:spPr>
+          <a:xfrm>
+            <a:off x="457200" y="7680960"/>
+            <a:ext cx="10058400" cy="457200"/>
+          </a:xfrm>
+          <a:prstGeom prst="rect">
+            <a:avLst/>
+          </a:prstGeom>
+          <a:noFill/>
+        </p:spPr>
+        <p:txBody>
+          <a:bodyPr wrap="square" anchor="t" lIns="45720" rIns="45720">
+            <a:spAutoFit/>
+          </a:bodyPr>
+          <a:lstStyle/>
+          <a:p>
+            <a:pPr algn="l">
+              <a:lnSpc>
+                <a:spcPct val="110000"/>
+              </a:lnSpc>
+            </a:pPr>
+            <a:r>
+              <a:rPr sz="1300" b="0">
+                <a:solidFill>
+                  <a:srgbClr val="666666"/>
+                </a:solidFill>
+                <a:latin typeface="Arial"/>
+              </a:rPr>
+              <a:t>Thumbnails for breadth only - each is a real render of the bundled synthetic example (tutorial/PLOT_GALLERY.md)</a:t>
+            </a:r>
+          </a:p>
+        </p:txBody>
+      </p:sp>
+      <p:sp>
+        <p:nvSpPr>
+          <p:cNvPr id="43" name="TextBox 42"/>
+          <p:cNvSpPr txBox="1"/>
+          <p:nvPr/>
+        </p:nvSpPr>
+        <p:spPr>
+          <a:xfrm>
+            <a:off x="457200" y="7818120"/>
+            <a:ext cx="7315200" cy="274320"/>
+          </a:xfrm>
+          <a:prstGeom prst="rect">
+            <a:avLst/>
+          </a:prstGeom>
+          <a:noFill/>
+        </p:spPr>
+        <p:txBody>
+          <a:bodyPr wrap="square" anchor="t" lIns="45720" rIns="45720">
+            <a:spAutoFit/>
+          </a:bodyPr>
+          <a:lstStyle/>
+          <a:p>
+            <a:pPr algn="l">
+              <a:lnSpc>
+                <a:spcPct val="110000"/>
+              </a:lnSpc>
+            </a:pPr>
+            <a:r>
+              <a:rPr sz="1000" b="0">
+                <a:solidFill>
+                  <a:srgbClr val="666666"/>
+                </a:solidFill>
+                <a:latin typeface="Arial"/>
+              </a:rPr>
+              <a:t>Make My Figure - desktop tutorial   |   20</a:t>
+            </a:r>
+          </a:p>
+        </p:txBody>
+      </p:sp>
+    </p:spTree>
+  </p:cSld>
+  <p:clrMapOvr>
+    <a:masterClrMapping/>
+  </p:clrMapOvr>
+</p:sld>
+</file>
+
+<file path=ppt/slides/slide21.xml><?xml version="1.0" encoding="utf-8"?>
+<p:sld xmlns:a="http://schemas.openxmlformats.org/drawingml/2006/main" xmlns:p="http://schemas.openxmlformats.org/presentationml/2006/main" xmlns:r="http://schemas.openxmlformats.org/officeDocument/2006/relationships">
+  <p:cSld>
+    <p:spTree>
+      <p:nvGrpSpPr>
+        <p:cNvPr id="1" name=""/>
+        <p:cNvGrpSpPr/>
+        <p:nvPr/>
+      </p:nvGrpSpPr>
+      <p:grpSpPr/>
+      <p:sp>
+        <p:nvSpPr>
+          <p:cNvPr id="2" name="TextBox 1"/>
+          <p:cNvSpPr txBox="1"/>
+          <p:nvPr/>
+        </p:nvSpPr>
+        <p:spPr>
+          <a:xfrm>
+            <a:off x="1691640" y="384048"/>
+            <a:ext cx="8869680" cy="1005840"/>
+          </a:xfrm>
+          <a:prstGeom prst="rect">
+            <a:avLst/>
+          </a:prstGeom>
+          <a:noFill/>
+        </p:spPr>
+        <p:txBody>
+          <a:bodyPr wrap="square" anchor="ctr" lIns="45720" rIns="45720">
+            <a:spAutoFit/>
+          </a:bodyPr>
+          <a:lstStyle/>
+          <a:p>
+            <a:pPr algn="l">
+              <a:lnSpc>
+                <a:spcPct val="110000"/>
+              </a:lnSpc>
+            </a:pPr>
+            <a:r>
+              <a:rPr sz="2800" b="1">
+                <a:solidFill>
+                  <a:srgbClr val="1F2937"/>
+                </a:solidFill>
+                <a:latin typeface="Arial"/>
+              </a:rPr>
+              <a:t>Where this goes next</a:t>
+            </a:r>
+          </a:p>
+        </p:txBody>
+      </p:sp>
+      <p:sp>
+        <p:nvSpPr>
+          <p:cNvPr id="3" name="TextBox 2"/>
+          <p:cNvSpPr txBox="1"/>
+          <p:nvPr/>
+        </p:nvSpPr>
+        <p:spPr>
+          <a:xfrm>
+            <a:off x="640080" y="1874520"/>
+            <a:ext cx="9692640" cy="5486400"/>
+          </a:xfrm>
+          <a:prstGeom prst="rect">
+            <a:avLst/>
+          </a:prstGeom>
+          <a:noFill/>
+        </p:spPr>
+        <p:txBody>
+          <a:bodyPr wrap="square" lIns="45720" rIns="45720">
+            <a:spAutoFit/>
+          </a:bodyPr>
+          <a:lstStyle/>
+          <a:p>
+            <a:pPr>
+              <a:lnSpc>
+                <a:spcPct val="108000"/>
+              </a:lnSpc>
+              <a:spcAft>
+                <a:spcPts val="900"/>
+              </a:spcAft>
+            </a:pPr>
+            <a:r>
+              <a:rPr sz="1900" b="1">
+                <a:solidFill>
+                  <a:srgbClr val="111111"/>
+                </a:solidFill>
+                <a:latin typeface="Arial"/>
+              </a:rPr>
+              <a:t>• Reviewed and rebuilt</a:t>
+            </a:r>
+          </a:p>
+          <a:p>
+            <a:pPr lvl="1">
+              <a:lnSpc>
+                <a:spcPct val="108000"/>
+              </a:lnSpc>
+              <a:spcAft>
+                <a:spcPts val="900"/>
+              </a:spcAft>
+            </a:pPr>
+            <a:r>
+              <a:rPr sz="1700" b="0">
+                <a:solidFill>
+                  <a:srgbClr val="1F2937"/>
+                </a:solidFill>
+                <a:latin typeface="Arial"/>
+              </a:rPr>
+              <a:t>– tutorial and slides re-evaluated as visual demonstrations; observations, jitter and publication presets shown at readable size</a:t>
+            </a:r>
+          </a:p>
+          <a:p>
+            <a:pPr>
+              <a:lnSpc>
+                <a:spcPct val="108000"/>
+              </a:lnSpc>
+              <a:spcAft>
+                <a:spcPts val="900"/>
+              </a:spcAft>
+            </a:pPr>
+            <a:r>
+              <a:rPr sz="1900" b="1">
+                <a:solidFill>
+                  <a:srgbClr val="111111"/>
+                </a:solidFill>
+                <a:latin typeface="Arial"/>
+              </a:rPr>
+              <a:t>• After author review</a:t>
+            </a:r>
+          </a:p>
+          <a:p>
+            <a:pPr lvl="1">
+              <a:lnSpc>
+                <a:spcPct val="108000"/>
+              </a:lnSpc>
+              <a:spcAft>
+                <a:spcPts val="900"/>
+              </a:spcAft>
+            </a:pPr>
+            <a:r>
+              <a:rPr sz="1700" b="0">
+                <a:solidFill>
+                  <a:srgbClr val="1F2937"/>
+                </a:solidFill>
+                <a:latin typeface="Arial"/>
+              </a:rPr>
+              <a:t>– remaining plot tutorials with the same template; matrix workflow tutorial and video; master and plot videos recorded live</a:t>
+            </a:r>
+          </a:p>
+          <a:p>
+            <a:pPr lvl="1">
+              <a:lnSpc>
+                <a:spcPct val="108000"/>
+              </a:lnSpc>
+              <a:spcAft>
+                <a:spcPts val="900"/>
+              </a:spcAft>
+            </a:pPr>
+            <a:r>
+              <a:rPr sz="1700" b="0">
+                <a:solidFill>
+                  <a:srgbClr val="1F2937"/>
+                </a:solidFill>
+                <a:latin typeface="Arial"/>
+              </a:rPr>
+              <a:t>– decision whether the presets branch (observation controls, experimental presets) is merged - without it these chapters cannot ship</a:t>
+            </a:r>
+          </a:p>
+          <a:p>
+            <a:pPr>
+              <a:lnSpc>
+                <a:spcPct val="108000"/>
+              </a:lnSpc>
+              <a:spcAft>
+                <a:spcPts val="900"/>
+              </a:spcAft>
+            </a:pPr>
+            <a:r>
+              <a:rPr sz="1900" b="1">
+                <a:solidFill>
+                  <a:srgbClr val="111111"/>
+                </a:solidFill>
+                <a:latin typeface="Arial"/>
+              </a:rPr>
+              <a:t>• Not merged, tagged, released, published or pushed</a:t>
+            </a:r>
+          </a:p>
+        </p:txBody>
+      </p:sp>
+      <p:sp>
+        <p:nvSpPr>
+          <p:cNvPr id="4" name="TextBox 3"/>
+          <p:cNvSpPr txBox="1"/>
+          <p:nvPr/>
+        </p:nvSpPr>
+        <p:spPr>
+          <a:xfrm>
+            <a:off x="457200" y="7818120"/>
+            <a:ext cx="7315200" cy="274320"/>
+          </a:xfrm>
+          <a:prstGeom prst="rect">
+            <a:avLst/>
+          </a:prstGeom>
+          <a:noFill/>
+        </p:spPr>
+        <p:txBody>
+          <a:bodyPr wrap="square" anchor="t" lIns="45720" rIns="45720">
+            <a:spAutoFit/>
+          </a:bodyPr>
+          <a:lstStyle/>
+          <a:p>
+            <a:pPr algn="l">
+              <a:lnSpc>
+                <a:spcPct val="110000"/>
+              </a:lnSpc>
+            </a:pPr>
+            <a:r>
+              <a:rPr sz="1000" b="0">
+                <a:solidFill>
+                  <a:srgbClr val="666666"/>
+                </a:solidFill>
+                <a:latin typeface="Arial"/>
+              </a:rPr>
+              <a:t>Make My Figure - desktop tutorial   |   21</a:t>
+            </a:r>
+          </a:p>
+        </p:txBody>
+      </p:sp>
+    </p:spTree>
+  </p:cSld>
+  <p:clrMapOvr>
+    <a:masterClrMapping/>
+  </p:clrMapOvr>
+</p:sld>
+</file>
+
+<file path=ppt/slides/slide22.xml><?xml version="1.0" encoding="utf-8"?>
+<p:sld xmlns:a="http://schemas.openxmlformats.org/drawingml/2006/main" xmlns:p="http://schemas.openxmlformats.org/presentationml/2006/main" xmlns:r="http://schemas.openxmlformats.org/officeDocument/2006/relationships">
+  <p:cSld>
+    <p:spTree>
+      <p:nvGrpSpPr>
+        <p:cNvPr id="1" name=""/>
+        <p:cNvGrpSpPr/>
+        <p:nvPr/>
+      </p:nvGrpSpPr>
+      <p:grpSpPr/>
+      <p:sp>
+        <p:nvSpPr>
+          <p:cNvPr id="2" name="TextBox 1"/>
+          <p:cNvSpPr txBox="1"/>
+          <p:nvPr/>
+        </p:nvSpPr>
+        <p:spPr>
+          <a:xfrm>
+            <a:off x="1691640" y="384048"/>
+            <a:ext cx="8869680" cy="1005840"/>
+          </a:xfrm>
+          <a:prstGeom prst="rect">
+            <a:avLst/>
+          </a:prstGeom>
+          <a:noFill/>
+        </p:spPr>
+        <p:txBody>
+          <a:bodyPr wrap="square" anchor="ctr" lIns="45720" rIns="45720">
+            <a:spAutoFit/>
+          </a:bodyPr>
+          <a:lstStyle/>
+          <a:p>
+            <a:pPr algn="l">
+              <a:lnSpc>
+                <a:spcPct val="110000"/>
+              </a:lnSpc>
+            </a:pPr>
+            <a:r>
+              <a:rPr sz="2800" b="1">
+                <a:solidFill>
+                  <a:srgbClr val="1F2937"/>
+                </a:solidFill>
+                <a:latin typeface="Arial"/>
+              </a:rPr>
+              <a:t>Summary</a:t>
+            </a:r>
+          </a:p>
+        </p:txBody>
+      </p:sp>
+      <p:sp>
+        <p:nvSpPr>
+          <p:cNvPr id="3" name="TextBox 2"/>
+          <p:cNvSpPr txBox="1"/>
+          <p:nvPr/>
+        </p:nvSpPr>
+        <p:spPr>
+          <a:xfrm>
+            <a:off x="640080" y="1874520"/>
+            <a:ext cx="9692640" cy="4754880"/>
+          </a:xfrm>
+          <a:prstGeom prst="rect">
+            <a:avLst/>
+          </a:prstGeom>
+          <a:noFill/>
+        </p:spPr>
+        <p:txBody>
+          <a:bodyPr wrap="square" lIns="45720" rIns="45720">
+            <a:spAutoFit/>
+          </a:bodyPr>
+          <a:lstStyle/>
+          <a:p>
+            <a:pPr>
+              <a:lnSpc>
+                <a:spcPct val="108000"/>
+              </a:lnSpc>
+              <a:spcAft>
+                <a:spcPts val="900"/>
+              </a:spcAft>
+            </a:pPr>
+            <a:r>
+              <a:rPr sz="1900" b="0">
+                <a:solidFill>
+                  <a:srgbClr val="111111"/>
+                </a:solidFill>
+                <a:latin typeface="Arial"/>
+              </a:rPr>
+              <a:t>• Open any table; the application detects, recommends and proposes - and you assign every role yourself</a:t>
+            </a:r>
+          </a:p>
+          <a:p>
+            <a:pPr>
+              <a:lnSpc>
+                <a:spcPct val="108000"/>
+              </a:lnSpc>
+              <a:spcAft>
+                <a:spcPts val="900"/>
+              </a:spcAft>
+            </a:pPr>
+            <a:r>
+              <a:rPr sz="1900" b="0">
+                <a:solidFill>
+                  <a:srgbClr val="111111"/>
+                </a:solidFill>
+                <a:latin typeface="Arial"/>
+              </a:rPr>
+              <a:t>• One dataset, many controlled representations: summary plus every observation, with the test on the figure</a:t>
+            </a:r>
+          </a:p>
+          <a:p>
+            <a:pPr>
+              <a:lnSpc>
+                <a:spcPct val="108000"/>
+              </a:lnSpc>
+              <a:spcAft>
+                <a:spcPts val="900"/>
+              </a:spcAft>
+            </a:pPr>
+            <a:r>
+              <a:rPr sz="1900" b="0">
+                <a:solidFill>
+                  <a:srgbClr val="111111"/>
+                </a:solidFill>
+                <a:latin typeface="Arial"/>
+              </a:rPr>
+              <a:t>• Publication presets are previewed on your data and remain a starting point</a:t>
+            </a:r>
+          </a:p>
+          <a:p>
+            <a:pPr>
+              <a:lnSpc>
+                <a:spcPct val="108000"/>
+              </a:lnSpc>
+              <a:spcAft>
+                <a:spcPts val="900"/>
+              </a:spcAft>
+            </a:pPr>
+            <a:r>
+              <a:rPr sz="1900" b="0">
+                <a:solidFill>
+                  <a:srgbClr val="111111"/>
+                </a:solidFill>
+                <a:latin typeface="Arial"/>
+              </a:rPr>
+              <a:t>• PlotSpec carries the recipe; a Figure Package carries recipe and ingredients, verified</a:t>
+            </a:r>
+          </a:p>
+          <a:p>
+            <a:pPr>
+              <a:lnSpc>
+                <a:spcPct val="108000"/>
+              </a:lnSpc>
+              <a:spcAft>
+                <a:spcPts val="900"/>
+              </a:spcAft>
+            </a:pPr>
+            <a:r>
+              <a:rPr sz="1900" b="0">
+                <a:solidFill>
+                  <a:srgbClr val="111111"/>
+                </a:solidFill>
+                <a:latin typeface="Arial"/>
+              </a:rPr>
+              <a:t>• The tutorial is generated from the real application and validated by running it</a:t>
+            </a:r>
+          </a:p>
+        </p:txBody>
+      </p:sp>
+      <p:sp>
+        <p:nvSpPr>
+          <p:cNvPr id="4" name="TextBox 3"/>
+          <p:cNvSpPr txBox="1"/>
+          <p:nvPr/>
+        </p:nvSpPr>
+        <p:spPr>
+          <a:xfrm>
+            <a:off x="640080" y="6583680"/>
+            <a:ext cx="9692640" cy="914400"/>
+          </a:xfrm>
+          <a:prstGeom prst="rect">
+            <a:avLst/>
+          </a:prstGeom>
+          <a:noFill/>
+        </p:spPr>
+        <p:txBody>
+          <a:bodyPr wrap="square" anchor="t" lIns="45720" rIns="45720">
+            <a:spAutoFit/>
+          </a:bodyPr>
+          <a:lstStyle/>
+          <a:p>
+            <a:pPr algn="l">
+              <a:lnSpc>
+                <a:spcPct val="110000"/>
+              </a:lnSpc>
+            </a:pPr>
+            <a:r>
+              <a:rPr sz="1500" b="0">
+                <a:solidFill>
+                  <a:srgbClr val="666666"/>
+                </a:solidFill>
+                <a:latin typeface="Arial"/>
+              </a:rPr>
+              <a:t>github.com/surPoudel/make-my-figure  -  tutorial/ on the pilot branch (not yet published)</a:t>
+            </a:r>
+          </a:p>
+        </p:txBody>
+      </p:sp>
+      <p:sp>
+        <p:nvSpPr>
+          <p:cNvPr id="5" name="TextBox 4"/>
+          <p:cNvSpPr txBox="1"/>
+          <p:nvPr/>
+        </p:nvSpPr>
+        <p:spPr>
+          <a:xfrm>
+            <a:off x="457200" y="7818120"/>
+            <a:ext cx="7315200" cy="274320"/>
+          </a:xfrm>
+          <a:prstGeom prst="rect">
+            <a:avLst/>
+          </a:prstGeom>
+          <a:noFill/>
+        </p:spPr>
+        <p:txBody>
+          <a:bodyPr wrap="square" anchor="t" lIns="45720" rIns="45720">
+            <a:spAutoFit/>
+          </a:bodyPr>
+          <a:lstStyle/>
+          <a:p>
+            <a:pPr algn="l">
+              <a:lnSpc>
+                <a:spcPct val="110000"/>
+              </a:lnSpc>
+            </a:pPr>
+            <a:r>
+              <a:rPr sz="1000" b="0">
+                <a:solidFill>
+                  <a:srgbClr val="666666"/>
+                </a:solidFill>
+                <a:latin typeface="Arial"/>
+              </a:rPr>
+              <a:t>Make My Figure - desktop tutorial   |   22</a:t>
             </a:r>
           </a:p>
         </p:txBody>
@@ -6337,8 +7953,8 @@
         </p:nvSpPr>
         <p:spPr>
           <a:xfrm>
-            <a:off x="548640" y="1828800"/>
-            <a:ext cx="5120640" cy="5852160"/>
+            <a:off x="640080" y="1874520"/>
+            <a:ext cx="9692640" cy="5486400"/>
           </a:xfrm>
           <a:prstGeom prst="rect">
             <a:avLst/>
@@ -6356,11 +7972,11 @@
                 <a:spcPct val="108000"/>
               </a:lnSpc>
               <a:spcAft>
-                <a:spcPts val="600"/>
+                <a:spcPts val="900"/>
               </a:spcAft>
             </a:pPr>
             <a:r>
-              <a:rPr sz="1800" b="0">
+              <a:rPr sz="1900" b="0">
                 <a:solidFill>
                   <a:srgbClr val="111111"/>
                 </a:solidFill>
@@ -6375,17 +7991,17 @@
                 <a:spcPct val="108000"/>
               </a:lnSpc>
               <a:spcAft>
-                <a:spcPts val="600"/>
+                <a:spcPts val="900"/>
               </a:spcAft>
             </a:pPr>
             <a:r>
-              <a:rPr sz="1800" b="0">
+              <a:rPr sz="1900" b="0">
                 <a:solidFill>
                   <a:srgbClr val="111111"/>
                 </a:solidFill>
                 <a:latin typeface="Arial"/>
               </a:rPr>
-              <a:t>• Runs entirely on your computer: no upload, no account</a:t>
+              <a:t>• Runs entirely on your computer - no upload, no account</a:t>
             </a:r>
           </a:p>
           <a:p>
@@ -6394,17 +8010,17 @@
                 <a:spcPct val="108000"/>
               </a:lnSpc>
               <a:spcAft>
-                <a:spcPts val="600"/>
+                <a:spcPts val="900"/>
               </a:spcAft>
             </a:pPr>
             <a:r>
-              <a:rPr sz="1800" b="0">
+              <a:rPr sz="1900" b="0">
                 <a:solidFill>
                   <a:srgbClr val="111111"/>
                 </a:solidFill>
                 <a:latin typeface="Arial"/>
               </a:rPr>
-              <a:t>• One Publication style; fonts, colours, layout, legend under your control</a:t>
+              <a:t>• Proposes column roles, figures and tests; every proposal can be changed</a:t>
             </a:r>
           </a:p>
           <a:p>
@@ -6413,11 +8029,11 @@
                 <a:spcPct val="108000"/>
               </a:lnSpc>
               <a:spcAft>
-                <a:spcPts val="600"/>
+                <a:spcPts val="900"/>
               </a:spcAft>
             </a:pPr>
             <a:r>
-              <a:rPr sz="1800" b="0">
+              <a:rPr sz="1900" b="0">
                 <a:solidFill>
                   <a:srgbClr val="111111"/>
                 </a:solidFill>
@@ -6432,17 +8048,17 @@
                 <a:spcPct val="108000"/>
               </a:lnSpc>
               <a:spcAft>
-                <a:spcPts val="600"/>
+                <a:spcPts val="900"/>
               </a:spcAft>
             </a:pPr>
             <a:r>
-              <a:rPr sz="1800" b="0">
+              <a:rPr sz="1900" b="0">
                 <a:solidFill>
                   <a:srgbClr val="111111"/>
                 </a:solidFill>
                 <a:latin typeface="Arial"/>
               </a:rPr>
-              <a:t>• Reproducibility built in: PlotSpec, StatsSpec, Figure Package (.mmfpackage) with frozen data and checksums</a:t>
+              <a:t>• Individual observations with controllable size, jitter, fill, edge and arrangement</a:t>
             </a:r>
           </a:p>
           <a:p>
@@ -6451,17 +8067,17 @@
                 <a:spcPct val="108000"/>
               </a:lnSpc>
               <a:spcAft>
-                <a:spcPts val="600"/>
+                <a:spcPts val="900"/>
               </a:spcAft>
             </a:pPr>
             <a:r>
-              <a:rPr sz="1800" b="0">
+              <a:rPr sz="1900" b="0">
                 <a:solidFill>
                   <a:srgbClr val="111111"/>
                 </a:solidFill>
                 <a:latin typeface="Arial"/>
               </a:rPr>
-              <a:t>• Multi-panel Figure Builder with panel letters and common fonts</a:t>
+              <a:t>• Publication presets previewed on your own data before they are applied (experimental library)</a:t>
             </a:r>
           </a:p>
           <a:p>
@@ -6470,160 +8086,43 @@
                 <a:spcPct val="108000"/>
               </a:lnSpc>
               <a:spcAft>
-                <a:spcPts val="600"/>
+                <a:spcPts val="900"/>
               </a:spcAft>
             </a:pPr>
             <a:r>
-              <a:rPr sz="1800" b="0">
+              <a:rPr sz="1900" b="0">
                 <a:solidFill>
                   <a:srgbClr val="111111"/>
                 </a:solidFill>
                 <a:latin typeface="Arial"/>
               </a:rPr>
-              <a:t>• Open source, Python, Matplotlib and Qt; desktop installers for Windows, macOS and Linux</a:t>
-            </a:r>
-          </a:p>
-        </p:txBody>
-      </p:sp>
-      <p:pic>
-        <p:nvPicPr>
-          <p:cNvPr id="4" name="Picture 3" descr="04_workspace.png"/>
-          <p:cNvPicPr>
-            <a:picLocks noChangeAspect="1"/>
-          </p:cNvPicPr>
-          <p:nvPr/>
-        </p:nvPicPr>
-        <p:blipFill>
-          <a:blip r:embed="rId2"/>
-          <a:stretch>
-            <a:fillRect/>
-          </a:stretch>
-        </p:blipFill>
-        <p:spPr>
-          <a:xfrm>
-            <a:off x="5852160" y="1940923"/>
-            <a:ext cx="4846320" cy="2884714"/>
-          </a:xfrm>
-          <a:prstGeom prst="rect">
-            <a:avLst/>
-          </a:prstGeom>
-          <a:ln w="9525">
-            <a:solidFill>
-              <a:srgbClr val="C8C8C8"/>
-            </a:solidFill>
-          </a:ln>
-        </p:spPr>
-      </p:pic>
-      <p:sp>
-        <p:nvSpPr>
-          <p:cNvPr id="5" name="TextBox 4"/>
-          <p:cNvSpPr txBox="1"/>
-          <p:nvPr/>
-        </p:nvSpPr>
-        <p:spPr>
-          <a:xfrm>
-            <a:off x="5852160" y="4892040"/>
-            <a:ext cx="4846320" cy="457200"/>
-          </a:xfrm>
-          <a:prstGeom prst="rect">
-            <a:avLst/>
-          </a:prstGeom>
-          <a:noFill/>
-        </p:spPr>
-        <p:txBody>
-          <a:bodyPr wrap="square" anchor="t" lIns="45720" rIns="45720">
-            <a:spAutoFit/>
-          </a:bodyPr>
-          <a:lstStyle/>
-          <a:p>
-            <a:pPr algn="l">
-              <a:lnSpc>
-                <a:spcPct val="110000"/>
-              </a:lnSpc>
-            </a:pPr>
-            <a:r>
-              <a:rPr sz="1300" b="0">
-                <a:solidFill>
-                  <a:srgbClr val="666666"/>
-                </a:solidFill>
-                <a:latin typeface="Arial"/>
-              </a:rPr>
-              <a:t>The workspace: controls left, data and live figure right</a:t>
-            </a:r>
-          </a:p>
-        </p:txBody>
-      </p:sp>
-      <p:pic>
-        <p:nvPicPr>
-          <p:cNvPr id="6" name="Picture 5" descr="getting_started_01_start_screen_300_250.png"/>
-          <p:cNvPicPr>
-            <a:picLocks noChangeAspect="1"/>
-          </p:cNvPicPr>
-          <p:nvPr/>
-        </p:nvPicPr>
-        <p:blipFill>
-          <a:blip r:embed="rId3"/>
-          <a:stretch>
-            <a:fillRect/>
-          </a:stretch>
-        </p:blipFill>
-        <p:spPr>
-          <a:xfrm>
-            <a:off x="5852160" y="5503333"/>
-            <a:ext cx="4846320" cy="1794933"/>
-          </a:xfrm>
-          <a:prstGeom prst="rect">
-            <a:avLst/>
-          </a:prstGeom>
-          <a:ln w="9525">
-            <a:solidFill>
-              <a:srgbClr val="C8C8C8"/>
-            </a:solidFill>
-          </a:ln>
-        </p:spPr>
-      </p:pic>
-      <p:sp>
-        <p:nvSpPr>
-          <p:cNvPr id="7" name="TextBox 6"/>
-          <p:cNvSpPr txBox="1"/>
-          <p:nvPr/>
-        </p:nvSpPr>
-        <p:spPr>
-          <a:xfrm>
-            <a:off x="5852160" y="7498080"/>
-            <a:ext cx="4846320" cy="457200"/>
-          </a:xfrm>
-          <a:prstGeom prst="rect">
-            <a:avLst/>
-          </a:prstGeom>
-          <a:noFill/>
-        </p:spPr>
-        <p:txBody>
-          <a:bodyPr wrap="square" anchor="t" lIns="45720" rIns="45720">
-            <a:spAutoFit/>
-          </a:bodyPr>
-          <a:lstStyle/>
-          <a:p>
-            <a:pPr algn="l">
-              <a:lnSpc>
-                <a:spcPct val="110000"/>
-              </a:lnSpc>
-            </a:pPr>
-            <a:r>
-              <a:rPr sz="1300" b="0">
-                <a:solidFill>
-                  <a:srgbClr val="666666"/>
-                </a:solidFill>
-                <a:latin typeface="Arial"/>
-              </a:rPr>
-              <a:t>Start screen: open a file, a package, an example</a:t>
-            </a:r>
-          </a:p>
-        </p:txBody>
-      </p:sp>
-      <p:sp>
-        <p:nvSpPr>
-          <p:cNvPr id="8" name="TextBox 7"/>
+              <a:t>• Reproducibility: PlotSpec, StatsSpec, Figure Package (.mmfpackage) with frozen data and checksums</a:t>
+            </a:r>
+          </a:p>
+          <a:p>
+            <a:pPr>
+              <a:lnSpc>
+                <a:spcPct val="108000"/>
+              </a:lnSpc>
+              <a:spcAft>
+                <a:spcPts val="900"/>
+              </a:spcAft>
+            </a:pPr>
+            <a:r>
+              <a:rPr sz="1900" b="0">
+                <a:solidFill>
+                  <a:srgbClr val="111111"/>
+                </a:solidFill>
+                <a:latin typeface="Arial"/>
+              </a:rPr>
+              <a:t>• Multi-panel Figure Builder; open source, Python, Matplotlib and Qt</a:t>
+            </a:r>
+          </a:p>
+        </p:txBody>
+      </p:sp>
+      <p:sp>
+        <p:nvSpPr>
+          <p:cNvPr id="4" name="TextBox 3"/>
           <p:cNvSpPr txBox="1"/>
           <p:nvPr/>
         </p:nvSpPr>
@@ -6712,7 +8211,7 @@
                 </a:solidFill>
                 <a:latin typeface="Arial"/>
               </a:rPr>
-              <a:t>Design principle: the application suggests, the researcher decides</a:t>
+              <a:t>The application suggests. The researcher decides.</a:t>
             </a:r>
           </a:p>
         </p:txBody>
@@ -6726,7 +8225,7 @@
         <p:spPr>
           <a:xfrm>
             <a:off x="548640" y="2011680"/>
-            <a:ext cx="3200400" cy="4023360"/>
+            <a:ext cx="3200400" cy="3840480"/>
           </a:xfrm>
           <a:prstGeom prst="roundRect">
             <a:avLst>
@@ -6812,7 +8311,7 @@
         <p:spPr>
           <a:xfrm>
             <a:off x="731520" y="2834640"/>
-            <a:ext cx="2834640" cy="3017520"/>
+            <a:ext cx="2834640" cy="2926080"/>
           </a:xfrm>
           <a:prstGeom prst="rect">
             <a:avLst/>
@@ -6851,7 +8350,7 @@
         <p:spPr>
           <a:xfrm>
             <a:off x="3977640" y="2011680"/>
-            <a:ext cx="3200400" cy="4023360"/>
+            <a:ext cx="3200400" cy="3840480"/>
           </a:xfrm>
           <a:prstGeom prst="roundRect">
             <a:avLst>
@@ -6937,7 +8436,7 @@
         <p:spPr>
           <a:xfrm>
             <a:off x="4160520" y="2834640"/>
-            <a:ext cx="2834640" cy="3017520"/>
+            <a:ext cx="2834640" cy="2926080"/>
           </a:xfrm>
           <a:prstGeom prst="rect">
             <a:avLst/>
@@ -6976,7 +8475,7 @@
         <p:spPr>
           <a:xfrm>
             <a:off x="7406640" y="2011680"/>
-            <a:ext cx="3200400" cy="4023360"/>
+            <a:ext cx="3200400" cy="3840480"/>
           </a:xfrm>
           <a:prstGeom prst="roundRect">
             <a:avLst>
@@ -7062,7 +8561,7 @@
         <p:spPr>
           <a:xfrm>
             <a:off x="7589520" y="2834640"/>
-            <a:ext cx="2834640" cy="3017520"/>
+            <a:ext cx="2834640" cy="2926080"/>
           </a:xfrm>
           <a:prstGeom prst="rect">
             <a:avLst/>
@@ -7087,7 +8586,7 @@
                 </a:solidFill>
                 <a:latin typeface="Arial"/>
               </a:rPr>
-              <a:t>PlotSpec for the specification, StatsSpec for the test, Figure Package for specification plus frozen data. Nothing hidden, nothing recomputed behind your back.</a:t>
+              <a:t>PlotSpec for the specification, StatsSpec for the test, Figure Package for specification plus frozen data. Nothing recomputed behind your back.</a:t>
             </a:r>
           </a:p>
         </p:txBody>
@@ -7100,8 +8599,8 @@
         </p:nvSpPr>
         <p:spPr>
           <a:xfrm>
-            <a:off x="548640" y="6400800"/>
-            <a:ext cx="10058400" cy="914400"/>
+            <a:off x="548640" y="6309360"/>
+            <a:ext cx="9875520" cy="731520"/>
           </a:xfrm>
           <a:prstGeom prst="rect">
             <a:avLst/>
@@ -7120,13 +8619,13 @@
               </a:lnSpc>
             </a:pPr>
             <a:r>
-              <a:rPr sz="1800" b="0">
+              <a:rPr sz="2200" b="1">
                 <a:solidFill>
                   <a:srgbClr val="1F2937"/>
                 </a:solidFill>
                 <a:latin typeface="Arial"/>
               </a:rPr>
-              <a:t>“The data do not belong to one plot.”  The same table can become a box plot, a scatter with regression and a bar plot in a minute - the user decides which question to visualise.</a:t>
+              <a:t>“The data do not belong to one plot.”</a:t>
             </a:r>
           </a:p>
         </p:txBody>
@@ -7222,14 +8721,14 @@
                 </a:solidFill>
                 <a:latin typeface="Arial"/>
               </a:rPr>
-              <a:t>Demo 1 - a table with unhelpful column names</a:t>
+              <a:t>One dataset, multiple publication-ready views</a:t>
             </a:r>
           </a:p>
         </p:txBody>
       </p:sp>
       <p:pic>
         <p:nvPicPr>
-          <p:cNvPr id="3" name="Picture 2" descr="01_open_data.png"/>
+          <p:cNvPr id="3" name="Picture 2" descr="B_box_points_outline_preset_pres.png"/>
           <p:cNvPicPr>
             <a:picLocks noChangeAspect="1"/>
           </p:cNvPicPr>
@@ -7243,17 +8742,12 @@
         </p:blipFill>
         <p:spPr>
           <a:xfrm>
-            <a:off x="457200" y="1835331"/>
-            <a:ext cx="6583680" cy="3918857"/>
-          </a:xfrm>
-          <a:prstGeom prst="rect">
-            <a:avLst/>
-          </a:prstGeom>
-          <a:ln w="9525">
-            <a:solidFill>
-              <a:srgbClr val="C8C8C8"/>
-            </a:solidFill>
-          </a:ln>
+            <a:off x="457200" y="2812687"/>
+            <a:ext cx="3291840" cy="2604225"/>
+          </a:xfrm>
+          <a:prstGeom prst="rect">
+            <a:avLst/>
+          </a:prstGeom>
         </p:spPr>
       </p:pic>
       <p:sp>
@@ -7264,8 +8758,8 @@
         </p:nvSpPr>
         <p:spPr>
           <a:xfrm>
-            <a:off x="7223760" y="1920240"/>
-            <a:ext cx="3474720" cy="5486400"/>
+            <a:off x="457200" y="6446520"/>
+            <a:ext cx="3291840" cy="457200"/>
           </a:xfrm>
           <a:prstGeom prst="rect">
             <a:avLst/>
@@ -7273,91 +8767,31 @@
           <a:noFill/>
         </p:spPr>
         <p:txBody>
-          <a:bodyPr wrap="square" lIns="45720" rIns="45720">
+          <a:bodyPr wrap="square" anchor="t" lIns="45720" rIns="45720">
             <a:spAutoFit/>
           </a:bodyPr>
           <a:lstStyle/>
           <a:p>
-            <a:pPr>
-              <a:lnSpc>
-                <a:spcPct val="108000"/>
-              </a:lnSpc>
-              <a:spcAft>
-                <a:spcPts val="600"/>
-              </a:spcAft>
-            </a:pPr>
-            <a:r>
-              <a:rPr sz="1700" b="0">
-                <a:solidFill>
-                  <a:srgbClr val="111111"/>
-                </a:solidFill>
-                <a:latin typeface="Arial"/>
-              </a:rPr>
-              <a:t>• Open ambiguous_columns.csv (27 rows, 6 columns)</a:t>
-            </a:r>
-          </a:p>
-          <a:p>
-            <a:pPr>
-              <a:lnSpc>
-                <a:spcPct val="108000"/>
-              </a:lnSpc>
-              <a:spcAft>
-                <a:spcPts val="600"/>
-              </a:spcAft>
-            </a:pPr>
-            <a:r>
-              <a:rPr sz="1700" b="0">
-                <a:solidFill>
-                  <a:srgbClr val="111111"/>
-                </a:solidFill>
-                <a:latin typeface="Arial"/>
-              </a:rPr>
-              <a:t>• Detected types listed under the table; id_value is typed as text because it looks like an identifier</a:t>
-            </a:r>
-          </a:p>
-          <a:p>
-            <a:pPr>
-              <a:lnSpc>
-                <a:spcPct val="108000"/>
-              </a:lnSpc>
-              <a:spcAft>
-                <a:spcPts val="600"/>
-              </a:spcAft>
-            </a:pPr>
-            <a:r>
-              <a:rPr sz="1700" b="0">
-                <a:solidFill>
-                  <a:srgbClr val="111111"/>
-                </a:solidFill>
-                <a:latin typeface="Arial"/>
-              </a:rPr>
-              <a:t>• Recommended figures: box / violin (72 %), ridge (62 %), bar (60 %)</a:t>
-            </a:r>
-          </a:p>
-          <a:p>
-            <a:pPr>
-              <a:lnSpc>
-                <a:spcPct val="108000"/>
-              </a:lnSpc>
-              <a:spcAft>
-                <a:spcPts val="600"/>
-              </a:spcAft>
-            </a:pPr>
-            <a:r>
-              <a:rPr sz="1700" b="0">
-                <a:solidFill>
-                  <a:srgbClr val="111111"/>
-                </a:solidFill>
-                <a:latin typeface="Arial"/>
-              </a:rPr>
-              <a:t>• Nothing is drawn until a plot type is chosen</a:t>
+            <a:pPr algn="l">
+              <a:lnSpc>
+                <a:spcPct val="110000"/>
+              </a:lnSpc>
+            </a:pPr>
+            <a:r>
+              <a:rPr sz="1400" b="0">
+                <a:solidFill>
+                  <a:srgbClr val="666666"/>
+                </a:solidFill>
+                <a:latin typeface="Arial"/>
+              </a:rPr>
+              <a:t>Box + observations (outline)</a:t>
             </a:r>
           </a:p>
         </p:txBody>
       </p:sp>
       <p:pic>
         <p:nvPicPr>
-          <p:cNvPr id="5" name="Picture 4" descr="02_mapping_proposed.png"/>
+          <p:cNvPr id="5" name="Picture 4" descr="C_violin_points_preset_pres.png"/>
           <p:cNvPicPr>
             <a:picLocks noChangeAspect="1"/>
           </p:cNvPicPr>
@@ -7371,17 +8805,12 @@
         </p:blipFill>
         <p:spPr>
           <a:xfrm>
-            <a:off x="457200" y="6033263"/>
-            <a:ext cx="4572000" cy="735074"/>
-          </a:xfrm>
-          <a:prstGeom prst="rect">
-            <a:avLst/>
-          </a:prstGeom>
-          <a:ln w="9525">
-            <a:solidFill>
-              <a:srgbClr val="C8C8C8"/>
-            </a:solidFill>
-          </a:ln>
+            <a:off x="3840480" y="2812687"/>
+            <a:ext cx="3291840" cy="2604225"/>
+          </a:xfrm>
+          <a:prstGeom prst="rect">
+            <a:avLst/>
+          </a:prstGeom>
         </p:spPr>
       </p:pic>
       <p:sp>
@@ -7392,8 +8821,8 @@
         </p:nvSpPr>
         <p:spPr>
           <a:xfrm>
-            <a:off x="457200" y="6903720"/>
-            <a:ext cx="6400800" cy="457200"/>
+            <a:off x="3840480" y="6446520"/>
+            <a:ext cx="3291840" cy="457200"/>
           </a:xfrm>
           <a:prstGeom prst="rect">
             <a:avLst/>
@@ -7412,20 +8841,122 @@
               </a:lnSpc>
             </a:pPr>
             <a:r>
-              <a:rPr sz="1300" b="0">
+              <a:rPr sz="1400" b="0">
                 <a:solidFill>
                   <a:srgbClr val="666666"/>
                 </a:solidFill>
                 <a:latin typeface="Arial"/>
               </a:rPr>
-              <a:t>The proposal for a box plot: x = condition_code, y = measurement_2</a:t>
-            </a:r>
-          </a:p>
-        </p:txBody>
-      </p:sp>
-      <p:sp>
-        <p:nvSpPr>
-          <p:cNvPr id="7" name="TextBox 6"/>
+              <a:t>Violin + observations</a:t>
+            </a:r>
+          </a:p>
+        </p:txBody>
+      </p:sp>
+      <p:pic>
+        <p:nvPicPr>
+          <p:cNvPr id="7" name="Picture 6" descr="D_bar_points_jittered_preset_pres.png"/>
+          <p:cNvPicPr>
+            <a:picLocks noChangeAspect="1"/>
+          </p:cNvPicPr>
+          <p:nvPr/>
+        </p:nvPicPr>
+        <p:blipFill>
+          <a:blip r:embed="rId4"/>
+          <a:stretch>
+            <a:fillRect/>
+          </a:stretch>
+        </p:blipFill>
+        <p:spPr>
+          <a:xfrm>
+            <a:off x="7223760" y="2454879"/>
+            <a:ext cx="3291840" cy="3319842"/>
+          </a:xfrm>
+          <a:prstGeom prst="rect">
+            <a:avLst/>
+          </a:prstGeom>
+        </p:spPr>
+      </p:pic>
+      <p:sp>
+        <p:nvSpPr>
+          <p:cNvPr id="8" name="TextBox 7"/>
+          <p:cNvSpPr txBox="1"/>
+          <p:nvPr/>
+        </p:nvSpPr>
+        <p:spPr>
+          <a:xfrm>
+            <a:off x="7223760" y="6446520"/>
+            <a:ext cx="3291840" cy="457200"/>
+          </a:xfrm>
+          <a:prstGeom prst="rect">
+            <a:avLst/>
+          </a:prstGeom>
+          <a:noFill/>
+        </p:spPr>
+        <p:txBody>
+          <a:bodyPr wrap="square" anchor="t" lIns="45720" rIns="45720">
+            <a:spAutoFit/>
+          </a:bodyPr>
+          <a:lstStyle/>
+          <a:p>
+            <a:pPr algn="l">
+              <a:lnSpc>
+                <a:spcPct val="110000"/>
+              </a:lnSpc>
+            </a:pPr>
+            <a:r>
+              <a:rPr sz="1400" b="0">
+                <a:solidFill>
+                  <a:srgbClr val="666666"/>
+                </a:solidFill>
+                <a:latin typeface="Arial"/>
+              </a:rPr>
+              <a:t>Bar + observations (jittered)</a:t>
+            </a:r>
+          </a:p>
+        </p:txBody>
+      </p:sp>
+      <p:sp>
+        <p:nvSpPr>
+          <p:cNvPr id="9" name="TextBox 8"/>
+          <p:cNvSpPr txBox="1"/>
+          <p:nvPr/>
+        </p:nvSpPr>
+        <p:spPr>
+          <a:xfrm>
+            <a:off x="548640" y="6949440"/>
+            <a:ext cx="9875520" cy="731520"/>
+          </a:xfrm>
+          <a:prstGeom prst="rect">
+            <a:avLst/>
+          </a:prstGeom>
+          <a:noFill/>
+        </p:spPr>
+        <p:txBody>
+          <a:bodyPr wrap="square" anchor="t" lIns="45720" rIns="45720">
+            <a:spAutoFit/>
+          </a:bodyPr>
+          <a:lstStyle/>
+          <a:p>
+            <a:pPr algn="l">
+              <a:lnSpc>
+                <a:spcPct val="110000"/>
+              </a:lnSpc>
+            </a:pPr>
+            <a:r>
+              <a:rPr sz="1900" b="1">
+                <a:solidFill>
+                  <a:srgbClr val="1F2937"/>
+                </a:solidFill>
+                <a:latin typeface="Arial"/>
+              </a:rPr>
+              <a:t>Same 40 observations (n = 7, 9, 11, 13), same Welch tests and P values - three experimental publication presets.</a:t>
+            </a:r>
+          </a:p>
+        </p:txBody>
+      </p:sp>
+      <p:sp>
+        <p:nvSpPr>
+          <p:cNvPr id="10" name="TextBox 9"/>
           <p:cNvSpPr txBox="1"/>
           <p:nvPr/>
         </p:nvSpPr>
@@ -7514,14 +9045,14 @@
                 </a:solidFill>
                 <a:latin typeface="Arial"/>
               </a:rPr>
-              <a:t>Demo 1 - correct the mapping, then ask a different question</a:t>
+              <a:t>The observations are yours to show - size, jitter, fill, edge, arrangement</a:t>
             </a:r>
           </a:p>
         </p:txBody>
       </p:sp>
       <p:pic>
         <p:nvPicPr>
-          <p:cNvPr id="3" name="Picture 2" descr="03b_plot_after_correction.png"/>
+          <p:cNvPr id="3" name="Picture 2" descr="J1_small_narrow_jitter_pres.png"/>
           <p:cNvPicPr>
             <a:picLocks noChangeAspect="1"/>
           </p:cNvPicPr>
@@ -7535,17 +9066,12 @@
         </p:blipFill>
         <p:spPr>
           <a:xfrm>
-            <a:off x="555978" y="1828800"/>
-            <a:ext cx="4831644" cy="3291840"/>
-          </a:xfrm>
-          <a:prstGeom prst="rect">
-            <a:avLst/>
-          </a:prstGeom>
-          <a:ln w="9525">
-            <a:solidFill>
-              <a:srgbClr val="C8C8C8"/>
-            </a:solidFill>
-          </a:ln>
+            <a:off x="542741" y="1874520"/>
+            <a:ext cx="3120758" cy="2468880"/>
+          </a:xfrm>
+          <a:prstGeom prst="rect">
+            <a:avLst/>
+          </a:prstGeom>
         </p:spPr>
       </p:pic>
       <p:sp>
@@ -7556,8 +9082,8 @@
         </p:nvSpPr>
         <p:spPr>
           <a:xfrm>
-            <a:off x="457200" y="5120640"/>
-            <a:ext cx="5029200" cy="457200"/>
+            <a:off x="457200" y="4343400"/>
+            <a:ext cx="3291840" cy="457200"/>
           </a:xfrm>
           <a:prstGeom prst="rect">
             <a:avLst/>
@@ -7582,14 +9108,14 @@
                 </a:solidFill>
                 <a:latin typeface="Arial"/>
               </a:rPr>
-              <a:t>y changed to score_final - the figure follows, nothing else changes</a:t>
+              <a:t>small, narrow jitter</a:t>
             </a:r>
           </a:p>
         </p:txBody>
       </p:sp>
       <p:pic>
         <p:nvPicPr>
-          <p:cNvPr id="5" name="Picture 4" descr="04_scatter_mapping.png"/>
+          <p:cNvPr id="5" name="Picture 4" descr="J2_large_moderate_jitter_pres.png"/>
           <p:cNvPicPr>
             <a:picLocks noChangeAspect="1"/>
           </p:cNvPicPr>
@@ -7603,22 +9129,56 @@
         </p:blipFill>
         <p:spPr>
           <a:xfrm>
-            <a:off x="6071429" y="1828800"/>
-            <a:ext cx="4224901" cy="1097280"/>
-          </a:xfrm>
-          <a:prstGeom prst="rect">
-            <a:avLst/>
-          </a:prstGeom>
-          <a:ln w="9525">
-            <a:solidFill>
-              <a:srgbClr val="C8C8C8"/>
-            </a:solidFill>
-          </a:ln>
+            <a:off x="3926021" y="1874520"/>
+            <a:ext cx="3120758" cy="2468880"/>
+          </a:xfrm>
+          <a:prstGeom prst="rect">
+            <a:avLst/>
+          </a:prstGeom>
         </p:spPr>
       </p:pic>
+      <p:sp>
+        <p:nvSpPr>
+          <p:cNvPr id="6" name="TextBox 5"/>
+          <p:cNvSpPr txBox="1"/>
+          <p:nvPr/>
+        </p:nvSpPr>
+        <p:spPr>
+          <a:xfrm>
+            <a:off x="3840480" y="4343400"/>
+            <a:ext cx="3291840" cy="457200"/>
+          </a:xfrm>
+          <a:prstGeom prst="rect">
+            <a:avLst/>
+          </a:prstGeom>
+          <a:noFill/>
+        </p:spPr>
+        <p:txBody>
+          <a:bodyPr wrap="square" anchor="t" lIns="45720" rIns="45720">
+            <a:spAutoFit/>
+          </a:bodyPr>
+          <a:lstStyle/>
+          <a:p>
+            <a:pPr algn="l">
+              <a:lnSpc>
+                <a:spcPct val="110000"/>
+              </a:lnSpc>
+            </a:pPr>
+            <a:r>
+              <a:rPr sz="1300" b="0">
+                <a:solidFill>
+                  <a:srgbClr val="666666"/>
+                </a:solidFill>
+                <a:latin typeface="Arial"/>
+              </a:rPr>
+              <a:t>large, moderate jitter</a:t>
+            </a:r>
+          </a:p>
+        </p:txBody>
+      </p:sp>
       <p:pic>
         <p:nvPicPr>
-          <p:cNvPr id="6" name="Picture 5" descr="06_final.png"/>
+          <p:cNvPr id="7" name="Picture 6" descr="J3_open_circles_pres.png"/>
           <p:cNvPicPr>
             <a:picLocks noChangeAspect="1"/>
           </p:cNvPicPr>
@@ -7632,29 +9192,24 @@
         </p:blipFill>
         <p:spPr>
           <a:xfrm>
-            <a:off x="6640438" y="3017520"/>
-            <a:ext cx="3086883" cy="2103120"/>
-          </a:xfrm>
-          <a:prstGeom prst="rect">
-            <a:avLst/>
-          </a:prstGeom>
-          <a:ln w="9525">
-            <a:solidFill>
-              <a:srgbClr val="C8C8C8"/>
-            </a:solidFill>
-          </a:ln>
+            <a:off x="7309301" y="1874520"/>
+            <a:ext cx="3120758" cy="2468880"/>
+          </a:xfrm>
+          <a:prstGeom prst="rect">
+            <a:avLst/>
+          </a:prstGeom>
         </p:spPr>
       </p:pic>
       <p:sp>
         <p:nvSpPr>
-          <p:cNvPr id="7" name="TextBox 6"/>
+          <p:cNvPr id="8" name="TextBox 7"/>
           <p:cNvSpPr txBox="1"/>
           <p:nvPr/>
         </p:nvSpPr>
         <p:spPr>
           <a:xfrm>
-            <a:off x="5669280" y="5120640"/>
-            <a:ext cx="5029200" cy="457200"/>
+            <a:off x="7223760" y="4343400"/>
+            <a:ext cx="3291840" cy="457200"/>
           </a:xfrm>
           <a:prstGeom prst="rect">
             <a:avLst/>
@@ -7679,21 +9234,45 @@
                 </a:solidFill>
                 <a:latin typeface="Arial"/>
               </a:rPr>
-              <a:t>Same file as a scatter: x = measurement_2, y = score_final, color = condition_code</a:t>
-            </a:r>
-          </a:p>
-        </p:txBody>
-      </p:sp>
-      <p:sp>
-        <p:nvSpPr>
-          <p:cNvPr id="8" name="TextBox 7"/>
+              <a:t>open circles</a:t>
+            </a:r>
+          </a:p>
+        </p:txBody>
+      </p:sp>
+      <p:pic>
+        <p:nvPicPr>
+          <p:cNvPr id="9" name="Picture 8" descr="J4_black_edged_filled_pres.png"/>
+          <p:cNvPicPr>
+            <a:picLocks noChangeAspect="1"/>
+          </p:cNvPicPr>
+          <p:nvPr/>
+        </p:nvPicPr>
+        <p:blipFill>
+          <a:blip r:embed="rId5"/>
+          <a:stretch>
+            <a:fillRect/>
+          </a:stretch>
+        </p:blipFill>
+        <p:spPr>
+          <a:xfrm>
+            <a:off x="542741" y="4709160"/>
+            <a:ext cx="3120758" cy="2468880"/>
+          </a:xfrm>
+          <a:prstGeom prst="rect">
+            <a:avLst/>
+          </a:prstGeom>
+        </p:spPr>
+      </p:pic>
+      <p:sp>
+        <p:nvSpPr>
+          <p:cNvPr id="10" name="TextBox 9"/>
           <p:cNvSpPr txBox="1"/>
           <p:nvPr/>
         </p:nvSpPr>
         <p:spPr>
           <a:xfrm>
-            <a:off x="548640" y="5669280"/>
-            <a:ext cx="10058400" cy="2011680"/>
+            <a:off x="457200" y="7178040"/>
+            <a:ext cx="3291840" cy="457200"/>
           </a:xfrm>
           <a:prstGeom prst="rect">
             <a:avLst/>
@@ -7701,72 +9280,196 @@
           <a:noFill/>
         </p:spPr>
         <p:txBody>
-          <a:bodyPr wrap="square" lIns="45720" rIns="45720">
+          <a:bodyPr wrap="square" anchor="t" lIns="45720" rIns="45720">
             <a:spAutoFit/>
           </a:bodyPr>
           <a:lstStyle/>
           <a:p>
-            <a:pPr>
-              <a:lnSpc>
-                <a:spcPct val="108000"/>
-              </a:lnSpc>
-              <a:spcAft>
-                <a:spcPts val="600"/>
-              </a:spcAft>
-            </a:pPr>
-            <a:r>
-              <a:rPr sz="1700" b="0">
-                <a:solidFill>
-                  <a:srgbClr val="111111"/>
-                </a:solidFill>
-                <a:latin typeface="Arial"/>
-              </a:rPr>
-              <a:t>• The row label is the role; the drop-down is your column - your headers, unchanged</a:t>
-            </a:r>
-          </a:p>
-          <a:p>
-            <a:pPr>
-              <a:lnSpc>
-                <a:spcPct val="108000"/>
-              </a:lnSpc>
-              <a:spcAft>
-                <a:spcPts val="600"/>
-              </a:spcAft>
-            </a:pPr>
-            <a:r>
-              <a:rPr sz="1700" b="0">
-                <a:solidFill>
-                  <a:srgbClr val="111111"/>
-                </a:solidFill>
-                <a:latin typeface="Arial"/>
-              </a:rPr>
-              <a:t>• Per-group regression lines with slope, R² and P appear because a colour role was set</a:t>
-            </a:r>
-          </a:p>
-          <a:p>
-            <a:pPr>
-              <a:lnSpc>
-                <a:spcPct val="108000"/>
-              </a:lnSpc>
-              <a:spcAft>
-                <a:spcPts val="600"/>
-              </a:spcAft>
-            </a:pPr>
-            <a:r>
-              <a:rPr sz="1700" b="0">
-                <a:solidFill>
-                  <a:srgbClr val="111111"/>
-                </a:solidFill>
-                <a:latin typeface="Arial"/>
-              </a:rPr>
-              <a:t>• Three figures from one table in the tutorial: box, scatter, bar with SEM</a:t>
-            </a:r>
-          </a:p>
-        </p:txBody>
-      </p:sp>
-      <p:sp>
-        <p:nvSpPr>
-          <p:cNvPr id="9" name="TextBox 8"/>
+            <a:pPr algn="l">
+              <a:lnSpc>
+                <a:spcPct val="110000"/>
+              </a:lnSpc>
+            </a:pPr>
+            <a:r>
+              <a:rPr sz="1300" b="0">
+                <a:solidFill>
+                  <a:srgbClr val="666666"/>
+                </a:solidFill>
+                <a:latin typeface="Arial"/>
+              </a:rPr>
+              <a:t>filled, dark edge</a:t>
+            </a:r>
+          </a:p>
+        </p:txBody>
+      </p:sp>
+      <p:pic>
+        <p:nvPicPr>
+          <p:cNvPr id="11" name="Picture 10" descr="J5_beeswarm_pres.png"/>
+          <p:cNvPicPr>
+            <a:picLocks noChangeAspect="1"/>
+          </p:cNvPicPr>
+          <p:nvPr/>
+        </p:nvPicPr>
+        <p:blipFill>
+          <a:blip r:embed="rId6"/>
+          <a:stretch>
+            <a:fillRect/>
+          </a:stretch>
+        </p:blipFill>
+        <p:spPr>
+          <a:xfrm>
+            <a:off x="3926021" y="4709160"/>
+            <a:ext cx="3120758" cy="2468880"/>
+          </a:xfrm>
+          <a:prstGeom prst="rect">
+            <a:avLst/>
+          </a:prstGeom>
+        </p:spPr>
+      </p:pic>
+      <p:sp>
+        <p:nvSpPr>
+          <p:cNvPr id="12" name="TextBox 11"/>
+          <p:cNvSpPr txBox="1"/>
+          <p:nvPr/>
+        </p:nvSpPr>
+        <p:spPr>
+          <a:xfrm>
+            <a:off x="3840480" y="7178040"/>
+            <a:ext cx="3291840" cy="457200"/>
+          </a:xfrm>
+          <a:prstGeom prst="rect">
+            <a:avLst/>
+          </a:prstGeom>
+          <a:noFill/>
+        </p:spPr>
+        <p:txBody>
+          <a:bodyPr wrap="square" anchor="t" lIns="45720" rIns="45720">
+            <a:spAutoFit/>
+          </a:bodyPr>
+          <a:lstStyle/>
+          <a:p>
+            <a:pPr algn="l">
+              <a:lnSpc>
+                <a:spcPct val="110000"/>
+              </a:lnSpc>
+            </a:pPr>
+            <a:r>
+              <a:rPr sz="1300" b="0">
+                <a:solidFill>
+                  <a:srgbClr val="666666"/>
+                </a:solidFill>
+                <a:latin typeface="Arial"/>
+              </a:rPr>
+              <a:t>beeswarm</a:t>
+            </a:r>
+          </a:p>
+        </p:txBody>
+      </p:sp>
+      <p:pic>
+        <p:nvPicPr>
+          <p:cNvPr id="13" name="Picture 12" descr="J6_centered_no_jitter_pres.png"/>
+          <p:cNvPicPr>
+            <a:picLocks noChangeAspect="1"/>
+          </p:cNvPicPr>
+          <p:nvPr/>
+        </p:nvPicPr>
+        <p:blipFill>
+          <a:blip r:embed="rId7"/>
+          <a:stretch>
+            <a:fillRect/>
+          </a:stretch>
+        </p:blipFill>
+        <p:spPr>
+          <a:xfrm>
+            <a:off x="7309301" y="4709160"/>
+            <a:ext cx="3120758" cy="2468880"/>
+          </a:xfrm>
+          <a:prstGeom prst="rect">
+            <a:avLst/>
+          </a:prstGeom>
+        </p:spPr>
+      </p:pic>
+      <p:sp>
+        <p:nvSpPr>
+          <p:cNvPr id="14" name="TextBox 13"/>
+          <p:cNvSpPr txBox="1"/>
+          <p:nvPr/>
+        </p:nvSpPr>
+        <p:spPr>
+          <a:xfrm>
+            <a:off x="7223760" y="7178040"/>
+            <a:ext cx="3291840" cy="457200"/>
+          </a:xfrm>
+          <a:prstGeom prst="rect">
+            <a:avLst/>
+          </a:prstGeom>
+          <a:noFill/>
+        </p:spPr>
+        <p:txBody>
+          <a:bodyPr wrap="square" anchor="t" lIns="45720" rIns="45720">
+            <a:spAutoFit/>
+          </a:bodyPr>
+          <a:lstStyle/>
+          <a:p>
+            <a:pPr algn="l">
+              <a:lnSpc>
+                <a:spcPct val="110000"/>
+              </a:lnSpc>
+            </a:pPr>
+            <a:r>
+              <a:rPr sz="1300" b="0">
+                <a:solidFill>
+                  <a:srgbClr val="666666"/>
+                </a:solidFill>
+                <a:latin typeface="Arial"/>
+              </a:rPr>
+              <a:t>centred, translucent, no jitter</a:t>
+            </a:r>
+          </a:p>
+        </p:txBody>
+      </p:sp>
+      <p:sp>
+        <p:nvSpPr>
+          <p:cNvPr id="15" name="TextBox 14"/>
+          <p:cNvSpPr txBox="1"/>
+          <p:nvPr/>
+        </p:nvSpPr>
+        <p:spPr>
+          <a:xfrm>
+            <a:off x="548640" y="7452360"/>
+            <a:ext cx="9875520" cy="731520"/>
+          </a:xfrm>
+          <a:prstGeom prst="rect">
+            <a:avLst/>
+          </a:prstGeom>
+          <a:noFill/>
+        </p:spPr>
+        <p:txBody>
+          <a:bodyPr wrap="square" anchor="t" lIns="45720" rIns="45720">
+            <a:spAutoFit/>
+          </a:bodyPr>
+          <a:lstStyle/>
+          <a:p>
+            <a:pPr algn="l">
+              <a:lnSpc>
+                <a:spcPct val="110000"/>
+              </a:lnSpc>
+            </a:pPr>
+            <a:r>
+              <a:rPr sz="1900" b="1">
+                <a:solidFill>
+                  <a:srgbClr val="1F2937"/>
+                </a:solidFill>
+                <a:latin typeface="Arial"/>
+              </a:rPr>
+              <a:t>The scientific data do not change. The presentation can.</a:t>
+            </a:r>
+          </a:p>
+        </p:txBody>
+      </p:sp>
+      <p:sp>
+        <p:nvSpPr>
+          <p:cNvPr id="16" name="TextBox 15"/>
           <p:cNvSpPr txBox="1"/>
           <p:nvPr/>
         </p:nvSpPr>
@@ -7855,14 +9558,14 @@
                 </a:solidFill>
                 <a:latin typeface="Arial"/>
               </a:rPr>
-              <a:t>Demo 2 - differential results with names the detector does not know</a:t>
+              <a:t>Statistics on the figure - chosen by you, documented by the application</a:t>
             </a:r>
           </a:p>
         </p:txBody>
       </p:sp>
       <p:pic>
         <p:nvPicPr>
-          <p:cNvPr id="3" name="Picture 2" descr="volcano_manual_mapping_04b_window_before_0_0.png"/>
+          <p:cNvPr id="3" name="Picture 2" descr="B_box_points_outline_preset_pres.png"/>
           <p:cNvPicPr>
             <a:picLocks noChangeAspect="1"/>
           </p:cNvPicPr>
@@ -7876,61 +9579,17 @@
         </p:blipFill>
         <p:spPr>
           <a:xfrm>
-            <a:off x="457200" y="1840774"/>
-            <a:ext cx="5029200" cy="2993571"/>
-          </a:xfrm>
-          <a:prstGeom prst="rect">
-            <a:avLst/>
-          </a:prstGeom>
-          <a:ln w="9525">
-            <a:solidFill>
-              <a:srgbClr val="C8C8C8"/>
-            </a:solidFill>
-          </a:ln>
+            <a:off x="457200" y="2354061"/>
+            <a:ext cx="5029200" cy="3978677"/>
+          </a:xfrm>
+          <a:prstGeom prst="rect">
+            <a:avLst/>
+          </a:prstGeom>
         </p:spPr>
       </p:pic>
-      <p:sp>
-        <p:nvSpPr>
-          <p:cNvPr id="4" name="TextBox 3"/>
-          <p:cNvSpPr txBox="1"/>
-          <p:nvPr/>
-        </p:nvSpPr>
-        <p:spPr>
-          <a:xfrm>
-            <a:off x="457200" y="4846320"/>
-            <a:ext cx="5029200" cy="457200"/>
-          </a:xfrm>
-          <a:prstGeom prst="rect">
-            <a:avLst/>
-          </a:prstGeom>
-          <a:noFill/>
-        </p:spPr>
-        <p:txBody>
-          <a:bodyPr wrap="square" anchor="t" lIns="45720" rIns="45720">
-            <a:spAutoFit/>
-          </a:bodyPr>
-          <a:lstStyle/>
-          <a:p>
-            <a:pPr algn="l">
-              <a:lnSpc>
-                <a:spcPct val="110000"/>
-              </a:lnSpc>
-            </a:pPr>
-            <a:r>
-              <a:rPr sz="1300" b="0">
-                <a:solidFill>
-                  <a:srgbClr val="666666"/>
-                </a:solidFill>
-                <a:latin typeface="Arial"/>
-              </a:rPr>
-              <a:t>effect_measure, p_raw, name: every role (none), Messages names the missing roles</a:t>
-            </a:r>
-          </a:p>
-        </p:txBody>
-      </p:sp>
       <p:pic>
         <p:nvPicPr>
-          <p:cNvPr id="5" name="Picture 4" descr="05b_plot_after_mapping.png"/>
+          <p:cNvPr id="4" name="Picture 3" descr="group_comparison_box_05_statistics_0_20_566.png"/>
           <p:cNvPicPr>
             <a:picLocks noChangeAspect="1"/>
           </p:cNvPicPr>
@@ -7944,8 +9603,8 @@
         </p:blipFill>
         <p:spPr>
           <a:xfrm>
-            <a:off x="5669280" y="1840774"/>
-            <a:ext cx="5029200" cy="2993571"/>
+            <a:off x="5669280" y="2162411"/>
+            <a:ext cx="4937760" cy="4361978"/>
           </a:xfrm>
           <a:prstGeom prst="rect">
             <a:avLst/>
@@ -7959,14 +9618,14 @@
       </p:pic>
       <p:sp>
         <p:nvSpPr>
-          <p:cNvPr id="6" name="TextBox 5"/>
+          <p:cNvPr id="5" name="TextBox 4"/>
           <p:cNvSpPr txBox="1"/>
           <p:nvPr/>
         </p:nvSpPr>
         <p:spPr>
           <a:xfrm>
-            <a:off x="5669280" y="4846320"/>
-            <a:ext cx="5029200" cy="457200"/>
+            <a:off x="548640" y="7132320"/>
+            <a:ext cx="9875520" cy="731520"/>
           </a:xfrm>
           <a:prstGeom prst="rect">
             <a:avLst/>
@@ -7985,100 +9644,20 @@
               </a:lnSpc>
             </a:pPr>
             <a:r>
-              <a:rPr sz="1300" b="0">
-                <a:solidFill>
-                  <a:srgbClr val="666666"/>
-                </a:solidFill>
-                <a:latin typeface="Arial"/>
-              </a:rPr>
-              <a:t>After assigning x, p, label and id_col by hand: the volcano renders</a:t>
-            </a:r>
-          </a:p>
-        </p:txBody>
-      </p:sp>
-      <p:sp>
-        <p:nvSpPr>
-          <p:cNvPr id="7" name="TextBox 6"/>
-          <p:cNvSpPr txBox="1"/>
-          <p:nvPr/>
-        </p:nvSpPr>
-        <p:spPr>
-          <a:xfrm>
-            <a:off x="548640" y="5394960"/>
-            <a:ext cx="10058400" cy="2194560"/>
-          </a:xfrm>
-          <a:prstGeom prst="rect">
-            <a:avLst/>
-          </a:prstGeom>
-          <a:noFill/>
-        </p:spPr>
-        <p:txBody>
-          <a:bodyPr wrap="square" lIns="45720" rIns="45720">
-            <a:spAutoFit/>
-          </a:bodyPr>
-          <a:lstStyle/>
-          <a:p>
-            <a:pPr>
-              <a:lnSpc>
-                <a:spcPct val="108000"/>
-              </a:lnSpc>
-              <a:spcAft>
-                <a:spcPts val="600"/>
-              </a:spcAft>
-            </a:pPr>
-            <a:r>
-              <a:rPr sz="1700" b="0">
-                <a:solidFill>
-                  <a:srgbClr val="111111"/>
-                </a:solidFill>
-                <a:latin typeface="Arial"/>
-              </a:rPr>
-              <a:t>• With DESeq2 names (log2FoldChange, pvalue, gene_symbol) the same roles fill themselves</a:t>
-            </a:r>
-          </a:p>
-          <a:p>
-            <a:pPr>
-              <a:lnSpc>
-                <a:spcPct val="108000"/>
-              </a:lnSpc>
-              <a:spcAft>
-                <a:spcPts val="600"/>
-              </a:spcAft>
-            </a:pPr>
-            <a:r>
-              <a:rPr sz="1700" b="0">
-                <a:solidFill>
-                  <a:srgbClr val="111111"/>
-                </a:solidFill>
-                <a:latin typeface="Arial"/>
-              </a:rPr>
-              <a:t>• P values are read from the table - the application never recomputes differential statistics</a:t>
-            </a:r>
-          </a:p>
-          <a:p>
-            <a:pPr>
-              <a:lnSpc>
-                <a:spcPct val="108000"/>
-              </a:lnSpc>
-              <a:spcAft>
-                <a:spcPts val="600"/>
-              </a:spcAft>
-            </a:pPr>
-            <a:r>
-              <a:rPr sz="1700" b="0">
-                <a:solidFill>
-                  <a:srgbClr val="111111"/>
-                </a:solidFill>
-                <a:latin typeface="Arial"/>
-              </a:rPr>
-              <a:t>• Cut-offs, colours by class and the number of labelled genes are options; the header counts Up / Down / NS</a:t>
-            </a:r>
-          </a:p>
-        </p:txBody>
-      </p:sp>
-      <p:sp>
-        <p:nvSpPr>
-          <p:cNvPr id="8" name="TextBox 7"/>
+              <a:rPr sz="1800" b="1">
+                <a:solidFill>
+                  <a:srgbClr val="1F2937"/>
+                </a:solidFill>
+                <a:latin typeface="Arial"/>
+              </a:rPr>
+              <a:t>Welch's t-test, selected pairs, Holm correction: brackets with exact P, a results table, and the methods sentence to paste.</a:t>
+            </a:r>
+          </a:p>
+        </p:txBody>
+      </p:sp>
+      <p:sp>
+        <p:nvSpPr>
+          <p:cNvPr id="6" name="TextBox 5"/>
           <p:cNvSpPr txBox="1"/>
           <p:nvPr/>
         </p:nvSpPr>
@@ -8167,14 +9746,14 @@
                 </a:solidFill>
                 <a:latin typeface="Arial"/>
               </a:rPr>
-              <a:t>Statistics on the figure - chosen by you, documented by the application</a:t>
+              <a:t>Publication presets are previewed on your own data</a:t>
             </a:r>
           </a:p>
         </p:txBody>
       </p:sp>
       <p:pic>
         <p:nvPicPr>
-          <p:cNvPr id="3" name="Picture 2" descr="05b_plot_with_brackets.png"/>
+          <p:cNvPr id="3" name="Picture 2" descr="observations_jitter_09_preview_dialog_0_0_908.png"/>
           <p:cNvPicPr>
             <a:picLocks noChangeAspect="1"/>
           </p:cNvPicPr>
@@ -8188,8 +9767,8 @@
         </p:blipFill>
         <p:spPr>
           <a:xfrm>
-            <a:off x="457200" y="1867512"/>
-            <a:ext cx="5120640" cy="3488735"/>
+            <a:off x="524999" y="1874520"/>
+            <a:ext cx="9922801" cy="4480560"/>
           </a:xfrm>
           <a:prstGeom prst="rect">
             <a:avLst/>
@@ -8201,45 +9780,16 @@
           </a:ln>
         </p:spPr>
       </p:pic>
-      <p:pic>
-        <p:nvPicPr>
-          <p:cNvPr id="4" name="Picture 3" descr="05_statistics.png"/>
-          <p:cNvPicPr>
-            <a:picLocks noChangeAspect="1"/>
-          </p:cNvPicPr>
-          <p:nvPr/>
-        </p:nvPicPr>
-        <p:blipFill>
-          <a:blip r:embed="rId3"/>
-          <a:stretch>
-            <a:fillRect/>
-          </a:stretch>
-        </p:blipFill>
-        <p:spPr>
-          <a:xfrm>
-            <a:off x="6427034" y="1828800"/>
-            <a:ext cx="3605132" cy="5394960"/>
-          </a:xfrm>
-          <a:prstGeom prst="rect">
-            <a:avLst/>
-          </a:prstGeom>
-          <a:ln w="9525">
-            <a:solidFill>
-              <a:srgbClr val="C8C8C8"/>
-            </a:solidFill>
-          </a:ln>
-        </p:spPr>
-      </p:pic>
-      <p:sp>
-        <p:nvSpPr>
-          <p:cNvPr id="5" name="TextBox 4"/>
+      <p:sp>
+        <p:nvSpPr>
+          <p:cNvPr id="4" name="TextBox 3"/>
           <p:cNvSpPr txBox="1"/>
           <p:nvPr/>
         </p:nvSpPr>
         <p:spPr>
           <a:xfrm>
-            <a:off x="548640" y="5577840"/>
-            <a:ext cx="5120640" cy="2194560"/>
+            <a:off x="548640" y="6858000"/>
+            <a:ext cx="9875520" cy="731520"/>
           </a:xfrm>
           <a:prstGeom prst="rect">
             <a:avLst/>
@@ -8247,91 +9797,31 @@
           <a:noFill/>
         </p:spPr>
         <p:txBody>
-          <a:bodyPr wrap="square" lIns="45720" rIns="45720">
+          <a:bodyPr wrap="square" anchor="t" lIns="45720" rIns="45720">
             <a:spAutoFit/>
           </a:bodyPr>
           <a:lstStyle/>
           <a:p>
-            <a:pPr>
-              <a:lnSpc>
-                <a:spcPct val="108000"/>
-              </a:lnSpc>
-              <a:spcAft>
-                <a:spcPts val="600"/>
-              </a:spcAft>
-            </a:pPr>
-            <a:r>
-              <a:rPr sz="1600" b="0">
-                <a:solidFill>
-                  <a:srgbClr val="111111"/>
-                </a:solidFill>
-                <a:latin typeface="Arial"/>
-              </a:rPr>
-              <a:t>• Welch's t-test, all pairs, Holm-Bonferroni, exact P on brackets</a:t>
-            </a:r>
-          </a:p>
-          <a:p>
-            <a:pPr>
-              <a:lnSpc>
-                <a:spcPct val="108000"/>
-              </a:lnSpc>
-              <a:spcAft>
-                <a:spcPts val="600"/>
-              </a:spcAft>
-            </a:pPr>
-            <a:r>
-              <a:rPr sz="1600" b="0">
-                <a:solidFill>
-                  <a:srgbClr val="111111"/>
-                </a:solidFill>
-                <a:latin typeface="Arial"/>
-              </a:rPr>
-              <a:t>• Table: test, p, adjusted p, Hedges' g, n per comparison</a:t>
-            </a:r>
-          </a:p>
-          <a:p>
-            <a:pPr>
-              <a:lnSpc>
-                <a:spcPct val="108000"/>
-              </a:lnSpc>
-              <a:spcAft>
-                <a:spcPts val="600"/>
-              </a:spcAft>
-            </a:pPr>
-            <a:r>
-              <a:rPr sz="1600" b="0">
-                <a:solidFill>
-                  <a:srgbClr val="111111"/>
-                </a:solidFill>
-                <a:latin typeface="Arial"/>
-              </a:rPr>
-              <a:t>• Method sentence with library versions, ready for the manuscript</a:t>
-            </a:r>
-          </a:p>
-          <a:p>
-            <a:pPr>
-              <a:lnSpc>
-                <a:spcPct val="108000"/>
-              </a:lnSpc>
-              <a:spcAft>
-                <a:spcPts val="600"/>
-              </a:spcAft>
-            </a:pPr>
-            <a:r>
-              <a:rPr sz="1600" b="0">
-                <a:solidFill>
-                  <a:srgbClr val="111111"/>
-                </a:solidFill>
-                <a:latin typeface="Arial"/>
-              </a:rPr>
-              <a:t>• Suggested test printed from the design; the choice is the researcher's</a:t>
-            </a:r>
-          </a:p>
-        </p:txBody>
-      </p:sp>
-      <p:sp>
-        <p:nvSpPr>
-          <p:cNvPr id="6" name="TextBox 5"/>
+            <a:pPr algn="l">
+              <a:lnSpc>
+                <a:spcPct val="110000"/>
+              </a:lnSpc>
+            </a:pPr>
+            <a:r>
+              <a:rPr sz="1900" b="1">
+                <a:solidFill>
+                  <a:srgbClr val="1F2937"/>
+                </a:solidFill>
+                <a:latin typeface="Arial"/>
+              </a:rPr>
+              <a:t>Before and after, drawn on the loaded table - nothing is applied until you confirm.</a:t>
+            </a:r>
+          </a:p>
+        </p:txBody>
+      </p:sp>
+      <p:sp>
+        <p:nvSpPr>
+          <p:cNvPr id="5" name="TextBox 4"/>
           <p:cNvSpPr txBox="1"/>
           <p:nvPr/>
         </p:nvSpPr>
@@ -8420,14 +9910,14 @@
                 </a:solidFill>
                 <a:latin typeface="Arial"/>
               </a:rPr>
-              <a:t>Figure presets - the style travels, the data stay</a:t>
+              <a:t>The preview lists what changes and checks what must not</a:t>
             </a:r>
           </a:p>
         </p:txBody>
       </p:sp>
       <p:pic>
         <p:nvPicPr>
-          <p:cNvPr id="3" name="Picture 2" descr="01_refined_plot.png"/>
+          <p:cNvPr id="3" name="Picture 2" descr="observations_jitter_09_preview_dialog_0_410_908.png"/>
           <p:cNvPicPr>
             <a:picLocks noChangeAspect="1"/>
           </p:cNvPicPr>
@@ -8441,8 +9931,8 @@
         </p:blipFill>
         <p:spPr>
           <a:xfrm>
-            <a:off x="457200" y="1840774"/>
-            <a:ext cx="5029200" cy="2993571"/>
+            <a:off x="457200" y="1891841"/>
+            <a:ext cx="10058400" cy="2525677"/>
           </a:xfrm>
           <a:prstGeom prst="rect">
             <a:avLst/>
@@ -8462,115 +9952,8 @@
         </p:nvSpPr>
         <p:spPr>
           <a:xfrm>
-            <a:off x="457200" y="4846320"/>
-            <a:ext cx="5029200" cy="457200"/>
-          </a:xfrm>
-          <a:prstGeom prst="rect">
-            <a:avLst/>
-          </a:prstGeom>
-          <a:noFill/>
-        </p:spPr>
-        <p:txBody>
-          <a:bodyPr wrap="square" anchor="t" lIns="45720" rIns="45720">
-            <a:spAutoFit/>
-          </a:bodyPr>
-          <a:lstStyle/>
-          <a:p>
-            <a:pPr algn="l">
-              <a:lnSpc>
-                <a:spcPct val="110000"/>
-              </a:lnSpc>
-            </a:pPr>
-            <a:r>
-              <a:rPr sz="1300" b="0">
-                <a:solidFill>
-                  <a:srgbClr val="666666"/>
-                </a:solidFill>
-                <a:latin typeface="Arial"/>
-              </a:rPr>
-              <a:t>Dataset 1, refined: violin, larger points, single-column width, y label - saved as a style preset</a:t>
-            </a:r>
-          </a:p>
-        </p:txBody>
-      </p:sp>
-      <p:pic>
-        <p:nvPicPr>
-          <p:cNvPr id="5" name="Picture 4" descr="05_second_dataset_preset.png"/>
-          <p:cNvPicPr>
-            <a:picLocks noChangeAspect="1"/>
-          </p:cNvPicPr>
-          <p:nvPr/>
-        </p:nvPicPr>
-        <p:blipFill>
-          <a:blip r:embed="rId3"/>
-          <a:stretch>
-            <a:fillRect/>
-          </a:stretch>
-        </p:blipFill>
-        <p:spPr>
-          <a:xfrm>
-            <a:off x="5669280" y="1840774"/>
-            <a:ext cx="5029200" cy="2993571"/>
-          </a:xfrm>
-          <a:prstGeom prst="rect">
-            <a:avLst/>
-          </a:prstGeom>
-          <a:ln w="9525">
-            <a:solidFill>
-              <a:srgbClr val="C8C8C8"/>
-            </a:solidFill>
-          </a:ln>
-        </p:spPr>
-      </p:pic>
-      <p:sp>
-        <p:nvSpPr>
-          <p:cNvPr id="6" name="TextBox 5"/>
-          <p:cNvSpPr txBox="1"/>
-          <p:nvPr/>
-        </p:nvSpPr>
-        <p:spPr>
-          <a:xfrm>
-            <a:off x="5669280" y="4846320"/>
-            <a:ext cx="5029200" cy="457200"/>
-          </a:xfrm>
-          <a:prstGeom prst="rect">
-            <a:avLst/>
-          </a:prstGeom>
-          <a:noFill/>
-        </p:spPr>
-        <p:txBody>
-          <a:bodyPr wrap="square" anchor="t" lIns="45720" rIns="45720">
-            <a:spAutoFit/>
-          </a:bodyPr>
-          <a:lstStyle/>
-          <a:p>
-            <a:pPr algn="l">
-              <a:lnSpc>
-                <a:spcPct val="110000"/>
-              </a:lnSpc>
-            </a:pPr>
-            <a:r>
-              <a:rPr sz="1300" b="0">
-                <a:solidFill>
-                  <a:srgbClr val="666666"/>
-                </a:solidFill>
-                <a:latin typeface="Arial"/>
-              </a:rPr>
-              <a:t>Dataset 2 after Apply: “Applied preset: 9 setting(s)” - groups and values are its own</a:t>
-            </a:r>
-          </a:p>
-        </p:txBody>
-      </p:sp>
-      <p:sp>
-        <p:nvSpPr>
-          <p:cNvPr id="7" name="TextBox 6"/>
-          <p:cNvSpPr txBox="1"/>
-          <p:nvPr/>
-        </p:nvSpPr>
-        <p:spPr>
-          <a:xfrm>
-            <a:off x="548640" y="5394960"/>
-            <a:ext cx="10058400" cy="2194560"/>
+            <a:off x="640080" y="4846320"/>
+            <a:ext cx="9692640" cy="2560320"/>
           </a:xfrm>
           <a:prstGeom prst="rect">
             <a:avLst/>
@@ -8588,7 +9971,7 @@
                 <a:spcPct val="108000"/>
               </a:lnSpc>
               <a:spcAft>
-                <a:spcPts val="600"/>
+                <a:spcPts val="800"/>
               </a:spcAft>
             </a:pPr>
             <a:r>
@@ -8598,7 +9981,7 @@
                 </a:solidFill>
                 <a:latin typeface="Arial"/>
               </a:rPr>
-              <a:t>• Figure style only: fonts, colours, layout, legend, export - portable to any table of the plot type</a:t>
+              <a:t>• Twelve experimental presets derived from published open-access figures and publishers' stated requirements; the letter in a name, (N) (S) (C), is the evidence set, not an approval</a:t>
             </a:r>
           </a:p>
           <a:p>
@@ -8607,7 +9990,7 @@
                 <a:spcPct val="108000"/>
               </a:lnSpc>
               <a:spcAft>
-                <a:spcPts val="600"/>
+                <a:spcPts val="800"/>
               </a:spcAft>
             </a:pPr>
             <a:r>
@@ -8617,7 +10000,7 @@
                 </a:solidFill>
                 <a:latin typeface="Arial"/>
               </a:rPr>
-              <a:t>• Full figure configuration: also roles, thresholds and statistics settings - asks for remapping on new data</a:t>
+              <a:t>• Every setting that would change is listed (here marker opacity, point edge width, point size)</a:t>
             </a:r>
           </a:p>
           <a:p>
@@ -8626,7 +10009,7 @@
                 <a:spcPct val="108000"/>
               </a:lnSpc>
               <a:spcAft>
-                <a:spcPts val="600"/>
+                <a:spcPts val="800"/>
               </a:spcAft>
             </a:pPr>
             <a:r>
@@ -8636,14 +10019,33 @@
                 </a:solidFill>
                 <a:latin typeface="Arial"/>
               </a:rPr>
-              <a:t>• Neither kind contains data: checked in the validated run (no value, group name or identifier in the file)</a:t>
-            </a:r>
-          </a:p>
-        </p:txBody>
-      </p:sp>
-      <p:sp>
-        <p:nvSpPr>
-          <p:cNvPr id="8" name="TextBox 7"/>
+              <a:t>• Green line: no data, column role, statistical test, threshold or transformation changes - a preset that would is refused</a:t>
+            </a:r>
+          </a:p>
+          <a:p>
+            <a:pPr>
+              <a:lnSpc>
+                <a:spcPct val="108000"/>
+              </a:lnSpc>
+              <a:spcAft>
+                <a:spcPts val="800"/>
+              </a:spcAft>
+            </a:pPr>
+            <a:r>
+              <a:rPr sz="1700" b="0">
+                <a:solidFill>
+                  <a:srgbClr val="111111"/>
+                </a:solidFill>
+                <a:latin typeface="Arial"/>
+              </a:rPr>
+              <a:t>• Apply, Cancel, or Save as my preset - a preset is a starting configuration, not a locked template</a:t>
+            </a:r>
+          </a:p>
+        </p:txBody>
+      </p:sp>
+      <p:sp>
+        <p:nvSpPr>
+          <p:cNvPr id="5" name="TextBox 4"/>
           <p:cNvSpPr txBox="1"/>
           <p:nvPr/>
         </p:nvSpPr>

--- a/tutorial/slides/MakeMyFigure_Tutorial_Seminar.pptx
+++ b/tutorial/slides/MakeMyFigure_Tutorial_Seminar.pptx
@@ -5,10 +5,10 @@
     <p:sldMasterId id="2147483648" r:id="rId4"/>
   </p:sldMasterIdLst>
   <p:notesMasterIdLst>
-    <p:notesMasterId r:id="rId42"/>
+    <p:notesMasterId r:id="rId40"/>
   </p:notesMasterIdLst>
   <p:handoutMasterIdLst>
-    <p:handoutMasterId r:id="rId43"/>
+    <p:handoutMasterId r:id="rId41"/>
   </p:handoutMasterIdLst>
   <p:sldIdLst>
     <p:sldId id="256" r:id="rId11"/>
@@ -33,6 +33,9 @@
     <p:sldId id="275" r:id="rId30"/>
     <p:sldId id="276" r:id="rId31"/>
     <p:sldId id="277" r:id="rId32"/>
+    <p:sldId id="278" r:id="rId33"/>
+    <p:sldId id="279" r:id="rId34"/>
+    <p:sldId id="280" r:id="rId35"/>
   </p:sldIdLst>
   <p:sldSz cx="10972800" cy="8229600" type="B4JIS"/>
   <p:notesSz cx="7023100" cy="9309100"/>
@@ -277,7 +280,7 @@
             <a:fld id="{3B0FF3A3-17C9-1240-B94F-FCB10E11BFA2}" type="datetimeFigureOut">
               <a:rPr lang="en-US" smtClean="0"/>
               <a:pPr/>
-              <a:t>3/18/2026</a:t>
+              <a:t>3/17/26</a:t>
             </a:fld>
             <a:endParaRPr lang="en-US"/>
           </a:p>
@@ -466,7 +469,7 @@
             <a:fld id="{F1386A7A-B598-E248-8A09-616560145B06}" type="datetime1">
               <a:rPr lang="en-US"/>
               <a:pPr/>
-              <a:t>3/18/2026</a:t>
+              <a:t>3/17/26</a:t>
             </a:fld>
             <a:endParaRPr lang="en-US"/>
           </a:p>
@@ -898,7 +901,7 @@
           <a:p>
             <a:pPr marL="130622" indent="0"/>
             <a:r>
-              <a:rPr lang="en-US"/>
+              <a:rPr lang="en-US" dirty="0"/>
               <a:t> Slide text here</a:t>
             </a:r>
           </a:p>
@@ -940,6 +943,7 @@
               <a:rPr lang="en-US"/>
               <a:t>Click to edit Master title style</a:t>
             </a:r>
+            <a:endParaRPr lang="en-US" dirty="0"/>
           </a:p>
         </p:txBody>
       </p:sp>
@@ -1044,7 +1048,7 @@
             <a:lstStyle/>
             <a:p>
               <a:pPr algn="ctr"/>
-              <a:endParaRPr lang="en-US"/>
+              <a:endParaRPr lang="en-US" dirty="0"/>
             </a:p>
           </p:txBody>
         </p:sp>
@@ -1496,7 +1500,7 @@
           </a:lstStyle>
           <a:p>
             <a:r>
-              <a:rPr lang="en-US"/>
+              <a:rPr lang="en-US" dirty="0"/>
               <a:t>Click to edit Master title style</a:t>
             </a:r>
           </a:p>
@@ -2199,7 +2203,7 @@
                 </a:solidFill>
                 <a:latin typeface="Arial"/>
               </a:rPr>
-              <a:t>Version 1.1.1  -  39 plot types</a:t>
+              <a:t>Version 1.2.0  -  45 plot types</a:t>
             </a:r>
           </a:p>
           <a:p>
@@ -4362,8 +4366,8 @@
         </p:blipFill>
         <p:spPr>
           <a:xfrm>
-            <a:off x="457200" y="2143286"/>
-            <a:ext cx="10058400" cy="4217347"/>
+            <a:off x="457200" y="2052187"/>
+            <a:ext cx="10058400" cy="4399545"/>
           </a:xfrm>
           <a:prstGeom prst="rect">
             <a:avLst/>
@@ -5164,7 +5168,7 @@
         </p:nvGraphicFramePr>
         <p:xfrm>
           <a:off x="548640" y="1874520"/>
-          <a:ext cx="9875520" cy="4517136"/>
+          <a:ext cx="9875520" cy="4864608"/>
         </p:xfrm>
         <a:graphic>
           <a:graphicData uri="http://schemas.openxmlformats.org/drawingml/2006/table">
@@ -5802,7 +5806,7 @@
                           </a:solidFill>
                           <a:latin typeface="Arial"/>
                         </a:rPr>
-                        <a:t>Showing individual observations and controlling jitter</a:t>
+                        <a:t>Master replay: from an ordinary table to a reproducible multi-panel figure</a:t>
                       </a:r>
                     </a:p>
                   </a:txBody>
@@ -5846,7 +5850,7 @@
                           </a:solidFill>
                           <a:latin typeface="Arial"/>
                         </a:rPr>
-                        <a:t>20 checks, 17 captures</a:t>
+                        <a:t>48 checks, 27 captures</a:t>
                       </a:r>
                     </a:p>
                   </a:txBody>
@@ -5870,7 +5874,7 @@
                           </a:solidFill>
                           <a:latin typeface="Arial"/>
                         </a:rPr>
-                        <a:t>Publication presets: preview, apply, keep adjusting</a:t>
+                        <a:t>Showing individual observations and controlling jitter</a:t>
                       </a:r>
                     </a:p>
                   </a:txBody>
@@ -5914,7 +5918,7 @@
                           </a:solidFill>
                           <a:latin typeface="Arial"/>
                         </a:rPr>
-                        <a:t>13 checks, 9 captures</a:t>
+                        <a:t>20 checks, 17 captures</a:t>
                       </a:r>
                     </a:p>
                   </a:txBody>
@@ -5938,7 +5942,7 @@
                           </a:solidFill>
                           <a:latin typeface="Arial"/>
                         </a:rPr>
-                        <a:t>Scatter plot with regression line</a:t>
+                        <a:t>Publication presets: preview, apply, keep adjusting</a:t>
                       </a:r>
                     </a:p>
                   </a:txBody>
@@ -5982,7 +5986,7 @@
                           </a:solidFill>
                           <a:latin typeface="Arial"/>
                         </a:rPr>
-                        <a:t>6 checks, 8 captures</a:t>
+                        <a:t>13 checks, 9 captures</a:t>
                       </a:r>
                     </a:p>
                   </a:txBody>
@@ -6006,7 +6010,7 @@
                           </a:solidFill>
                           <a:latin typeface="Arial"/>
                         </a:rPr>
-                        <a:t>Volcano plot: automatic detection and manual role mapping</a:t>
+                        <a:t>Scatter plot with regression line</a:t>
                       </a:r>
                     </a:p>
                   </a:txBody>
@@ -6050,13 +6054,81 @@
                           </a:solidFill>
                           <a:latin typeface="Arial"/>
                         </a:rPr>
+                        <a:t>6 checks, 8 captures</a:t>
+                      </a:r>
+                    </a:p>
+                  </a:txBody>
+                  <a:tcPr>
+                    <a:solidFill>
+                      <a:srgbClr val="F2F4F7"/>
+                    </a:solidFill>
+                  </a:tcPr>
+                </a:tc>
+              </a:tr>
+              <a:tr h="347472">
+                <a:tc>
+                  <a:txBody>
+                    <a:bodyPr/>
+                    <a:lstStyle/>
+                    <a:p>
+                      <a:r>
+                        <a:rPr sz="1300" b="0">
+                          <a:solidFill>
+                            <a:srgbClr val="111111"/>
+                          </a:solidFill>
+                          <a:latin typeface="Arial"/>
+                        </a:rPr>
+                        <a:t>Volcano plot: automatic detection and manual role mapping</a:t>
+                      </a:r>
+                    </a:p>
+                  </a:txBody>
+                  <a:tcPr>
+                    <a:solidFill>
+                      <a:srgbClr val="FFFFFF"/>
+                    </a:solidFill>
+                  </a:tcPr>
+                </a:tc>
+                <a:tc>
+                  <a:txBody>
+                    <a:bodyPr/>
+                    <a:lstStyle/>
+                    <a:p>
+                      <a:r>
+                        <a:rPr sz="1300" b="1">
+                          <a:solidFill>
+                            <a:srgbClr val="1B7A3E"/>
+                          </a:solidFill>
+                          <a:latin typeface="Arial"/>
+                        </a:rPr>
+                        <a:t>PASS</a:t>
+                      </a:r>
+                    </a:p>
+                  </a:txBody>
+                  <a:tcPr>
+                    <a:solidFill>
+                      <a:srgbClr val="FFFFFF"/>
+                    </a:solidFill>
+                  </a:tcPr>
+                </a:tc>
+                <a:tc>
+                  <a:txBody>
+                    <a:bodyPr/>
+                    <a:lstStyle/>
+                    <a:p>
+                      <a:r>
+                        <a:rPr sz="1300" b="0">
+                          <a:solidFill>
+                            <a:srgbClr val="111111"/>
+                          </a:solidFill>
+                          <a:latin typeface="Arial"/>
+                        </a:rPr>
                         <a:t>8 checks, 10 captures</a:t>
                       </a:r>
                     </a:p>
                   </a:txBody>
                   <a:tcPr>
                     <a:solidFill>
-                      <a:srgbClr val="F2F4F7"/>
+                      <a:srgbClr val="FFFFFF"/>
                     </a:solidFill>
                   </a:tcPr>
                 </a:tc>
@@ -6383,7 +6455,7 @@
                 </a:solidFill>
                 <a:latin typeface="Arial"/>
               </a:rPr>
-              <a:t>39 plot types, one workflow</a:t>
+              <a:t>45 plot types, one workflow</a:t>
             </a:r>
           </a:p>
         </p:txBody>
@@ -6956,8 +7028,8 @@
         </p:blipFill>
         <p:spPr>
           <a:xfrm>
-            <a:off x="9244584" y="4260237"/>
-            <a:ext cx="1188720" cy="824694"/>
+            <a:off x="9244584" y="4265069"/>
+            <a:ext cx="1188720" cy="815030"/>
           </a:xfrm>
           <a:prstGeom prst="rect">
             <a:avLst/>
@@ -7324,9 +7396,33 @@
           </a:prstGeom>
         </p:spPr>
       </p:pic>
-      <p:sp>
-        <p:nvSpPr>
-          <p:cNvPr id="42" name="TextBox 41"/>
+      <p:pic>
+        <p:nvPicPr>
+          <p:cNvPr id="42" name="Picture 41" descr="spatial_categorical_map.png"/>
+          <p:cNvPicPr>
+            <a:picLocks noChangeAspect="1"/>
+          </p:cNvPicPr>
+          <p:nvPr/>
+        </p:nvPicPr>
+        <p:blipFill>
+          <a:blip r:embed="rId41"/>
+          <a:stretch>
+            <a:fillRect/>
+          </a:stretch>
+        </p:blipFill>
+        <p:spPr>
+          <a:xfrm>
+            <a:off x="9244584" y="6649336"/>
+            <a:ext cx="1188720" cy="728224"/>
+          </a:xfrm>
+          <a:prstGeom prst="rect">
+            <a:avLst/>
+          </a:prstGeom>
+        </p:spPr>
+      </p:pic>
+      <p:sp>
+        <p:nvSpPr>
+          <p:cNvPr id="43" name="TextBox 42"/>
           <p:cNvSpPr txBox="1"/>
           <p:nvPr/>
         </p:nvSpPr>
@@ -7365,7 +7461,7 @@
       </p:sp>
       <p:sp>
         <p:nvSpPr>
-          <p:cNvPr id="43" name="TextBox 42"/>
+          <p:cNvPr id="44" name="TextBox 43"/>
           <p:cNvSpPr txBox="1"/>
           <p:nvPr/>
         </p:nvSpPr>
@@ -7454,21 +7550,45 @@
                 </a:solidFill>
                 <a:latin typeface="Arial"/>
               </a:rPr>
-              <a:t>Where this goes next</a:t>
-            </a:r>
-          </a:p>
-        </p:txBody>
-      </p:sp>
-      <p:sp>
-        <p:nvSpPr>
-          <p:cNvPr id="3" name="TextBox 2"/>
+              <a:t>New in 1.2.0 - spatial analysis</a:t>
+            </a:r>
+          </a:p>
+        </p:txBody>
+      </p:sp>
+      <p:pic>
+        <p:nvPicPr>
+          <p:cNvPr id="3" name="Picture 2" descr="spatial_six.png"/>
+          <p:cNvPicPr>
+            <a:picLocks noChangeAspect="1"/>
+          </p:cNvPicPr>
+          <p:nvPr/>
+        </p:nvPicPr>
+        <p:blipFill>
+          <a:blip r:embed="rId2"/>
+          <a:stretch>
+            <a:fillRect/>
+          </a:stretch>
+        </p:blipFill>
+        <p:spPr>
+          <a:xfrm>
+            <a:off x="808074" y="1874520"/>
+            <a:ext cx="9356651" cy="5029200"/>
+          </a:xfrm>
+          <a:prstGeom prst="rect">
+            <a:avLst/>
+          </a:prstGeom>
+        </p:spPr>
+      </p:pic>
+      <p:sp>
+        <p:nvSpPr>
+          <p:cNvPr id="4" name="TextBox 3"/>
           <p:cNvSpPr txBox="1"/>
           <p:nvPr/>
         </p:nvSpPr>
         <p:spPr>
           <a:xfrm>
-            <a:off x="640080" y="1874520"/>
-            <a:ext cx="9692640" cy="5486400"/>
+            <a:off x="548640" y="7086600"/>
+            <a:ext cx="9875520" cy="731520"/>
           </a:xfrm>
           <a:prstGeom prst="rect">
             <a:avLst/>
@@ -7476,129 +7596,31 @@
           <a:noFill/>
         </p:spPr>
         <p:txBody>
-          <a:bodyPr wrap="square" lIns="45720" rIns="45720">
+          <a:bodyPr wrap="square" anchor="t" lIns="45720" rIns="45720">
             <a:spAutoFit/>
           </a:bodyPr>
           <a:lstStyle/>
           <a:p>
-            <a:pPr>
-              <a:lnSpc>
-                <a:spcPct val="108000"/>
-              </a:lnSpc>
-              <a:spcAft>
-                <a:spcPts val="900"/>
-              </a:spcAft>
+            <a:pPr algn="l">
+              <a:lnSpc>
+                <a:spcPct val="110000"/>
+              </a:lnSpc>
             </a:pPr>
             <a:r>
               <a:rPr sz="1900" b="1">
                 <a:solidFill>
-                  <a:srgbClr val="111111"/>
-                </a:solidFill>
-                <a:latin typeface="Arial"/>
-              </a:rPr>
-              <a:t>• Reviewed and rebuilt</a:t>
-            </a:r>
-          </a:p>
-          <a:p>
-            <a:pPr lvl="1">
-              <a:lnSpc>
-                <a:spcPct val="108000"/>
-              </a:lnSpc>
-              <a:spcAft>
-                <a:spcPts val="900"/>
-              </a:spcAft>
-            </a:pPr>
-            <a:r>
-              <a:rPr sz="1700" b="0">
-                <a:solidFill>
                   <a:srgbClr val="1F2937"/>
                 </a:solidFill>
                 <a:latin typeface="Arial"/>
               </a:rPr>
-              <a:t>– tutorial and slides re-evaluated as visual demonstrations; observations, jitter and publication presets shown at readable size</a:t>
-            </a:r>
-          </a:p>
-          <a:p>
-            <a:pPr>
-              <a:lnSpc>
-                <a:spcPct val="108000"/>
-              </a:lnSpc>
-              <a:spcAft>
-                <a:spcPts val="900"/>
-              </a:spcAft>
-            </a:pPr>
-            <a:r>
-              <a:rPr sz="1900" b="1">
-                <a:solidFill>
-                  <a:srgbClr val="111111"/>
-                </a:solidFill>
-                <a:latin typeface="Arial"/>
-              </a:rPr>
-              <a:t>• After author review</a:t>
-            </a:r>
-          </a:p>
-          <a:p>
-            <a:pPr lvl="1">
-              <a:lnSpc>
-                <a:spcPct val="108000"/>
-              </a:lnSpc>
-              <a:spcAft>
-                <a:spcPts val="900"/>
-              </a:spcAft>
-            </a:pPr>
-            <a:r>
-              <a:rPr sz="1700" b="0">
-                <a:solidFill>
-                  <a:srgbClr val="1F2937"/>
-                </a:solidFill>
-                <a:latin typeface="Arial"/>
-              </a:rPr>
-              <a:t>– remaining plot tutorials with the same template; matrix workflow tutorial and video; master and plot videos recorded live</a:t>
-            </a:r>
-          </a:p>
-          <a:p>
-            <a:pPr lvl="1">
-              <a:lnSpc>
-                <a:spcPct val="108000"/>
-              </a:lnSpc>
-              <a:spcAft>
-                <a:spcPts val="900"/>
-              </a:spcAft>
-            </a:pPr>
-            <a:r>
-              <a:rPr sz="1700" b="0">
-                <a:solidFill>
-                  <a:srgbClr val="1F2937"/>
-                </a:solidFill>
-                <a:latin typeface="Arial"/>
-              </a:rPr>
-              <a:t>– decision whether the presets branch (observation controls, experimental presets) is merged - without it these chapters cannot ship</a:t>
-            </a:r>
-          </a:p>
-          <a:p>
-            <a:pPr>
-              <a:lnSpc>
-                <a:spcPct val="108000"/>
-              </a:lnSpc>
-              <a:spcAft>
-                <a:spcPts val="900"/>
-              </a:spcAft>
-            </a:pPr>
-            <a:r>
-              <a:rPr sz="1900" b="1">
-                <a:solidFill>
-                  <a:srgbClr val="111111"/>
-                </a:solidFill>
-                <a:latin typeface="Arial"/>
-              </a:rPr>
-              <a:t>• Not merged, tagged, released, published or pushed</a:t>
-            </a:r>
-          </a:p>
-        </p:txBody>
-      </p:sp>
-      <p:sp>
-        <p:nvSpPr>
-          <p:cNvPr id="4" name="TextBox 3"/>
+              <a:t>Six plot types on one spatial core. Checked against published results, not against itself: CNTools Fig 3A reproduced exactly, and again by a hand-check importing no project code.</a:t>
+            </a:r>
+          </a:p>
+        </p:txBody>
+      </p:sp>
+      <p:sp>
+        <p:nvSpPr>
+          <p:cNvPr id="5" name="TextBox 4"/>
           <p:cNvSpPr txBox="1"/>
           <p:nvPr/>
         </p:nvSpPr>
@@ -7687,7 +7709,166 @@
                 </a:solidFill>
                 <a:latin typeface="Arial"/>
               </a:rPr>
-              <a:t>Summary</a:t>
+              <a:t>New in 1.2.0 - the width you ask for is the width you get</a:t>
+            </a:r>
+          </a:p>
+        </p:txBody>
+      </p:sp>
+      <p:pic>
+        <p:nvPicPr>
+          <p:cNvPr id="3" name="Picture 2" descr="width_is_final.png"/>
+          <p:cNvPicPr>
+            <a:picLocks noChangeAspect="1"/>
+          </p:cNvPicPr>
+          <p:nvPr/>
+        </p:nvPicPr>
+        <p:blipFill>
+          <a:blip r:embed="rId2"/>
+          <a:stretch>
+            <a:fillRect/>
+          </a:stretch>
+        </p:blipFill>
+        <p:spPr>
+          <a:xfrm>
+            <a:off x="640080" y="1874520"/>
+            <a:ext cx="9692640" cy="4846320"/>
+          </a:xfrm>
+          <a:prstGeom prst="rect">
+            <a:avLst/>
+          </a:prstGeom>
+        </p:spPr>
+      </p:pic>
+      <p:sp>
+        <p:nvSpPr>
+          <p:cNvPr id="4" name="TextBox 3"/>
+          <p:cNvSpPr txBox="1"/>
+          <p:nvPr/>
+        </p:nvSpPr>
+        <p:spPr>
+          <a:xfrm>
+            <a:off x="548640" y="6949440"/>
+            <a:ext cx="9875520" cy="731520"/>
+          </a:xfrm>
+          <a:prstGeom prst="rect">
+            <a:avLst/>
+          </a:prstGeom>
+          <a:noFill/>
+        </p:spPr>
+        <p:txBody>
+          <a:bodyPr wrap="square" anchor="t" lIns="45720" rIns="45720">
+            <a:spAutoFit/>
+          </a:bodyPr>
+          <a:lstStyle/>
+          <a:p>
+            <a:pPr algn="l">
+              <a:lnSpc>
+                <a:spcPct val="110000"/>
+              </a:lnSpc>
+            </a:pPr>
+            <a:r>
+              <a:rPr sz="1900" b="1">
+                <a:solidFill>
+                  <a:srgbClr val="1F2937"/>
+                </a:solidFill>
+                <a:latin typeface="Arial"/>
+              </a:rPr>
+              <a:t>Three layers used to overrule a requested width - a network graph returned 132 mm whatever you picked. All 45 plot types now honour all five settings exactly.</a:t>
+            </a:r>
+          </a:p>
+        </p:txBody>
+      </p:sp>
+      <p:sp>
+        <p:nvSpPr>
+          <p:cNvPr id="5" name="TextBox 4"/>
+          <p:cNvSpPr txBox="1"/>
+          <p:nvPr/>
+        </p:nvSpPr>
+        <p:spPr>
+          <a:xfrm>
+            <a:off x="457200" y="7818120"/>
+            <a:ext cx="7315200" cy="274320"/>
+          </a:xfrm>
+          <a:prstGeom prst="rect">
+            <a:avLst/>
+          </a:prstGeom>
+          <a:noFill/>
+        </p:spPr>
+        <p:txBody>
+          <a:bodyPr wrap="square" anchor="t" lIns="45720" rIns="45720">
+            <a:spAutoFit/>
+          </a:bodyPr>
+          <a:lstStyle/>
+          <a:p>
+            <a:pPr algn="l">
+              <a:lnSpc>
+                <a:spcPct val="110000"/>
+              </a:lnSpc>
+            </a:pPr>
+            <a:r>
+              <a:rPr sz="1000" b="0">
+                <a:solidFill>
+                  <a:srgbClr val="666666"/>
+                </a:solidFill>
+                <a:latin typeface="Arial"/>
+              </a:rPr>
+              <a:t>Make My Figure - desktop tutorial   |   22</a:t>
+            </a:r>
+          </a:p>
+        </p:txBody>
+      </p:sp>
+    </p:spTree>
+  </p:cSld>
+  <p:clrMapOvr>
+    <a:masterClrMapping/>
+  </p:clrMapOvr>
+</p:sld>
+</file>
+
+<file path=ppt/slides/slide23.xml><?xml version="1.0" encoding="utf-8"?>
+<p:sld xmlns:a="http://schemas.openxmlformats.org/drawingml/2006/main" xmlns:p="http://schemas.openxmlformats.org/presentationml/2006/main" xmlns:r="http://schemas.openxmlformats.org/officeDocument/2006/relationships">
+  <p:cSld>
+    <p:spTree>
+      <p:nvGrpSpPr>
+        <p:cNvPr id="1" name=""/>
+        <p:cNvGrpSpPr/>
+        <p:nvPr/>
+      </p:nvGrpSpPr>
+      <p:grpSpPr/>
+      <p:sp>
+        <p:nvSpPr>
+          <p:cNvPr id="2" name="TextBox 1"/>
+          <p:cNvSpPr txBox="1"/>
+          <p:nvPr/>
+        </p:nvSpPr>
+        <p:spPr>
+          <a:xfrm>
+            <a:off x="1691640" y="384048"/>
+            <a:ext cx="8869680" cy="1005840"/>
+          </a:xfrm>
+          <a:prstGeom prst="rect">
+            <a:avLst/>
+          </a:prstGeom>
+          <a:noFill/>
+        </p:spPr>
+        <p:txBody>
+          <a:bodyPr wrap="square" anchor="ctr" lIns="45720" rIns="45720">
+            <a:spAutoFit/>
+          </a:bodyPr>
+          <a:lstStyle/>
+          <a:p>
+            <a:pPr algn="l">
+              <a:lnSpc>
+                <a:spcPct val="110000"/>
+              </a:lnSpc>
+            </a:pPr>
+            <a:r>
+              <a:rPr sz="2800" b="1">
+                <a:solidFill>
+                  <a:srgbClr val="1F2937"/>
+                </a:solidFill>
+                <a:latin typeface="Arial"/>
+              </a:rPr>
+              <a:t>New in 1.2.0 - what else changed</a:t>
             </a:r>
           </a:p>
         </p:txBody>
@@ -7701,7 +7882,7 @@
         <p:spPr>
           <a:xfrm>
             <a:off x="640080" y="1874520"/>
-            <a:ext cx="9692640" cy="4754880"/>
+            <a:ext cx="9692640" cy="4937760"/>
           </a:xfrm>
           <a:prstGeom prst="rect">
             <a:avLst/>
@@ -7719,17 +7900,36 @@
                 <a:spcPct val="108000"/>
               </a:lnSpc>
               <a:spcAft>
-                <a:spcPts val="900"/>
+                <a:spcPts val="700"/>
               </a:spcAft>
             </a:pPr>
             <a:r>
-              <a:rPr sz="1900" b="0">
+              <a:rPr sz="1700" b="1">
                 <a:solidFill>
                   <a:srgbClr val="111111"/>
                 </a:solidFill>
                 <a:latin typeface="Arial"/>
               </a:rPr>
-              <a:t>• Open any table; the application detects, recommends and proposes - and you assign every role yourself</a:t>
+              <a:t>• One typography system</a:t>
+            </a:r>
+          </a:p>
+          <a:p>
+            <a:pPr lvl="1">
+              <a:lnSpc>
+                <a:spcPct val="108000"/>
+              </a:lnSpc>
+              <a:spcAft>
+                <a:spcPts val="700"/>
+              </a:spcAft>
+            </a:pPr>
+            <a:r>
+              <a:rPr sz="1500" b="0">
+                <a:solidFill>
+                  <a:srgbClr val="1F2937"/>
+                </a:solidFill>
+                <a:latin typeface="Arial"/>
+              </a:rPr>
+              <a:t>– one font setting gives one size on the page - four panels of one figure used to come out at 69%, 71%, 98% and 66% of the size asked for</a:t>
             </a:r>
           </a:p>
           <a:p>
@@ -7738,17 +7938,36 @@
                 <a:spcPct val="108000"/>
               </a:lnSpc>
               <a:spcAft>
-                <a:spcPts val="900"/>
+                <a:spcPts val="700"/>
               </a:spcAft>
             </a:pPr>
             <a:r>
-              <a:rPr sz="1900" b="0">
+              <a:rPr sz="1700" b="1">
                 <a:solidFill>
                   <a:srgbClr val="111111"/>
                 </a:solidFill>
                 <a:latin typeface="Arial"/>
               </a:rPr>
-              <a:t>• One dataset, many controlled representations: summary plus every observation, with the test on the figure</a:t>
+              <a:t>• Error bars say which statistic they are</a:t>
+            </a:r>
+          </a:p>
+          <a:p>
+            <a:pPr lvl="1">
+              <a:lnSpc>
+                <a:spcPct val="108000"/>
+              </a:lnSpc>
+              <a:spcAft>
+                <a:spcPts val="700"/>
+              </a:spcAft>
+            </a:pPr>
+            <a:r>
+              <a:rPr sz="1500" b="0">
+                <a:solidFill>
+                  <a:srgbClr val="1F2937"/>
+                </a:solidFill>
+                <a:latin typeface="Arial"/>
+              </a:rPr>
+              <a:t>– SEM, SD, 95% CI (normal and t), IQR - and a whisker that does not describe its bar is corrected and reported, not drawn as though it were intended</a:t>
             </a:r>
           </a:p>
           <a:p>
@@ -7757,17 +7976,36 @@
                 <a:spcPct val="108000"/>
               </a:lnSpc>
               <a:spcAft>
-                <a:spcPts val="900"/>
+                <a:spcPts val="700"/>
               </a:spcAft>
             </a:pPr>
             <a:r>
-              <a:rPr sz="1900" b="0">
+              <a:rPr sz="1700" b="1">
                 <a:solidFill>
                   <a:srgbClr val="111111"/>
                 </a:solidFill>
                 <a:latin typeface="Arial"/>
               </a:rPr>
-              <a:t>• Publication presets are previewed on your data and remain a starting point</a:t>
+              <a:t>• The clustered heatmap's cluster bars got the colourbar's controls</a:t>
+            </a:r>
+          </a:p>
+          <a:p>
+            <a:pPr lvl="1">
+              <a:lnSpc>
+                <a:spcPct val="108000"/>
+              </a:lnSpc>
+              <a:spcAft>
+                <a:spcPts val="700"/>
+              </a:spcAft>
+            </a:pPr>
+            <a:r>
+              <a:rPr sz="1500" b="0">
+                <a:solidFill>
+                  <a:srgbClr val="1F2937"/>
+                </a:solidFill>
+                <a:latin typeface="Arial"/>
+              </a:rPr>
+              <a:t>– thickness, padding, side, labels, palette, legend placement, and separators between groups</a:t>
             </a:r>
           </a:p>
           <a:p>
@@ -7776,17 +8014,36 @@
                 <a:spcPct val="108000"/>
               </a:lnSpc>
               <a:spcAft>
-                <a:spcPts val="900"/>
+                <a:spcPts val="700"/>
               </a:spcAft>
             </a:pPr>
             <a:r>
-              <a:rPr sz="1900" b="0">
+              <a:rPr sz="1700" b="1">
                 <a:solidFill>
                   <a:srgbClr val="111111"/>
                 </a:solidFill>
                 <a:latin typeface="Arial"/>
               </a:rPr>
-              <a:t>• PlotSpec carries the recipe; a Figure Package carries recipe and ingredients, verified</a:t>
+              <a:t>• Every render is reproducible</a:t>
+            </a:r>
+          </a:p>
+          <a:p>
+            <a:pPr lvl="1">
+              <a:lnSpc>
+                <a:spcPct val="108000"/>
+              </a:lnSpc>
+              <a:spcAft>
+                <a:spcPts val="700"/>
+              </a:spcAft>
+            </a:pPr>
+            <a:r>
+              <a:rPr sz="1500" b="0">
+                <a:solidFill>
+                  <a:srgbClr val="1F2937"/>
+                </a:solidFill>
+                <a:latin typeface="Arial"/>
+              </a:rPr>
+              <a:t>– three plot types drew a different figure on each run from identical input; the label solver was given a wall-clock budget and now gets a fixed number of passes</a:t>
             </a:r>
           </a:p>
           <a:p>
@@ -7795,17 +8052,36 @@
                 <a:spcPct val="108000"/>
               </a:lnSpc>
               <a:spcAft>
-                <a:spcPts val="900"/>
+                <a:spcPts val="700"/>
               </a:spcAft>
             </a:pPr>
             <a:r>
-              <a:rPr sz="1900" b="0">
+              <a:rPr sz="1700" b="1">
                 <a:solidFill>
                   <a:srgbClr val="111111"/>
                 </a:solidFill>
                 <a:latin typeface="Arial"/>
               </a:rPr>
-              <a:t>• The tutorial is generated from the real application and validated by running it</a:t>
+              <a:t>• Every control on every plot type was exercised by measuring the output</a:t>
+            </a:r>
+          </a:p>
+          <a:p>
+            <a:pPr lvl="1">
+              <a:lnSpc>
+                <a:spcPct val="108000"/>
+              </a:lnSpc>
+              <a:spcAft>
+                <a:spcPts val="700"/>
+              </a:spcAft>
+            </a:pPr>
+            <a:r>
+              <a:rPr sz="1500" b="0">
+                <a:solidFill>
+                  <a:srgbClr val="1F2937"/>
+                </a:solidFill>
+                <a:latin typeface="Arial"/>
+              </a:rPr>
+              <a:t>– 1,689 controls; the ones that changed nothing were fixed</a:t>
             </a:r>
           </a:p>
         </p:txBody>
@@ -7818,8 +8094,8 @@
         </p:nvSpPr>
         <p:spPr>
           <a:xfrm>
-            <a:off x="640080" y="6583680"/>
-            <a:ext cx="9692640" cy="914400"/>
+            <a:off x="548640" y="7178040"/>
+            <a:ext cx="9875520" cy="731520"/>
           </a:xfrm>
           <a:prstGeom prst="rect">
             <a:avLst/>
@@ -7838,13 +8114,13 @@
               </a:lnSpc>
             </a:pPr>
             <a:r>
-              <a:rPr sz="1500" b="0">
-                <a:solidFill>
-                  <a:srgbClr val="666666"/>
-                </a:solidFill>
-                <a:latin typeface="Arial"/>
-              </a:rPr>
-              <a:t>github.com/surPoudel/make-my-figure  -  tutorial/ on the pilot branch (not yet published)</a:t>
+              <a:rPr sz="1700" b="1">
+                <a:solidFill>
+                  <a:srgbClr val="1F2937"/>
+                </a:solidFill>
+                <a:latin typeface="Arial"/>
+              </a:rPr>
+              <a:t>Experimental publication presets ship opt-in and off by default. They are not journal templates and claim no compliance, endorsement or acceptance.</a:t>
             </a:r>
           </a:p>
         </p:txBody>
@@ -7883,7 +8159,531 @@
                 </a:solidFill>
                 <a:latin typeface="Arial"/>
               </a:rPr>
-              <a:t>Make My Figure - desktop tutorial   |   22</a:t>
+              <a:t>Make My Figure - desktop tutorial   |   23</a:t>
+            </a:r>
+          </a:p>
+        </p:txBody>
+      </p:sp>
+    </p:spTree>
+  </p:cSld>
+  <p:clrMapOvr>
+    <a:masterClrMapping/>
+  </p:clrMapOvr>
+</p:sld>
+</file>
+
+<file path=ppt/slides/slide24.xml><?xml version="1.0" encoding="utf-8"?>
+<p:sld xmlns:a="http://schemas.openxmlformats.org/drawingml/2006/main" xmlns:p="http://schemas.openxmlformats.org/presentationml/2006/main" xmlns:r="http://schemas.openxmlformats.org/officeDocument/2006/relationships">
+  <p:cSld>
+    <p:spTree>
+      <p:nvGrpSpPr>
+        <p:cNvPr id="1" name=""/>
+        <p:cNvGrpSpPr/>
+        <p:nvPr/>
+      </p:nvGrpSpPr>
+      <p:grpSpPr/>
+      <p:sp>
+        <p:nvSpPr>
+          <p:cNvPr id="2" name="TextBox 1"/>
+          <p:cNvSpPr txBox="1"/>
+          <p:nvPr/>
+        </p:nvSpPr>
+        <p:spPr>
+          <a:xfrm>
+            <a:off x="1691640" y="384048"/>
+            <a:ext cx="8869680" cy="1005840"/>
+          </a:xfrm>
+          <a:prstGeom prst="rect">
+            <a:avLst/>
+          </a:prstGeom>
+          <a:noFill/>
+        </p:spPr>
+        <p:txBody>
+          <a:bodyPr wrap="square" anchor="ctr" lIns="45720" rIns="45720">
+            <a:spAutoFit/>
+          </a:bodyPr>
+          <a:lstStyle/>
+          <a:p>
+            <a:pPr algn="l">
+              <a:lnSpc>
+                <a:spcPct val="110000"/>
+              </a:lnSpc>
+            </a:pPr>
+            <a:r>
+              <a:rPr sz="2800" b="1">
+                <a:solidFill>
+                  <a:srgbClr val="1F2937"/>
+                </a:solidFill>
+                <a:latin typeface="Arial"/>
+              </a:rPr>
+              <a:t>Where this goes next</a:t>
+            </a:r>
+          </a:p>
+        </p:txBody>
+      </p:sp>
+      <p:sp>
+        <p:nvSpPr>
+          <p:cNvPr id="3" name="TextBox 2"/>
+          <p:cNvSpPr txBox="1"/>
+          <p:nvPr/>
+        </p:nvSpPr>
+        <p:spPr>
+          <a:xfrm>
+            <a:off x="640080" y="1874520"/>
+            <a:ext cx="9692640" cy="5486400"/>
+          </a:xfrm>
+          <a:prstGeom prst="rect">
+            <a:avLst/>
+          </a:prstGeom>
+          <a:noFill/>
+        </p:spPr>
+        <p:txBody>
+          <a:bodyPr wrap="square" lIns="45720" rIns="45720">
+            <a:spAutoFit/>
+          </a:bodyPr>
+          <a:lstStyle/>
+          <a:p>
+            <a:pPr>
+              <a:lnSpc>
+                <a:spcPct val="108000"/>
+              </a:lnSpc>
+              <a:spcAft>
+                <a:spcPts val="900"/>
+              </a:spcAft>
+            </a:pPr>
+            <a:r>
+              <a:rPr sz="1900" b="1">
+                <a:solidFill>
+                  <a:srgbClr val="111111"/>
+                </a:solidFill>
+                <a:latin typeface="Arial"/>
+              </a:rPr>
+              <a:t>• Reviewed and rebuilt</a:t>
+            </a:r>
+          </a:p>
+          <a:p>
+            <a:pPr lvl="1">
+              <a:lnSpc>
+                <a:spcPct val="108000"/>
+              </a:lnSpc>
+              <a:spcAft>
+                <a:spcPts val="900"/>
+              </a:spcAft>
+            </a:pPr>
+            <a:r>
+              <a:rPr sz="1700" b="0">
+                <a:solidFill>
+                  <a:srgbClr val="1F2937"/>
+                </a:solidFill>
+                <a:latin typeface="Arial"/>
+              </a:rPr>
+              <a:t>– tutorial and slides re-evaluated as visual demonstrations; observations, jitter and publication presets shown at readable size</a:t>
+            </a:r>
+          </a:p>
+          <a:p>
+            <a:pPr>
+              <a:lnSpc>
+                <a:spcPct val="108000"/>
+              </a:lnSpc>
+              <a:spcAft>
+                <a:spcPts val="900"/>
+              </a:spcAft>
+            </a:pPr>
+            <a:r>
+              <a:rPr sz="1900" b="1">
+                <a:solidFill>
+                  <a:srgbClr val="111111"/>
+                </a:solidFill>
+                <a:latin typeface="Arial"/>
+              </a:rPr>
+              <a:t>• After author review</a:t>
+            </a:r>
+          </a:p>
+          <a:p>
+            <a:pPr lvl="1">
+              <a:lnSpc>
+                <a:spcPct val="108000"/>
+              </a:lnSpc>
+              <a:spcAft>
+                <a:spcPts val="900"/>
+              </a:spcAft>
+            </a:pPr>
+            <a:r>
+              <a:rPr sz="1700" b="0">
+                <a:solidFill>
+                  <a:srgbClr val="1F2937"/>
+                </a:solidFill>
+                <a:latin typeface="Arial"/>
+              </a:rPr>
+              <a:t>– remaining plot tutorials with the same template; matrix workflow tutorial and video; master and plot videos recorded live</a:t>
+            </a:r>
+          </a:p>
+          <a:p>
+            <a:pPr>
+              <a:lnSpc>
+                <a:spcPct val="108000"/>
+              </a:lnSpc>
+              <a:spcAft>
+                <a:spcPts val="900"/>
+              </a:spcAft>
+            </a:pPr>
+            <a:r>
+              <a:rPr sz="1900" b="1">
+                <a:solidFill>
+                  <a:srgbClr val="111111"/>
+                </a:solidFill>
+                <a:latin typeface="Arial"/>
+              </a:rPr>
+              <a:t>• Released as v1.2.0</a:t>
+            </a:r>
+          </a:p>
+          <a:p>
+            <a:pPr lvl="1">
+              <a:lnSpc>
+                <a:spcPct val="108000"/>
+              </a:lnSpc>
+              <a:spcAft>
+                <a:spcPts val="900"/>
+              </a:spcAft>
+            </a:pPr>
+            <a:r>
+              <a:rPr sz="1700" b="0">
+                <a:solidFill>
+                  <a:srgbClr val="1F2937"/>
+                </a:solidFill>
+                <a:latin typeface="Arial"/>
+              </a:rPr>
+              <a:t>– the observation controls and the experimental presets were merged and released, so these chapters ship</a:t>
+            </a:r>
+          </a:p>
+          <a:p>
+            <a:pPr lvl="1">
+              <a:lnSpc>
+                <a:spcPct val="108000"/>
+              </a:lnSpc>
+              <a:spcAft>
+                <a:spcPts val="900"/>
+              </a:spcAft>
+            </a:pPr>
+            <a:r>
+              <a:rPr sz="1700" b="0">
+                <a:solidFill>
+                  <a:srgbClr val="1F2937"/>
+                </a:solidFill>
+                <a:latin typeface="Arial"/>
+              </a:rPr>
+              <a:t>– built on Windows, macOS and Linux from one commit, each smoke-tested on its own runner; Windows and macOS were not validated interactively by a person</a:t>
+            </a:r>
+          </a:p>
+          <a:p>
+            <a:pPr>
+              <a:lnSpc>
+                <a:spcPct val="108000"/>
+              </a:lnSpc>
+              <a:spcAft>
+                <a:spcPts val="900"/>
+              </a:spcAft>
+            </a:pPr>
+            <a:r>
+              <a:rPr sz="1900" b="1">
+                <a:solidFill>
+                  <a:srgbClr val="111111"/>
+                </a:solidFill>
+                <a:latin typeface="Arial"/>
+              </a:rPr>
+              <a:t>• This tutorial branch is not merged into main</a:t>
+            </a:r>
+          </a:p>
+        </p:txBody>
+      </p:sp>
+      <p:sp>
+        <p:nvSpPr>
+          <p:cNvPr id="4" name="TextBox 3"/>
+          <p:cNvSpPr txBox="1"/>
+          <p:nvPr/>
+        </p:nvSpPr>
+        <p:spPr>
+          <a:xfrm>
+            <a:off x="457200" y="7818120"/>
+            <a:ext cx="7315200" cy="274320"/>
+          </a:xfrm>
+          <a:prstGeom prst="rect">
+            <a:avLst/>
+          </a:prstGeom>
+          <a:noFill/>
+        </p:spPr>
+        <p:txBody>
+          <a:bodyPr wrap="square" anchor="t" lIns="45720" rIns="45720">
+            <a:spAutoFit/>
+          </a:bodyPr>
+          <a:lstStyle/>
+          <a:p>
+            <a:pPr algn="l">
+              <a:lnSpc>
+                <a:spcPct val="110000"/>
+              </a:lnSpc>
+            </a:pPr>
+            <a:r>
+              <a:rPr sz="1000" b="0">
+                <a:solidFill>
+                  <a:srgbClr val="666666"/>
+                </a:solidFill>
+                <a:latin typeface="Arial"/>
+              </a:rPr>
+              <a:t>Make My Figure - desktop tutorial   |   24</a:t>
+            </a:r>
+          </a:p>
+        </p:txBody>
+      </p:sp>
+    </p:spTree>
+  </p:cSld>
+  <p:clrMapOvr>
+    <a:masterClrMapping/>
+  </p:clrMapOvr>
+</p:sld>
+</file>
+
+<file path=ppt/slides/slide25.xml><?xml version="1.0" encoding="utf-8"?>
+<p:sld xmlns:a="http://schemas.openxmlformats.org/drawingml/2006/main" xmlns:p="http://schemas.openxmlformats.org/presentationml/2006/main" xmlns:r="http://schemas.openxmlformats.org/officeDocument/2006/relationships">
+  <p:cSld>
+    <p:spTree>
+      <p:nvGrpSpPr>
+        <p:cNvPr id="1" name=""/>
+        <p:cNvGrpSpPr/>
+        <p:nvPr/>
+      </p:nvGrpSpPr>
+      <p:grpSpPr/>
+      <p:sp>
+        <p:nvSpPr>
+          <p:cNvPr id="2" name="TextBox 1"/>
+          <p:cNvSpPr txBox="1"/>
+          <p:nvPr/>
+        </p:nvSpPr>
+        <p:spPr>
+          <a:xfrm>
+            <a:off x="1691640" y="384048"/>
+            <a:ext cx="8869680" cy="1005840"/>
+          </a:xfrm>
+          <a:prstGeom prst="rect">
+            <a:avLst/>
+          </a:prstGeom>
+          <a:noFill/>
+        </p:spPr>
+        <p:txBody>
+          <a:bodyPr wrap="square" anchor="ctr" lIns="45720" rIns="45720">
+            <a:spAutoFit/>
+          </a:bodyPr>
+          <a:lstStyle/>
+          <a:p>
+            <a:pPr algn="l">
+              <a:lnSpc>
+                <a:spcPct val="110000"/>
+              </a:lnSpc>
+            </a:pPr>
+            <a:r>
+              <a:rPr sz="2800" b="1">
+                <a:solidFill>
+                  <a:srgbClr val="1F2937"/>
+                </a:solidFill>
+                <a:latin typeface="Arial"/>
+              </a:rPr>
+              <a:t>Summary</a:t>
+            </a:r>
+          </a:p>
+        </p:txBody>
+      </p:sp>
+      <p:sp>
+        <p:nvSpPr>
+          <p:cNvPr id="3" name="TextBox 2"/>
+          <p:cNvSpPr txBox="1"/>
+          <p:nvPr/>
+        </p:nvSpPr>
+        <p:spPr>
+          <a:xfrm>
+            <a:off x="640080" y="1874520"/>
+            <a:ext cx="9692640" cy="4754880"/>
+          </a:xfrm>
+          <a:prstGeom prst="rect">
+            <a:avLst/>
+          </a:prstGeom>
+          <a:noFill/>
+        </p:spPr>
+        <p:txBody>
+          <a:bodyPr wrap="square" lIns="45720" rIns="45720">
+            <a:spAutoFit/>
+          </a:bodyPr>
+          <a:lstStyle/>
+          <a:p>
+            <a:pPr>
+              <a:lnSpc>
+                <a:spcPct val="108000"/>
+              </a:lnSpc>
+              <a:spcAft>
+                <a:spcPts val="900"/>
+              </a:spcAft>
+            </a:pPr>
+            <a:r>
+              <a:rPr sz="1900" b="0">
+                <a:solidFill>
+                  <a:srgbClr val="111111"/>
+                </a:solidFill>
+                <a:latin typeface="Arial"/>
+              </a:rPr>
+              <a:t>• Open any table; the application detects, recommends and proposes - and you assign every role yourself</a:t>
+            </a:r>
+          </a:p>
+          <a:p>
+            <a:pPr>
+              <a:lnSpc>
+                <a:spcPct val="108000"/>
+              </a:lnSpc>
+              <a:spcAft>
+                <a:spcPts val="900"/>
+              </a:spcAft>
+            </a:pPr>
+            <a:r>
+              <a:rPr sz="1900" b="0">
+                <a:solidFill>
+                  <a:srgbClr val="111111"/>
+                </a:solidFill>
+                <a:latin typeface="Arial"/>
+              </a:rPr>
+              <a:t>• One dataset, many controlled representations: summary plus every observation, with the test on the figure</a:t>
+            </a:r>
+          </a:p>
+          <a:p>
+            <a:pPr>
+              <a:lnSpc>
+                <a:spcPct val="108000"/>
+              </a:lnSpc>
+              <a:spcAft>
+                <a:spcPts val="900"/>
+              </a:spcAft>
+            </a:pPr>
+            <a:r>
+              <a:rPr sz="1900" b="0">
+                <a:solidFill>
+                  <a:srgbClr val="111111"/>
+                </a:solidFill>
+                <a:latin typeface="Arial"/>
+              </a:rPr>
+              <a:t>• Publication presets are previewed on your data and remain a starting point</a:t>
+            </a:r>
+          </a:p>
+          <a:p>
+            <a:pPr>
+              <a:lnSpc>
+                <a:spcPct val="108000"/>
+              </a:lnSpc>
+              <a:spcAft>
+                <a:spcPts val="900"/>
+              </a:spcAft>
+            </a:pPr>
+            <a:r>
+              <a:rPr sz="1900" b="0">
+                <a:solidFill>
+                  <a:srgbClr val="111111"/>
+                </a:solidFill>
+                <a:latin typeface="Arial"/>
+              </a:rPr>
+              <a:t>• PlotSpec carries the recipe; a Figure Package carries recipe and ingredients, verified</a:t>
+            </a:r>
+          </a:p>
+          <a:p>
+            <a:pPr>
+              <a:lnSpc>
+                <a:spcPct val="108000"/>
+              </a:lnSpc>
+              <a:spcAft>
+                <a:spcPts val="900"/>
+              </a:spcAft>
+            </a:pPr>
+            <a:r>
+              <a:rPr sz="1900" b="0">
+                <a:solidFill>
+                  <a:srgbClr val="111111"/>
+                </a:solidFill>
+                <a:latin typeface="Arial"/>
+              </a:rPr>
+              <a:t>• The tutorial is generated from the real application and validated by running it</a:t>
+            </a:r>
+          </a:p>
+        </p:txBody>
+      </p:sp>
+      <p:sp>
+        <p:nvSpPr>
+          <p:cNvPr id="4" name="TextBox 3"/>
+          <p:cNvSpPr txBox="1"/>
+          <p:nvPr/>
+        </p:nvSpPr>
+        <p:spPr>
+          <a:xfrm>
+            <a:off x="640080" y="6583680"/>
+            <a:ext cx="9692640" cy="914400"/>
+          </a:xfrm>
+          <a:prstGeom prst="rect">
+            <a:avLst/>
+          </a:prstGeom>
+          <a:noFill/>
+        </p:spPr>
+        <p:txBody>
+          <a:bodyPr wrap="square" anchor="t" lIns="45720" rIns="45720">
+            <a:spAutoFit/>
+          </a:bodyPr>
+          <a:lstStyle/>
+          <a:p>
+            <a:pPr algn="l">
+              <a:lnSpc>
+                <a:spcPct val="110000"/>
+              </a:lnSpc>
+            </a:pPr>
+            <a:r>
+              <a:rPr sz="1500" b="0">
+                <a:solidFill>
+                  <a:srgbClr val="666666"/>
+                </a:solidFill>
+                <a:latin typeface="Arial"/>
+              </a:rPr>
+              <a:t>github.com/surPoudel/make-my-figure  -  tutorial/ on the pilot branch (not yet published)</a:t>
+            </a:r>
+          </a:p>
+        </p:txBody>
+      </p:sp>
+      <p:sp>
+        <p:nvSpPr>
+          <p:cNvPr id="5" name="TextBox 4"/>
+          <p:cNvSpPr txBox="1"/>
+          <p:nvPr/>
+        </p:nvSpPr>
+        <p:spPr>
+          <a:xfrm>
+            <a:off x="457200" y="7818120"/>
+            <a:ext cx="7315200" cy="274320"/>
+          </a:xfrm>
+          <a:prstGeom prst="rect">
+            <a:avLst/>
+          </a:prstGeom>
+          <a:noFill/>
+        </p:spPr>
+        <p:txBody>
+          <a:bodyPr wrap="square" anchor="t" lIns="45720" rIns="45720">
+            <a:spAutoFit/>
+          </a:bodyPr>
+          <a:lstStyle/>
+          <a:p>
+            <a:pPr algn="l">
+              <a:lnSpc>
+                <a:spcPct val="110000"/>
+              </a:lnSpc>
+            </a:pPr>
+            <a:r>
+              <a:rPr sz="1000" b="0">
+                <a:solidFill>
+                  <a:srgbClr val="666666"/>
+                </a:solidFill>
+                <a:latin typeface="Arial"/>
+              </a:rPr>
+              <a:t>Make My Figure - desktop tutorial   |   25</a:t>
             </a:r>
           </a:p>
         </p:txBody>
@@ -7982,7 +8782,7 @@
                 </a:solidFill>
                 <a:latin typeface="Arial"/>
               </a:rPr>
-              <a:t>• A desktop application (and a browser version) that draws 39 publication-style plot types from CSV, TSV and Excel tables</a:t>
+              <a:t>• A desktop application (and a browser version) that draws 45 publication-style plot types from CSV, TSV and Excel tables</a:t>
             </a:r>
           </a:p>
           <a:p>
@@ -11485,6 +12285,24 @@
 </file>
 
 <file path=customXml/item1.xml><?xml version="1.0" encoding="utf-8"?>
+<p:properties xmlns:p="http://schemas.microsoft.com/office/2006/metadata/properties" xmlns:xsi="http://www.w3.org/2001/XMLSchema-instance" xmlns:pc="http://schemas.microsoft.com/office/infopath/2007/PartnerControls">
+  <documentManagement>
+    <PublishingExpirationDate xmlns="http://schemas.microsoft.com/sharepoint/v3" xsi:nil="true"/>
+    <PublishingStartDate xmlns="http://schemas.microsoft.com/sharepoint/v3" xsi:nil="true"/>
+  </documentManagement>
+</p:properties>
+</file>
+
+<file path=customXml/item2.xml><?xml version="1.0" encoding="utf-8"?>
+<?mso-contentType ?>
+<FormTemplates xmlns="http://schemas.microsoft.com/sharepoint/v3/contenttype/forms">
+  <Display>DocumentLibraryForm</Display>
+  <Edit>DocumentLibraryForm</Edit>
+  <New>DocumentLibraryForm</New>
+</FormTemplates>
+</file>
+
+<file path=customXml/item3.xml><?xml version="1.0" encoding="utf-8"?>
 <ct:contentTypeSchema xmlns:ct="http://schemas.microsoft.com/office/2006/metadata/contentType" xmlns:ma="http://schemas.microsoft.com/office/2006/metadata/properties/metaAttributes" ct:_="" ma:_="" ma:contentTypeName="Document" ma:contentTypeID="0x01010072AED8885AE0D7479959AAF6DF60077D" ma:contentTypeVersion="1" ma:contentTypeDescription="Create a new document." ma:contentTypeScope="" ma:versionID="f120c2e67c1e744cbca71b9d56e752ff">
   <xsd:schema xmlns:xsd="http://www.w3.org/2001/XMLSchema" xmlns:xs="http://www.w3.org/2001/XMLSchema" xmlns:p="http://schemas.microsoft.com/office/2006/metadata/properties" xmlns:ns1="http://schemas.microsoft.com/sharepoint/v3" targetNamespace="http://schemas.microsoft.com/office/2006/metadata/properties" ma:root="true" ma:fieldsID="ef2aa9ed40e72a78c3822fc753b43e87" ns1:_="">
     <xsd:import namespace="http://schemas.microsoft.com/sharepoint/v3"/>
@@ -11616,38 +12434,18 @@
 </ct:contentTypeSchema>
 </file>
 
-<file path=customXml/item2.xml><?xml version="1.0" encoding="utf-8"?>
-<?mso-contentType ?>
-<FormTemplates xmlns="http://schemas.microsoft.com/sharepoint/v3/contenttype/forms">
-  <Display>DocumentLibraryForm</Display>
-  <Edit>DocumentLibraryForm</Edit>
-  <New>DocumentLibraryForm</New>
-</FormTemplates>
-</file>
-
-<file path=customXml/item3.xml><?xml version="1.0" encoding="utf-8"?>
-<p:properties xmlns:p="http://schemas.microsoft.com/office/2006/metadata/properties" xmlns:xsi="http://www.w3.org/2001/XMLSchema-instance" xmlns:pc="http://schemas.microsoft.com/office/infopath/2007/PartnerControls">
-  <documentManagement>
-    <PublishingExpirationDate xmlns="http://schemas.microsoft.com/sharepoint/v3" xsi:nil="true"/>
-    <PublishingStartDate xmlns="http://schemas.microsoft.com/sharepoint/v3" xsi:nil="true"/>
-  </documentManagement>
-</p:properties>
-</file>
-
 <file path=customXml/itemProps1.xml><?xml version="1.0" encoding="utf-8"?>
-<ds:datastoreItem xmlns:ds="http://schemas.openxmlformats.org/officeDocument/2006/customXml" ds:itemID="{D59172B2-50B2-4CFF-8E98-DBA4457AAD80}">
+<ds:datastoreItem xmlns:ds="http://schemas.openxmlformats.org/officeDocument/2006/customXml" ds:itemID="{25F4DE3E-C40F-4DAB-A3C5-FE9D33130F40}">
   <ds:schemaRefs>
+    <ds:schemaRef ds:uri="http://purl.org/dc/terms/"/>
+    <ds:schemaRef ds:uri="http://schemas.microsoft.com/office/2006/documentManagement/types"/>
+    <ds:schemaRef ds:uri="http://schemas.microsoft.com/office/2006/metadata/properties"/>
     <ds:schemaRef ds:uri="http://purl.org/dc/elements/1.1/"/>
-    <ds:schemaRef ds:uri="http://purl.org/dc/terms/"/>
-    <ds:schemaRef ds:uri="http://schemas.microsoft.com/internal/obd"/>
-    <ds:schemaRef ds:uri="http://schemas.microsoft.com/office/2006/documentManagement/types"/>
-    <ds:schemaRef ds:uri="http://schemas.microsoft.com/office/2006/metadata/contentType"/>
-    <ds:schemaRef ds:uri="http://schemas.microsoft.com/office/2006/metadata/properties"/>
-    <ds:schemaRef ds:uri="http://schemas.microsoft.com/office/2006/metadata/properties/metaAttributes"/>
+    <ds:schemaRef ds:uri="http://www.w3.org/XML/1998/namespace"/>
+    <ds:schemaRef ds:uri="http://purl.org/dc/dcmitype/"/>
     <ds:schemaRef ds:uri="http://schemas.microsoft.com/office/infopath/2007/PartnerControls"/>
+    <ds:schemaRef ds:uri="http://schemas.openxmlformats.org/package/2006/metadata/core-properties"/>
     <ds:schemaRef ds:uri="http://schemas.microsoft.com/sharepoint/v3"/>
-    <ds:schemaRef ds:uri="http://schemas.openxmlformats.org/package/2006/metadata/core-properties"/>
-    <ds:schemaRef ds:uri="http://www.w3.org/2001/XMLSchema"/>
   </ds:schemaRefs>
 </ds:datastoreItem>
 </file>
@@ -11661,17 +12459,19 @@
 </file>
 
 <file path=customXml/itemProps3.xml><?xml version="1.0" encoding="utf-8"?>
-<ds:datastoreItem xmlns:ds="http://schemas.openxmlformats.org/officeDocument/2006/customXml" ds:itemID="{25F4DE3E-C40F-4DAB-A3C5-FE9D33130F40}">
+<ds:datastoreItem xmlns:ds="http://schemas.openxmlformats.org/officeDocument/2006/customXml" ds:itemID="{D59172B2-50B2-4CFF-8E98-DBA4457AAD80}">
   <ds:schemaRefs>
-    <ds:schemaRef ds:uri="http://purl.org/dc/dcmitype/"/>
+    <ds:schemaRef ds:uri="http://schemas.microsoft.com/office/2006/metadata/contentType"/>
+    <ds:schemaRef ds:uri="http://schemas.microsoft.com/office/2006/metadata/properties/metaAttributes"/>
+    <ds:schemaRef ds:uri="http://www.w3.org/2001/XMLSchema"/>
+    <ds:schemaRef ds:uri="http://schemas.microsoft.com/office/2006/metadata/properties"/>
+    <ds:schemaRef ds:uri="http://schemas.microsoft.com/sharepoint/v3"/>
+    <ds:schemaRef ds:uri="http://schemas.microsoft.com/office/2006/documentManagement/types"/>
+    <ds:schemaRef ds:uri="http://schemas.microsoft.com/office/infopath/2007/PartnerControls"/>
+    <ds:schemaRef ds:uri="http://schemas.openxmlformats.org/package/2006/metadata/core-properties"/>
     <ds:schemaRef ds:uri="http://purl.org/dc/elements/1.1/"/>
     <ds:schemaRef ds:uri="http://purl.org/dc/terms/"/>
-    <ds:schemaRef ds:uri="http://schemas.microsoft.com/office/2006/documentManagement/types"/>
-    <ds:schemaRef ds:uri="http://schemas.microsoft.com/office/2006/metadata/properties"/>
-    <ds:schemaRef ds:uri="http://schemas.microsoft.com/office/infopath/2007/PartnerControls"/>
-    <ds:schemaRef ds:uri="http://schemas.microsoft.com/sharepoint/v3"/>
-    <ds:schemaRef ds:uri="http://schemas.openxmlformats.org/package/2006/metadata/core-properties"/>
-    <ds:schemaRef ds:uri="http://www.w3.org/XML/1998/namespace"/>
+    <ds:schemaRef ds:uri="http://schemas.microsoft.com/internal/obd"/>
   </ds:schemaRefs>
 </ds:datastoreItem>
 </file>
